--- a/deliverables/hack-team-05-pursuit-copilot-deck.pptx
+++ b/deliverables/hack-team-05-pursuit-copilot-deck.pptx
@@ -4800,6 +4800,25 @@
                 <a:spcPct val="105000"/>
               </a:lnSpc>
               <a:spcAft>
+                <a:spcPts val="900"/>
+              </a:spcAft>
+            </a:pPr>
+            <a:r>
+              <a:rPr sz="1400" b="0" i="0">
+                <a:solidFill>
+                  <a:srgbClr val="4A5A6E"/>
+                </a:solidFill>
+                <a:latin typeface="Calibri"/>
+              </a:rPr>
+              <a:t>First-draft copy for the opening sections, structured to the client's own required response items.</a:t>
+            </a:r>
+          </a:p>
+          <a:p>
+            <a:pPr algn="l">
+              <a:lnSpc>
+                <a:spcPct val="105000"/>
+              </a:lnSpc>
+              <a:spcAft>
                 <a:spcPts val="0"/>
               </a:spcAft>
             </a:pPr>
@@ -4810,7 +4829,7 @@
                 </a:solidFill>
                 <a:latin typeface="Calibri"/>
               </a:rPr>
-              <a:t>First-draft copy for the opening sections, structured to the client's own required response items.</a:t>
+              <a:t>A Response Action per requirement: what it asks of us.</a:t>
             </a:r>
           </a:p>
         </p:txBody>

--- a/deliverables/hack-team-05-pursuit-copilot-deck.pptx
+++ b/deliverables/hack-team-05-pursuit-copilot-deck.pptx
@@ -3093,17 +3093,219 @@
       <p:grpSpPr/>
       <p:sp>
         <p:nvSpPr>
-          <p:cNvPr id="2" name="Rectangle 1"/>
+          <p:cNvPr id="2" name="TextBox 1"/>
+          <p:cNvSpPr txBox="1"/>
+          <p:nvPr/>
+        </p:nvSpPr>
+        <p:spPr>
+          <a:xfrm>
+            <a:off x="1097280" y="402336"/>
+            <a:ext cx="5486400" cy="237744"/>
+          </a:xfrm>
+          <a:prstGeom prst="rect">
+            <a:avLst/>
+          </a:prstGeom>
+          <a:noFill/>
+        </p:spPr>
+        <p:txBody>
+          <a:bodyPr wrap="square" anchor="t" lIns="0" rIns="0" tIns="0" bIns="0">
+            <a:spAutoFit/>
+          </a:bodyPr>
+          <a:lstStyle/>
+          <a:p>
+            <a:pPr algn="l">
+              <a:lnSpc>
+                <a:spcPct val="106000"/>
+              </a:lnSpc>
+            </a:pPr>
+            <a:r>
+              <a:rPr sz="1200" b="1" i="0" spc="140">
+                <a:solidFill>
+                  <a:srgbClr val="C0642A"/>
+                </a:solidFill>
+                <a:latin typeface="Calibri"/>
+              </a:rPr>
+              <a:t>ABERDEEN HACKATHON  ·  TEAM 05</a:t>
+            </a:r>
+          </a:p>
+        </p:txBody>
+      </p:sp>
+      <p:sp>
+        <p:nvSpPr>
+          <p:cNvPr id="3" name="TextBox 2"/>
+          <p:cNvSpPr txBox="1"/>
+          <p:nvPr/>
+        </p:nvSpPr>
+        <p:spPr>
+          <a:xfrm>
+            <a:off x="1097280" y="676656"/>
+            <a:ext cx="7315200" cy="530316"/>
+          </a:xfrm>
+          <a:prstGeom prst="rect">
+            <a:avLst/>
+          </a:prstGeom>
+          <a:noFill/>
+        </p:spPr>
+        <p:txBody>
+          <a:bodyPr wrap="square" anchor="t" lIns="0" rIns="0" tIns="0" bIns="0">
+            <a:spAutoFit/>
+          </a:bodyPr>
+          <a:lstStyle/>
+          <a:p>
+            <a:pPr algn="l">
+              <a:lnSpc>
+                <a:spcPct val="98000"/>
+              </a:lnSpc>
+            </a:pPr>
+            <a:r>
+              <a:rPr sz="3400" b="1" i="0">
+                <a:solidFill>
+                  <a:srgbClr val="0F2540"/>
+                </a:solidFill>
+                <a:latin typeface="Calibri"/>
+              </a:rPr>
+              <a:t>RFP Pursuit Copilot</a:t>
+            </a:r>
+          </a:p>
+        </p:txBody>
+      </p:sp>
+      <p:sp>
+        <p:nvSpPr>
+          <p:cNvPr id="4" name="Rectangle 3"/>
           <p:cNvSpPr/>
           <p:nvPr/>
         </p:nvSpPr>
         <p:spPr>
           <a:xfrm>
-            <a:off x="0" y="0"/>
-            <a:ext cx="12191695" cy="146304"/>
-          </a:xfrm>
-          <a:prstGeom prst="rect">
-            <a:avLst/>
+            <a:off x="566928" y="918954"/>
+            <a:ext cx="384048" cy="27432"/>
+          </a:xfrm>
+          <a:prstGeom prst="rect">
+            <a:avLst/>
+          </a:prstGeom>
+          <a:solidFill>
+            <a:srgbClr val="C0642A"/>
+          </a:solidFill>
+          <a:ln>
+            <a:noFill/>
+          </a:ln>
+          <a:effectLst/>
+        </p:spPr>
+        <p:style>
+          <a:lnRef idx="1">
+            <a:schemeClr val="accent1"/>
+          </a:lnRef>
+          <a:fillRef idx="3">
+            <a:schemeClr val="accent1"/>
+          </a:fillRef>
+          <a:effectRef idx="2">
+            <a:schemeClr val="accent1"/>
+          </a:effectRef>
+          <a:fontRef idx="minor">
+            <a:schemeClr val="lt1"/>
+          </a:fontRef>
+        </p:style>
+        <p:txBody>
+          <a:bodyPr rtlCol="0" anchor="ctr" wrap="square"/>
+          <a:lstStyle/>
+          <a:p>
+            <a:pPr algn="ctr"/>
+          </a:p>
+        </p:txBody>
+      </p:sp>
+      <p:sp>
+        <p:nvSpPr>
+          <p:cNvPr id="5" name="TextBox 4"/>
+          <p:cNvSpPr txBox="1"/>
+          <p:nvPr/>
+        </p:nvSpPr>
+        <p:spPr>
+          <a:xfrm>
+            <a:off x="1097280" y="1243584"/>
+            <a:ext cx="9692640" cy="254939"/>
+          </a:xfrm>
+          <a:prstGeom prst="rect">
+            <a:avLst/>
+          </a:prstGeom>
+          <a:noFill/>
+        </p:spPr>
+        <p:txBody>
+          <a:bodyPr wrap="square" anchor="t" lIns="0" rIns="0" tIns="0" bIns="0">
+            <a:spAutoFit/>
+          </a:bodyPr>
+          <a:lstStyle/>
+          <a:p>
+            <a:pPr algn="l">
+              <a:lnSpc>
+                <a:spcPct val="110000"/>
+              </a:lnSpc>
+            </a:pPr>
+            <a:r>
+              <a:rPr sz="1400" b="0" i="0">
+                <a:solidFill>
+                  <a:srgbClr val="4A5A6E"/>
+                </a:solidFill>
+                <a:latin typeface="Calibri"/>
+              </a:rPr>
+              <a:t>Turns a 30–80 page RFP into win themes, a pursuit strategy and a first-draft proposal, for the Aberdeen pursuit team.</a:t>
+            </a:r>
+          </a:p>
+        </p:txBody>
+      </p:sp>
+      <p:sp>
+        <p:nvSpPr>
+          <p:cNvPr id="6" name="TextBox 5"/>
+          <p:cNvSpPr txBox="1"/>
+          <p:nvPr/>
+        </p:nvSpPr>
+        <p:spPr>
+          <a:xfrm>
+            <a:off x="11002975" y="6400800"/>
+            <a:ext cx="621792" cy="237744"/>
+          </a:xfrm>
+          <a:prstGeom prst="rect">
+            <a:avLst/>
+          </a:prstGeom>
+          <a:noFill/>
+        </p:spPr>
+        <p:txBody>
+          <a:bodyPr wrap="square" anchor="t" lIns="0" rIns="0" tIns="0" bIns="0">
+            <a:spAutoFit/>
+          </a:bodyPr>
+          <a:lstStyle/>
+          <a:p>
+            <a:pPr algn="r">
+              <a:lnSpc>
+                <a:spcPct val="106000"/>
+              </a:lnSpc>
+            </a:pPr>
+            <a:r>
+              <a:rPr sz="1200" b="0" i="0">
+                <a:solidFill>
+                  <a:srgbClr val="4A5A6E"/>
+                </a:solidFill>
+                <a:latin typeface="Calibri"/>
+              </a:rPr>
+              <a:t>1 / 4</a:t>
+            </a:r>
+          </a:p>
+        </p:txBody>
+      </p:sp>
+      <p:sp>
+        <p:nvSpPr>
+          <p:cNvPr id="7" name="Rounded Rectangle 6"/>
+          <p:cNvSpPr/>
+          <p:nvPr/>
+        </p:nvSpPr>
+        <p:spPr>
+          <a:xfrm>
+            <a:off x="566928" y="2395728"/>
+            <a:ext cx="6803136" cy="274320"/>
+          </a:xfrm>
+          <a:prstGeom prst="roundRect">
+            <a:avLst>
+              <a:gd name="adj" fmla="val 20000"/>
+            </a:avLst>
           </a:prstGeom>
           <a:solidFill>
             <a:srgbClr val="0F2540"/>
@@ -3137,14 +3339,14 @@
       </p:sp>
       <p:sp>
         <p:nvSpPr>
-          <p:cNvPr id="3" name="TextBox 2"/>
+          <p:cNvPr id="8" name="TextBox 7"/>
           <p:cNvSpPr txBox="1"/>
           <p:nvPr/>
         </p:nvSpPr>
         <p:spPr>
           <a:xfrm>
-            <a:off x="566928" y="502920"/>
-            <a:ext cx="11055096" cy="237744"/>
+            <a:off x="804672" y="2436844"/>
+            <a:ext cx="6382512" cy="210375"/>
           </a:xfrm>
           <a:prstGeom prst="rect">
             <a:avLst/>
@@ -3157,29 +3359,33 @@
           </a:bodyPr>
           <a:lstStyle/>
           <a:p>
-            <a:pPr algn="l"/>
-            <a:r>
-              <a:rPr sz="1150" b="1" i="0" spc="140">
-                <a:solidFill>
-                  <a:srgbClr val="C0642A"/>
-                </a:solidFill>
-                <a:latin typeface="Calibri"/>
-              </a:rPr>
-              <a:t>ABERDEEN HACKATHON  ·  TEAM 05</a:t>
-            </a:r>
-          </a:p>
-        </p:txBody>
-      </p:sp>
-      <p:sp>
-        <p:nvSpPr>
-          <p:cNvPr id="4" name="TextBox 3"/>
+            <a:pPr algn="l">
+              <a:lnSpc>
+                <a:spcPct val="100000"/>
+              </a:lnSpc>
+            </a:pPr>
+            <a:r>
+              <a:rPr sz="1250" b="1" i="0" spc="60">
+                <a:solidFill>
+                  <a:srgbClr val="FFFFFF"/>
+                </a:solidFill>
+                <a:latin typeface="Calibri"/>
+              </a:rPr>
+              <a:t>The Problem</a:t>
+            </a:r>
+          </a:p>
+        </p:txBody>
+      </p:sp>
+      <p:sp>
+        <p:nvSpPr>
+          <p:cNvPr id="9" name="TextBox 8"/>
           <p:cNvSpPr txBox="1"/>
           <p:nvPr/>
         </p:nvSpPr>
         <p:spPr>
           <a:xfrm>
-            <a:off x="566928" y="786384"/>
-            <a:ext cx="7863840" cy="640080"/>
+            <a:off x="1042416" y="2761488"/>
+            <a:ext cx="6254496" cy="474380"/>
           </a:xfrm>
           <a:prstGeom prst="rect">
             <a:avLst/>
@@ -3194,31 +3400,40 @@
           <a:p>
             <a:pPr algn="l">
               <a:lnSpc>
-                <a:spcPct val="95000"/>
+                <a:spcPct val="106000"/>
               </a:lnSpc>
             </a:pPr>
             <a:r>
-              <a:rPr sz="4000" b="1" i="0">
-                <a:solidFill>
-                  <a:srgbClr val="0F2540"/>
-                </a:solidFill>
-                <a:latin typeface="Calibri"/>
-              </a:rPr>
-              <a:t>RFP Pursuit Copilot</a:t>
-            </a:r>
-          </a:p>
-        </p:txBody>
-      </p:sp>
-      <p:sp>
-        <p:nvSpPr>
-          <p:cNvPr id="5" name="TextBox 4"/>
+              <a:rPr sz="1400" b="1" i="0">
+                <a:solidFill>
+                  <a:srgbClr val="1A2733"/>
+                </a:solidFill>
+                <a:latin typeface="Calibri"/>
+              </a:rPr>
+              <a:t>Seven days to respond.</a:t>
+            </a:r>
+            <a:r>
+              <a:rPr sz="1400" b="0" i="0">
+                <a:solidFill>
+                  <a:srgbClr val="1A2733"/>
+                </a:solidFill>
+                <a:latin typeface="Calibri"/>
+              </a:rPr>
+              <a:t> The first 48 hours go to structure and boilerplate, not to the client.</a:t>
+            </a:r>
+          </a:p>
+        </p:txBody>
+      </p:sp>
+      <p:sp>
+        <p:nvSpPr>
+          <p:cNvPr id="10" name="TextBox 9"/>
           <p:cNvSpPr txBox="1"/>
           <p:nvPr/>
         </p:nvSpPr>
         <p:spPr>
           <a:xfrm>
-            <a:off x="566928" y="1481328"/>
-            <a:ext cx="8503920" cy="585216"/>
+            <a:off x="1042416" y="3299876"/>
+            <a:ext cx="6254496" cy="474380"/>
           </a:xfrm>
           <a:prstGeom prst="rect">
             <a:avLst/>
@@ -3233,31 +3448,656 @@
           <a:p>
             <a:pPr algn="l">
               <a:lnSpc>
-                <a:spcPct val="110000"/>
+                <a:spcPct val="106000"/>
               </a:lnSpc>
             </a:pPr>
             <a:r>
-              <a:rPr sz="1500" b="0" i="0">
-                <a:solidFill>
-                  <a:srgbClr val="4A5A6E"/>
-                </a:solidFill>
-                <a:latin typeface="Calibri"/>
-              </a:rPr>
-              <a:t>Turns a 30–80 page RFP into win themes, a pursuit strategy and a first-draft proposal — for the Aberdeen pursuit team.</a:t>
-            </a:r>
-          </a:p>
-        </p:txBody>
-      </p:sp>
-      <p:sp>
-        <p:nvSpPr>
-          <p:cNvPr id="6" name="Rectangle 5"/>
+              <a:rPr sz="1400" b="1" i="0">
+                <a:solidFill>
+                  <a:srgbClr val="1A2733"/>
+                </a:solidFill>
+                <a:latin typeface="Calibri"/>
+              </a:rPr>
+              <a:t>Every bidder sounds the same.</a:t>
+            </a:r>
+            <a:r>
+              <a:rPr sz="1400" b="0" i="0">
+                <a:solidFill>
+                  <a:srgbClr val="1A2733"/>
+                </a:solidFill>
+                <a:latin typeface="Calibri"/>
+              </a:rPr>
+              <a:t> Rivals send similar credentials and the same generic approach.</a:t>
+            </a:r>
+          </a:p>
+        </p:txBody>
+      </p:sp>
+      <p:sp>
+        <p:nvSpPr>
+          <p:cNvPr id="11" name="TextBox 10"/>
+          <p:cNvSpPr txBox="1"/>
+          <p:nvPr/>
+        </p:nvSpPr>
+        <p:spPr>
+          <a:xfrm>
+            <a:off x="1042416" y="3838265"/>
+            <a:ext cx="6254496" cy="474380"/>
+          </a:xfrm>
+          <a:prstGeom prst="rect">
+            <a:avLst/>
+          </a:prstGeom>
+          <a:noFill/>
+        </p:spPr>
+        <p:txBody>
+          <a:bodyPr wrap="square" anchor="t" lIns="0" rIns="0" tIns="0" bIns="0">
+            <a:spAutoFit/>
+          </a:bodyPr>
+          <a:lstStyle/>
+          <a:p>
+            <a:pPr algn="l">
+              <a:lnSpc>
+                <a:spcPct val="106000"/>
+              </a:lnSpc>
+            </a:pPr>
+            <a:r>
+              <a:rPr sz="1400" b="1" i="0">
+                <a:solidFill>
+                  <a:srgbClr val="1A2733"/>
+                </a:solidFill>
+                <a:latin typeface="Calibri"/>
+              </a:rPr>
+              <a:t>The scoring punishes it.</a:t>
+            </a:r>
+            <a:r>
+              <a:rPr sz="1400" b="0" i="0">
+                <a:solidFill>
+                  <a:srgbClr val="1A2733"/>
+                </a:solidFill>
+                <a:latin typeface="Calibri"/>
+              </a:rPr>
+              <a:t> Clients grade demonstrated understanding above capability lists.</a:t>
+            </a:r>
+          </a:p>
+        </p:txBody>
+      </p:sp>
+      <p:sp>
+        <p:nvSpPr>
+          <p:cNvPr id="12" name="Rectangle 11"/>
           <p:cNvSpPr/>
           <p:nvPr/>
         </p:nvSpPr>
         <p:spPr>
           <a:xfrm>
-            <a:off x="566928" y="2139696"/>
-            <a:ext cx="1371600" cy="41148"/>
+            <a:off x="816559" y="2715768"/>
+            <a:ext cx="12801" cy="1236520"/>
+          </a:xfrm>
+          <a:prstGeom prst="rect">
+            <a:avLst/>
+          </a:prstGeom>
+          <a:solidFill>
+            <a:srgbClr val="D3DAE2"/>
+          </a:solidFill>
+          <a:ln>
+            <a:noFill/>
+          </a:ln>
+          <a:effectLst/>
+        </p:spPr>
+        <p:style>
+          <a:lnRef idx="1">
+            <a:schemeClr val="accent1"/>
+          </a:lnRef>
+          <a:fillRef idx="3">
+            <a:schemeClr val="accent1"/>
+          </a:fillRef>
+          <a:effectRef idx="2">
+            <a:schemeClr val="accent1"/>
+          </a:effectRef>
+          <a:fontRef idx="minor">
+            <a:schemeClr val="lt1"/>
+          </a:fontRef>
+        </p:style>
+        <p:txBody>
+          <a:bodyPr rtlCol="0" anchor="ctr" wrap="square"/>
+          <a:lstStyle/>
+          <a:p>
+            <a:pPr algn="ctr"/>
+          </a:p>
+        </p:txBody>
+      </p:sp>
+      <p:sp>
+        <p:nvSpPr>
+          <p:cNvPr id="13" name="Oval 12"/>
+          <p:cNvSpPr/>
+          <p:nvPr/>
+        </p:nvSpPr>
+        <p:spPr>
+          <a:xfrm>
+            <a:off x="761238" y="2813789"/>
+            <a:ext cx="123444" cy="123444"/>
+          </a:xfrm>
+          <a:prstGeom prst="ellipse">
+            <a:avLst/>
+          </a:prstGeom>
+          <a:solidFill>
+            <a:srgbClr val="FFFFFF"/>
+          </a:solidFill>
+          <a:ln w="19050">
+            <a:solidFill>
+              <a:srgbClr val="C0642A"/>
+            </a:solidFill>
+          </a:ln>
+          <a:effectLst/>
+        </p:spPr>
+        <p:style>
+          <a:lnRef idx="1">
+            <a:schemeClr val="accent1"/>
+          </a:lnRef>
+          <a:fillRef idx="3">
+            <a:schemeClr val="accent1"/>
+          </a:fillRef>
+          <a:effectRef idx="2">
+            <a:schemeClr val="accent1"/>
+          </a:effectRef>
+          <a:fontRef idx="minor">
+            <a:schemeClr val="lt1"/>
+          </a:fontRef>
+        </p:style>
+        <p:txBody>
+          <a:bodyPr rtlCol="0" anchor="ctr" wrap="square"/>
+          <a:lstStyle/>
+          <a:p>
+            <a:pPr algn="ctr"/>
+          </a:p>
+        </p:txBody>
+      </p:sp>
+      <p:sp>
+        <p:nvSpPr>
+          <p:cNvPr id="14" name="Oval 13"/>
+          <p:cNvSpPr/>
+          <p:nvPr/>
+        </p:nvSpPr>
+        <p:spPr>
+          <a:xfrm>
+            <a:off x="761238" y="3352177"/>
+            <a:ext cx="123444" cy="123444"/>
+          </a:xfrm>
+          <a:prstGeom prst="ellipse">
+            <a:avLst/>
+          </a:prstGeom>
+          <a:solidFill>
+            <a:srgbClr val="FFFFFF"/>
+          </a:solidFill>
+          <a:ln w="19050">
+            <a:solidFill>
+              <a:srgbClr val="C0642A"/>
+            </a:solidFill>
+          </a:ln>
+          <a:effectLst/>
+        </p:spPr>
+        <p:style>
+          <a:lnRef idx="1">
+            <a:schemeClr val="accent1"/>
+          </a:lnRef>
+          <a:fillRef idx="3">
+            <a:schemeClr val="accent1"/>
+          </a:fillRef>
+          <a:effectRef idx="2">
+            <a:schemeClr val="accent1"/>
+          </a:effectRef>
+          <a:fontRef idx="minor">
+            <a:schemeClr val="lt1"/>
+          </a:fontRef>
+        </p:style>
+        <p:txBody>
+          <a:bodyPr rtlCol="0" anchor="ctr" wrap="square"/>
+          <a:lstStyle/>
+          <a:p>
+            <a:pPr algn="ctr"/>
+          </a:p>
+        </p:txBody>
+      </p:sp>
+      <p:sp>
+        <p:nvSpPr>
+          <p:cNvPr id="15" name="Oval 14"/>
+          <p:cNvSpPr/>
+          <p:nvPr/>
+        </p:nvSpPr>
+        <p:spPr>
+          <a:xfrm>
+            <a:off x="761238" y="3890566"/>
+            <a:ext cx="123444" cy="123444"/>
+          </a:xfrm>
+          <a:prstGeom prst="ellipse">
+            <a:avLst/>
+          </a:prstGeom>
+          <a:solidFill>
+            <a:srgbClr val="FFFFFF"/>
+          </a:solidFill>
+          <a:ln w="19050">
+            <a:solidFill>
+              <a:srgbClr val="C0642A"/>
+            </a:solidFill>
+          </a:ln>
+          <a:effectLst/>
+        </p:spPr>
+        <p:style>
+          <a:lnRef idx="1">
+            <a:schemeClr val="accent1"/>
+          </a:lnRef>
+          <a:fillRef idx="3">
+            <a:schemeClr val="accent1"/>
+          </a:fillRef>
+          <a:effectRef idx="2">
+            <a:schemeClr val="accent1"/>
+          </a:effectRef>
+          <a:fontRef idx="minor">
+            <a:schemeClr val="lt1"/>
+          </a:fontRef>
+        </p:style>
+        <p:txBody>
+          <a:bodyPr rtlCol="0" anchor="ctr" wrap="square"/>
+          <a:lstStyle/>
+          <a:p>
+            <a:pPr algn="ctr"/>
+          </a:p>
+        </p:txBody>
+      </p:sp>
+      <p:sp>
+        <p:nvSpPr>
+          <p:cNvPr id="16" name="Rounded Rectangle 15"/>
+          <p:cNvSpPr/>
+          <p:nvPr/>
+        </p:nvSpPr>
+        <p:spPr>
+          <a:xfrm>
+            <a:off x="566928" y="4495525"/>
+            <a:ext cx="6803136" cy="274320"/>
+          </a:xfrm>
+          <a:prstGeom prst="roundRect">
+            <a:avLst>
+              <a:gd name="adj" fmla="val 20000"/>
+            </a:avLst>
+          </a:prstGeom>
+          <a:solidFill>
+            <a:srgbClr val="0F2540"/>
+          </a:solidFill>
+          <a:ln>
+            <a:noFill/>
+          </a:ln>
+          <a:effectLst/>
+        </p:spPr>
+        <p:style>
+          <a:lnRef idx="1">
+            <a:schemeClr val="accent1"/>
+          </a:lnRef>
+          <a:fillRef idx="3">
+            <a:schemeClr val="accent1"/>
+          </a:fillRef>
+          <a:effectRef idx="2">
+            <a:schemeClr val="accent1"/>
+          </a:effectRef>
+          <a:fontRef idx="minor">
+            <a:schemeClr val="lt1"/>
+          </a:fontRef>
+        </p:style>
+        <p:txBody>
+          <a:bodyPr rtlCol="0" anchor="ctr" wrap="square"/>
+          <a:lstStyle/>
+          <a:p>
+            <a:pPr algn="ctr"/>
+          </a:p>
+        </p:txBody>
+      </p:sp>
+      <p:sp>
+        <p:nvSpPr>
+          <p:cNvPr id="17" name="TextBox 16"/>
+          <p:cNvSpPr txBox="1"/>
+          <p:nvPr/>
+        </p:nvSpPr>
+        <p:spPr>
+          <a:xfrm>
+            <a:off x="804672" y="4536641"/>
+            <a:ext cx="6382512" cy="210375"/>
+          </a:xfrm>
+          <a:prstGeom prst="rect">
+            <a:avLst/>
+          </a:prstGeom>
+          <a:noFill/>
+        </p:spPr>
+        <p:txBody>
+          <a:bodyPr wrap="square" anchor="t" lIns="0" rIns="0" tIns="0" bIns="0">
+            <a:spAutoFit/>
+          </a:bodyPr>
+          <a:lstStyle/>
+          <a:p>
+            <a:pPr algn="l">
+              <a:lnSpc>
+                <a:spcPct val="100000"/>
+              </a:lnSpc>
+            </a:pPr>
+            <a:r>
+              <a:rPr sz="1250" b="1" i="0" spc="60">
+                <a:solidFill>
+                  <a:srgbClr val="FFFFFF"/>
+                </a:solidFill>
+                <a:latin typeface="Calibri"/>
+              </a:rPr>
+              <a:t>Who It's For</a:t>
+            </a:r>
+          </a:p>
+        </p:txBody>
+      </p:sp>
+      <p:sp>
+        <p:nvSpPr>
+          <p:cNvPr id="18" name="TextBox 17"/>
+          <p:cNvSpPr txBox="1"/>
+          <p:nvPr/>
+        </p:nvSpPr>
+        <p:spPr>
+          <a:xfrm>
+            <a:off x="1042416" y="4861285"/>
+            <a:ext cx="6254496" cy="246334"/>
+          </a:xfrm>
+          <a:prstGeom prst="rect">
+            <a:avLst/>
+          </a:prstGeom>
+          <a:noFill/>
+        </p:spPr>
+        <p:txBody>
+          <a:bodyPr wrap="square" anchor="t" lIns="0" rIns="0" tIns="0" bIns="0">
+            <a:spAutoFit/>
+          </a:bodyPr>
+          <a:lstStyle/>
+          <a:p>
+            <a:pPr algn="l">
+              <a:lnSpc>
+                <a:spcPct val="106000"/>
+              </a:lnSpc>
+            </a:pPr>
+            <a:r>
+              <a:rPr sz="1400" b="0" i="0">
+                <a:solidFill>
+                  <a:srgbClr val="1A2733"/>
+                </a:solidFill>
+                <a:latin typeface="Calibri"/>
+              </a:rPr>
+              <a:t>The BD lead, partner and SME sharing hours 0–48 of a seven-day window.</a:t>
+            </a:r>
+          </a:p>
+        </p:txBody>
+      </p:sp>
+      <p:sp>
+        <p:nvSpPr>
+          <p:cNvPr id="19" name="Rectangle 18"/>
+          <p:cNvSpPr/>
+          <p:nvPr/>
+        </p:nvSpPr>
+        <p:spPr>
+          <a:xfrm>
+            <a:off x="816559" y="4815565"/>
+            <a:ext cx="12801" cy="159743"/>
+          </a:xfrm>
+          <a:prstGeom prst="rect">
+            <a:avLst/>
+          </a:prstGeom>
+          <a:solidFill>
+            <a:srgbClr val="D3DAE2"/>
+          </a:solidFill>
+          <a:ln>
+            <a:noFill/>
+          </a:ln>
+          <a:effectLst/>
+        </p:spPr>
+        <p:style>
+          <a:lnRef idx="1">
+            <a:schemeClr val="accent1"/>
+          </a:lnRef>
+          <a:fillRef idx="3">
+            <a:schemeClr val="accent1"/>
+          </a:fillRef>
+          <a:effectRef idx="2">
+            <a:schemeClr val="accent1"/>
+          </a:effectRef>
+          <a:fontRef idx="minor">
+            <a:schemeClr val="lt1"/>
+          </a:fontRef>
+        </p:style>
+        <p:txBody>
+          <a:bodyPr rtlCol="0" anchor="ctr" wrap="square"/>
+          <a:lstStyle/>
+          <a:p>
+            <a:pPr algn="ctr"/>
+          </a:p>
+        </p:txBody>
+      </p:sp>
+      <p:sp>
+        <p:nvSpPr>
+          <p:cNvPr id="20" name="Oval 19"/>
+          <p:cNvSpPr/>
+          <p:nvPr/>
+        </p:nvSpPr>
+        <p:spPr>
+          <a:xfrm>
+            <a:off x="761238" y="4913586"/>
+            <a:ext cx="123444" cy="123444"/>
+          </a:xfrm>
+          <a:prstGeom prst="ellipse">
+            <a:avLst/>
+          </a:prstGeom>
+          <a:solidFill>
+            <a:srgbClr val="FFFFFF"/>
+          </a:solidFill>
+          <a:ln w="19050">
+            <a:solidFill>
+              <a:srgbClr val="C0642A"/>
+            </a:solidFill>
+          </a:ln>
+          <a:effectLst/>
+        </p:spPr>
+        <p:style>
+          <a:lnRef idx="1">
+            <a:schemeClr val="accent1"/>
+          </a:lnRef>
+          <a:fillRef idx="3">
+            <a:schemeClr val="accent1"/>
+          </a:fillRef>
+          <a:effectRef idx="2">
+            <a:schemeClr val="accent1"/>
+          </a:effectRef>
+          <a:fontRef idx="minor">
+            <a:schemeClr val="lt1"/>
+          </a:fontRef>
+        </p:style>
+        <p:txBody>
+          <a:bodyPr rtlCol="0" anchor="ctr" wrap="square"/>
+          <a:lstStyle/>
+          <a:p>
+            <a:pPr algn="ctr"/>
+          </a:p>
+        </p:txBody>
+      </p:sp>
+      <p:sp>
+        <p:nvSpPr>
+          <p:cNvPr id="21" name="Rounded Rectangle 20"/>
+          <p:cNvSpPr/>
+          <p:nvPr/>
+        </p:nvSpPr>
+        <p:spPr>
+          <a:xfrm>
+            <a:off x="7699248" y="2395728"/>
+            <a:ext cx="3922775" cy="274320"/>
+          </a:xfrm>
+          <a:prstGeom prst="roundRect">
+            <a:avLst>
+              <a:gd name="adj" fmla="val 20000"/>
+            </a:avLst>
+          </a:prstGeom>
+          <a:solidFill>
+            <a:srgbClr val="0F2540"/>
+          </a:solidFill>
+          <a:ln>
+            <a:noFill/>
+          </a:ln>
+          <a:effectLst/>
+        </p:spPr>
+        <p:style>
+          <a:lnRef idx="1">
+            <a:schemeClr val="accent1"/>
+          </a:lnRef>
+          <a:fillRef idx="3">
+            <a:schemeClr val="accent1"/>
+          </a:fillRef>
+          <a:effectRef idx="2">
+            <a:schemeClr val="accent1"/>
+          </a:effectRef>
+          <a:fontRef idx="minor">
+            <a:schemeClr val="lt1"/>
+          </a:fontRef>
+        </p:style>
+        <p:txBody>
+          <a:bodyPr rtlCol="0" anchor="ctr" wrap="square"/>
+          <a:lstStyle/>
+          <a:p>
+            <a:pPr algn="ctr"/>
+          </a:p>
+        </p:txBody>
+      </p:sp>
+      <p:sp>
+        <p:nvSpPr>
+          <p:cNvPr id="22" name="TextBox 21"/>
+          <p:cNvSpPr txBox="1"/>
+          <p:nvPr/>
+        </p:nvSpPr>
+        <p:spPr>
+          <a:xfrm>
+            <a:off x="7936992" y="2436844"/>
+            <a:ext cx="3502151" cy="210375"/>
+          </a:xfrm>
+          <a:prstGeom prst="rect">
+            <a:avLst/>
+          </a:prstGeom>
+          <a:noFill/>
+        </p:spPr>
+        <p:txBody>
+          <a:bodyPr wrap="square" anchor="t" lIns="0" rIns="0" tIns="0" bIns="0">
+            <a:spAutoFit/>
+          </a:bodyPr>
+          <a:lstStyle/>
+          <a:p>
+            <a:pPr algn="l">
+              <a:lnSpc>
+                <a:spcPct val="100000"/>
+              </a:lnSpc>
+            </a:pPr>
+            <a:r>
+              <a:rPr sz="1250" b="1" i="0" spc="60">
+                <a:solidFill>
+                  <a:srgbClr val="FFFFFF"/>
+                </a:solidFill>
+                <a:latin typeface="Calibri"/>
+              </a:rPr>
+              <a:t>What The Client Wrote Down</a:t>
+            </a:r>
+          </a:p>
+        </p:txBody>
+      </p:sp>
+      <p:sp>
+        <p:nvSpPr>
+          <p:cNvPr id="23" name="TextBox 22"/>
+          <p:cNvSpPr txBox="1"/>
+          <p:nvPr/>
+        </p:nvSpPr>
+        <p:spPr>
+          <a:xfrm>
+            <a:off x="8174736" y="2761488"/>
+            <a:ext cx="3374135" cy="832739"/>
+          </a:xfrm>
+          <a:prstGeom prst="rect">
+            <a:avLst/>
+          </a:prstGeom>
+          <a:noFill/>
+        </p:spPr>
+        <p:txBody>
+          <a:bodyPr wrap="square" anchor="t" lIns="0" rIns="0" tIns="0" bIns="0">
+            <a:spAutoFit/>
+          </a:bodyPr>
+          <a:lstStyle/>
+          <a:p>
+            <a:pPr algn="l">
+              <a:lnSpc>
+                <a:spcPct val="106000"/>
+              </a:lnSpc>
+            </a:pPr>
+            <a:r>
+              <a:rPr sz="1250" b="0" i="1">
+                <a:solidFill>
+                  <a:srgbClr val="1A2733"/>
+                </a:solidFill>
+                <a:latin typeface="Georgia"/>
+              </a:rPr>
+              <a:t>“Wayfarer Market Co. puts 30% of its score on Understanding of Brand &amp; Crew Culture — and explicitly rejects the cut-costs, loyalty-program, more-ads playbook.”</a:t>
+            </a:r>
+          </a:p>
+        </p:txBody>
+      </p:sp>
+      <p:sp>
+        <p:nvSpPr>
+          <p:cNvPr id="24" name="TextBox 23"/>
+          <p:cNvSpPr txBox="1"/>
+          <p:nvPr/>
+        </p:nvSpPr>
+        <p:spPr>
+          <a:xfrm>
+            <a:off x="8595360" y="3658235"/>
+            <a:ext cx="2953511" cy="629126"/>
+          </a:xfrm>
+          <a:prstGeom prst="rect">
+            <a:avLst/>
+          </a:prstGeom>
+          <a:noFill/>
+        </p:spPr>
+        <p:txBody>
+          <a:bodyPr wrap="square" anchor="t" lIns="0" rIns="0" tIns="0" bIns="0">
+            <a:spAutoFit/>
+          </a:bodyPr>
+          <a:lstStyle/>
+          <a:p>
+            <a:pPr algn="l">
+              <a:lnSpc>
+                <a:spcPct val="106000"/>
+              </a:lnSpc>
+            </a:pPr>
+            <a:r>
+              <a:rPr sz="1250" b="1" i="0">
+                <a:solidFill>
+                  <a:srgbClr val="33414F"/>
+                </a:solidFill>
+                <a:latin typeface="Calibri"/>
+              </a:rPr>
+              <a:t>Read:</a:t>
+            </a:r>
+            <a:r>
+              <a:rPr sz="1250" b="0" i="0">
+                <a:solidFill>
+                  <a:srgbClr val="33414F"/>
+                </a:solidFill>
+                <a:latin typeface="Calibri"/>
+              </a:rPr>
+              <a:t> the generic proposal does not just underwhelm. It loses on the criteria the client wrote down.</a:t>
+            </a:r>
+          </a:p>
+        </p:txBody>
+      </p:sp>
+      <p:sp>
+        <p:nvSpPr>
+          <p:cNvPr id="25" name="Rectangle 24"/>
+          <p:cNvSpPr/>
+          <p:nvPr/>
+        </p:nvSpPr>
+        <p:spPr>
+          <a:xfrm>
+            <a:off x="8412480" y="3725751"/>
+            <a:ext cx="68580" cy="68580"/>
           </a:xfrm>
           <a:prstGeom prst="rect">
             <a:avLst/>
@@ -3294,64 +4134,23 @@
       </p:sp>
       <p:sp>
         <p:nvSpPr>
-          <p:cNvPr id="7" name="TextBox 6"/>
-          <p:cNvSpPr txBox="1"/>
-          <p:nvPr/>
-        </p:nvSpPr>
-        <p:spPr>
-          <a:xfrm>
-            <a:off x="566928" y="2395728"/>
-            <a:ext cx="10424160" cy="457200"/>
-          </a:xfrm>
-          <a:prstGeom prst="rect">
-            <a:avLst/>
-          </a:prstGeom>
-          <a:noFill/>
-        </p:spPr>
-        <p:txBody>
-          <a:bodyPr wrap="square" anchor="t" lIns="0" rIns="0" tIns="0" bIns="0">
-            <a:spAutoFit/>
-          </a:bodyPr>
-          <a:lstStyle/>
-          <a:p>
-            <a:pPr algn="l">
-              <a:lnSpc>
-                <a:spcPct val="98000"/>
-              </a:lnSpc>
-            </a:pPr>
-            <a:r>
-              <a:rPr sz="2700" b="1" i="0">
-                <a:solidFill>
-                  <a:srgbClr val="0F2540"/>
-                </a:solidFill>
-                <a:latin typeface="Calibri"/>
-              </a:rPr>
-              <a:t>Seven days to respond. And every bidder sounds the same.</a:t>
-            </a:r>
-          </a:p>
-        </p:txBody>
-      </p:sp>
-      <p:sp>
-        <p:nvSpPr>
-          <p:cNvPr id="8" name="Rectangle 7"/>
+          <p:cNvPr id="26" name="Rectangle 25"/>
           <p:cNvSpPr/>
           <p:nvPr/>
         </p:nvSpPr>
         <p:spPr>
           <a:xfrm>
-            <a:off x="566928" y="3054096"/>
-            <a:ext cx="3502152" cy="1298448"/>
+            <a:off x="7948879" y="2715768"/>
+            <a:ext cx="12801" cy="147526"/>
           </a:xfrm>
           <a:prstGeom prst="rect">
             <a:avLst/>
           </a:prstGeom>
           <a:solidFill>
-            <a:srgbClr val="F1F4F7"/>
+            <a:srgbClr val="D3DAE2"/>
           </a:solidFill>
-          <a:ln w="9525">
-            <a:solidFill>
-              <a:srgbClr val="D8DEE6"/>
-            </a:solidFill>
+          <a:ln>
+            <a:noFill/>
           </a:ln>
           <a:effectLst/>
         </p:spPr>
@@ -3379,82 +4178,24 @@
       </p:sp>
       <p:sp>
         <p:nvSpPr>
-          <p:cNvPr id="9" name="TextBox 8"/>
-          <p:cNvSpPr txBox="1"/>
-          <p:nvPr/>
-        </p:nvSpPr>
-        <p:spPr>
-          <a:xfrm>
-            <a:off x="804672" y="3255264"/>
-            <a:ext cx="3026664" cy="896112"/>
-          </a:xfrm>
-          <a:prstGeom prst="rect">
-            <a:avLst/>
-          </a:prstGeom>
-          <a:noFill/>
-        </p:spPr>
-        <p:txBody>
-          <a:bodyPr wrap="square" anchor="t" lIns="0" rIns="0" tIns="0" bIns="0">
-            <a:spAutoFit/>
-          </a:bodyPr>
-          <a:lstStyle/>
-          <a:p>
-            <a:pPr algn="l">
-              <a:spcAft>
-                <a:spcPts val="700"/>
-              </a:spcAft>
-            </a:pPr>
-            <a:r>
-              <a:rPr sz="1300" b="1" i="0" spc="80">
-                <a:solidFill>
-                  <a:srgbClr val="0F2540"/>
-                </a:solidFill>
-                <a:latin typeface="Calibri"/>
-              </a:rPr>
-              <a:t>THE CLOCK</a:t>
-            </a:r>
-          </a:p>
-          <a:p>
-            <a:pPr algn="l">
-              <a:lnSpc>
-                <a:spcPct val="105000"/>
-              </a:lnSpc>
-              <a:spcAft>
-                <a:spcPts val="0"/>
-              </a:spcAft>
-            </a:pPr>
-            <a:r>
-              <a:rPr sz="1400" b="0" i="0">
-                <a:solidFill>
-                  <a:srgbClr val="4A5A6E"/>
-                </a:solidFill>
-                <a:latin typeface="Calibri"/>
-              </a:rPr>
-              <a:t>The first 48 hours go to structure and boilerplate, not to the client.</a:t>
-            </a:r>
-          </a:p>
-        </p:txBody>
-      </p:sp>
-      <p:sp>
-        <p:nvSpPr>
-          <p:cNvPr id="10" name="Rectangle 9"/>
+          <p:cNvPr id="27" name="Oval 26"/>
           <p:cNvSpPr/>
           <p:nvPr/>
         </p:nvSpPr>
         <p:spPr>
           <a:xfrm>
-            <a:off x="4343400" y="3054096"/>
-            <a:ext cx="3502152" cy="1298448"/>
-          </a:xfrm>
-          <a:prstGeom prst="rect">
+            <a:off x="7893557" y="2801572"/>
+            <a:ext cx="123444" cy="123444"/>
+          </a:xfrm>
+          <a:prstGeom prst="ellipse">
             <a:avLst/>
           </a:prstGeom>
           <a:solidFill>
-            <a:srgbClr val="F1F4F7"/>
+            <a:srgbClr val="FFFFFF"/>
           </a:solidFill>
-          <a:ln w="9525">
+          <a:ln w="19050">
             <a:solidFill>
-              <a:srgbClr val="D8DEE6"/>
+              <a:srgbClr val="C0642A"/>
             </a:solidFill>
           </a:ln>
           <a:effectLst/>
@@ -3483,14 +4224,14 @@
       </p:sp>
       <p:sp>
         <p:nvSpPr>
-          <p:cNvPr id="11" name="TextBox 10"/>
+          <p:cNvPr id="28" name="TextBox 27"/>
           <p:cNvSpPr txBox="1"/>
           <p:nvPr/>
         </p:nvSpPr>
         <p:spPr>
           <a:xfrm>
-            <a:off x="4581144" y="3255264"/>
-            <a:ext cx="3026664" cy="896112"/>
+            <a:off x="566928" y="6400800"/>
+            <a:ext cx="5852160" cy="237744"/>
           </a:xfrm>
           <a:prstGeom prst="rect">
             <a:avLst/>
@@ -3504,351 +4245,12 @@
           <a:lstStyle/>
           <a:p>
             <a:pPr algn="l">
-              <a:spcAft>
-                <a:spcPts val="700"/>
-              </a:spcAft>
-            </a:pPr>
-            <a:r>
-              <a:rPr sz="1300" b="1" i="0" spc="80">
-                <a:solidFill>
-                  <a:srgbClr val="0F2540"/>
-                </a:solidFill>
-                <a:latin typeface="Calibri"/>
-              </a:rPr>
-              <a:t>THE SAMENESS</a:t>
-            </a:r>
-          </a:p>
-          <a:p>
-            <a:pPr algn="l">
               <a:lnSpc>
-                <a:spcPct val="105000"/>
-              </a:lnSpc>
-              <a:spcAft>
-                <a:spcPts val="0"/>
-              </a:spcAft>
-            </a:pPr>
-            <a:r>
-              <a:rPr sz="1400" b="0" i="0">
-                <a:solidFill>
-                  <a:srgbClr val="4A5A6E"/>
-                </a:solidFill>
-                <a:latin typeface="Calibri"/>
-              </a:rPr>
-              <a:t>Rivals send similar credentials and the same generic approach.</a:t>
-            </a:r>
-          </a:p>
-        </p:txBody>
-      </p:sp>
-      <p:sp>
-        <p:nvSpPr>
-          <p:cNvPr id="12" name="Rectangle 11"/>
-          <p:cNvSpPr/>
-          <p:nvPr/>
-        </p:nvSpPr>
-        <p:spPr>
-          <a:xfrm>
-            <a:off x="8119872" y="3054096"/>
-            <a:ext cx="3502152" cy="1298448"/>
-          </a:xfrm>
-          <a:prstGeom prst="rect">
-            <a:avLst/>
-          </a:prstGeom>
-          <a:solidFill>
-            <a:srgbClr val="F1F4F7"/>
-          </a:solidFill>
-          <a:ln w="9525">
-            <a:solidFill>
-              <a:srgbClr val="D8DEE6"/>
-            </a:solidFill>
-          </a:ln>
-          <a:effectLst/>
-        </p:spPr>
-        <p:style>
-          <a:lnRef idx="1">
-            <a:schemeClr val="accent1"/>
-          </a:lnRef>
-          <a:fillRef idx="3">
-            <a:schemeClr val="accent1"/>
-          </a:fillRef>
-          <a:effectRef idx="2">
-            <a:schemeClr val="accent1"/>
-          </a:effectRef>
-          <a:fontRef idx="minor">
-            <a:schemeClr val="lt1"/>
-          </a:fontRef>
-        </p:style>
-        <p:txBody>
-          <a:bodyPr rtlCol="0" anchor="ctr" wrap="square"/>
-          <a:lstStyle/>
-          <a:p>
-            <a:pPr algn="ctr"/>
-          </a:p>
-        </p:txBody>
-      </p:sp>
-      <p:sp>
-        <p:nvSpPr>
-          <p:cNvPr id="13" name="TextBox 12"/>
-          <p:cNvSpPr txBox="1"/>
-          <p:nvPr/>
-        </p:nvSpPr>
-        <p:spPr>
-          <a:xfrm>
-            <a:off x="8357616" y="3255264"/>
-            <a:ext cx="3026664" cy="896112"/>
-          </a:xfrm>
-          <a:prstGeom prst="rect">
-            <a:avLst/>
-          </a:prstGeom>
-          <a:noFill/>
-        </p:spPr>
-        <p:txBody>
-          <a:bodyPr wrap="square" anchor="t" lIns="0" rIns="0" tIns="0" bIns="0">
-            <a:spAutoFit/>
-          </a:bodyPr>
-          <a:lstStyle/>
-          <a:p>
-            <a:pPr algn="l">
-              <a:spcAft>
-                <a:spcPts val="700"/>
-              </a:spcAft>
-            </a:pPr>
-            <a:r>
-              <a:rPr sz="1300" b="1" i="0" spc="80">
-                <a:solidFill>
-                  <a:srgbClr val="0F2540"/>
-                </a:solidFill>
-                <a:latin typeface="Calibri"/>
-              </a:rPr>
-              <a:t>THE SCORING</a:t>
-            </a:r>
-          </a:p>
-          <a:p>
-            <a:pPr algn="l">
-              <a:lnSpc>
-                <a:spcPct val="105000"/>
-              </a:lnSpc>
-              <a:spcAft>
-                <a:spcPts val="0"/>
-              </a:spcAft>
-            </a:pPr>
-            <a:r>
-              <a:rPr sz="1400" b="0" i="0">
-                <a:solidFill>
-                  <a:srgbClr val="4A5A6E"/>
-                </a:solidFill>
-                <a:latin typeface="Calibri"/>
-              </a:rPr>
-              <a:t>Clients grade demonstrated understanding above capability lists.</a:t>
-            </a:r>
-          </a:p>
-        </p:txBody>
-      </p:sp>
-      <p:sp>
-        <p:nvSpPr>
-          <p:cNvPr id="14" name="Rectangle 13"/>
-          <p:cNvSpPr/>
-          <p:nvPr/>
-        </p:nvSpPr>
-        <p:spPr>
-          <a:xfrm>
-            <a:off x="566928" y="4590288"/>
-            <a:ext cx="11055096" cy="1097280"/>
-          </a:xfrm>
-          <a:prstGeom prst="rect">
-            <a:avLst/>
-          </a:prstGeom>
-          <a:solidFill>
-            <a:srgbClr val="0B1C30"/>
-          </a:solidFill>
-          <a:ln>
-            <a:noFill/>
-          </a:ln>
-          <a:effectLst/>
-        </p:spPr>
-        <p:style>
-          <a:lnRef idx="1">
-            <a:schemeClr val="accent1"/>
-          </a:lnRef>
-          <a:fillRef idx="3">
-            <a:schemeClr val="accent1"/>
-          </a:fillRef>
-          <a:effectRef idx="2">
-            <a:schemeClr val="accent1"/>
-          </a:effectRef>
-          <a:fontRef idx="minor">
-            <a:schemeClr val="lt1"/>
-          </a:fontRef>
-        </p:style>
-        <p:txBody>
-          <a:bodyPr rtlCol="0" anchor="ctr" wrap="square"/>
-          <a:lstStyle/>
-          <a:p>
-            <a:pPr algn="ctr"/>
-          </a:p>
-        </p:txBody>
-      </p:sp>
-      <p:sp>
-        <p:nvSpPr>
-          <p:cNvPr id="15" name="Rectangle 14"/>
-          <p:cNvSpPr/>
-          <p:nvPr/>
-        </p:nvSpPr>
-        <p:spPr>
-          <a:xfrm>
-            <a:off x="566928" y="4590288"/>
-            <a:ext cx="64008" cy="1097280"/>
-          </a:xfrm>
-          <a:prstGeom prst="rect">
-            <a:avLst/>
-          </a:prstGeom>
-          <a:solidFill>
-            <a:srgbClr val="C0642A"/>
-          </a:solidFill>
-          <a:ln>
-            <a:noFill/>
-          </a:ln>
-          <a:effectLst/>
-        </p:spPr>
-        <p:style>
-          <a:lnRef idx="1">
-            <a:schemeClr val="accent1"/>
-          </a:lnRef>
-          <a:fillRef idx="3">
-            <a:schemeClr val="accent1"/>
-          </a:fillRef>
-          <a:effectRef idx="2">
-            <a:schemeClr val="accent1"/>
-          </a:effectRef>
-          <a:fontRef idx="minor">
-            <a:schemeClr val="lt1"/>
-          </a:fontRef>
-        </p:style>
-        <p:txBody>
-          <a:bodyPr rtlCol="0" anchor="ctr" wrap="square"/>
-          <a:lstStyle/>
-          <a:p>
-            <a:pPr algn="ctr"/>
-          </a:p>
-        </p:txBody>
-      </p:sp>
-      <p:sp>
-        <p:nvSpPr>
-          <p:cNvPr id="16" name="TextBox 15"/>
-          <p:cNvSpPr txBox="1"/>
-          <p:nvPr/>
-        </p:nvSpPr>
-        <p:spPr>
-          <a:xfrm>
-            <a:off x="877824" y="4718304"/>
-            <a:ext cx="10433304" cy="859536"/>
-          </a:xfrm>
-          <a:prstGeom prst="rect">
-            <a:avLst/>
-          </a:prstGeom>
-          <a:noFill/>
-        </p:spPr>
-        <p:txBody>
-          <a:bodyPr wrap="square" anchor="t" lIns="0" rIns="0" tIns="0" bIns="0">
-            <a:spAutoFit/>
-          </a:bodyPr>
-          <a:lstStyle/>
-          <a:p>
-            <a:pPr algn="l">
-              <a:lnSpc>
-                <a:spcPct val="114000"/>
-              </a:lnSpc>
-              <a:spcAft>
-                <a:spcPts val="400"/>
-              </a:spcAft>
-            </a:pPr>
-            <a:r>
-              <a:rPr sz="1550" b="0" i="1">
-                <a:solidFill>
-                  <a:srgbClr val="FFFFFF"/>
-                </a:solidFill>
-                <a:latin typeface="Georgia"/>
-              </a:rPr>
-              <a:t>“Wayfarer Market Co. puts 30% of its score on Understanding of Brand &amp; Crew Culture — and explicitly rejects the cut-costs, loyalty-program, more-ads playbook.”</a:t>
-            </a:r>
-          </a:p>
-          <a:p>
-            <a:pPr algn="l">
-              <a:lnSpc>
-                <a:spcPct val="110000"/>
+                <a:spcPct val="106000"/>
               </a:lnSpc>
             </a:pPr>
             <a:r>
-              <a:rPr sz="1250" b="0" i="0">
-                <a:solidFill>
-                  <a:srgbClr val="D9E1EA"/>
-                </a:solidFill>
-                <a:latin typeface="Calibri"/>
-              </a:rPr>
-              <a:t>Read: the generic proposal does not just underwhelm. It loses on the criteria the client wrote down.</a:t>
-            </a:r>
-          </a:p>
-        </p:txBody>
-      </p:sp>
-      <p:sp>
-        <p:nvSpPr>
-          <p:cNvPr id="17" name="TextBox 16"/>
-          <p:cNvSpPr txBox="1"/>
-          <p:nvPr/>
-        </p:nvSpPr>
-        <p:spPr>
-          <a:xfrm>
-            <a:off x="566928" y="5870448"/>
-            <a:ext cx="6949440" cy="256032"/>
-          </a:xfrm>
-          <a:prstGeom prst="rect">
-            <a:avLst/>
-          </a:prstGeom>
-          <a:noFill/>
-        </p:spPr>
-        <p:txBody>
-          <a:bodyPr wrap="square" anchor="t" lIns="0" rIns="0" tIns="0" bIns="0">
-            <a:spAutoFit/>
-          </a:bodyPr>
-          <a:lstStyle/>
-          <a:p>
-            <a:pPr algn="l"/>
-            <a:r>
-              <a:rPr sz="1250" b="1" i="0">
-                <a:solidFill>
-                  <a:srgbClr val="0F2540"/>
-                </a:solidFill>
-                <a:latin typeface="Calibri"/>
-              </a:rPr>
-              <a:t>Who it helps: the BD lead, partner and SME sharing hours 0–48 of a seven-day window.</a:t>
-            </a:r>
-          </a:p>
-        </p:txBody>
-      </p:sp>
-      <p:sp>
-        <p:nvSpPr>
-          <p:cNvPr id="18" name="TextBox 17"/>
-          <p:cNvSpPr txBox="1"/>
-          <p:nvPr/>
-        </p:nvSpPr>
-        <p:spPr>
-          <a:xfrm>
-            <a:off x="566928" y="6272784"/>
-            <a:ext cx="11055096" cy="256032"/>
-          </a:xfrm>
-          <a:prstGeom prst="rect">
-            <a:avLst/>
-          </a:prstGeom>
-          <a:noFill/>
-        </p:spPr>
-        <p:txBody>
-          <a:bodyPr wrap="square" anchor="t" lIns="0" rIns="0" tIns="0" bIns="0">
-            <a:spAutoFit/>
-          </a:bodyPr>
-          <a:lstStyle/>
-          <a:p>
-            <a:pPr algn="l"/>
-            <a:r>
-              <a:rPr sz="1100" b="0" i="0">
+              <a:rPr sz="1200" b="0" i="0">
                 <a:solidFill>
                   <a:srgbClr val="4A5A6E"/>
                 </a:solidFill>
@@ -3879,17 +4281,180 @@
       <p:grpSpPr/>
       <p:sp>
         <p:nvSpPr>
-          <p:cNvPr id="2" name="Rectangle 1"/>
+          <p:cNvPr id="2" name="TextBox 1"/>
+          <p:cNvSpPr txBox="1"/>
+          <p:nvPr/>
+        </p:nvSpPr>
+        <p:spPr>
+          <a:xfrm>
+            <a:off x="1097280" y="402336"/>
+            <a:ext cx="10058400" cy="237744"/>
+          </a:xfrm>
+          <a:prstGeom prst="rect">
+            <a:avLst/>
+          </a:prstGeom>
+          <a:noFill/>
+        </p:spPr>
+        <p:txBody>
+          <a:bodyPr wrap="square" anchor="t" lIns="0" rIns="0" tIns="0" bIns="0">
+            <a:spAutoFit/>
+          </a:bodyPr>
+          <a:lstStyle/>
+          <a:p>
+            <a:pPr algn="l">
+              <a:lnSpc>
+                <a:spcPct val="106000"/>
+              </a:lnSpc>
+            </a:pPr>
+            <a:r>
+              <a:rPr sz="1200" b="1" i="0" spc="140">
+                <a:solidFill>
+                  <a:srgbClr val="C0642A"/>
+                </a:solidFill>
+                <a:latin typeface="Calibri"/>
+              </a:rPr>
+              <a:t>THE SOLUTION</a:t>
+            </a:r>
+          </a:p>
+        </p:txBody>
+      </p:sp>
+      <p:sp>
+        <p:nvSpPr>
+          <p:cNvPr id="3" name="TextBox 2"/>
+          <p:cNvSpPr txBox="1"/>
+          <p:nvPr/>
+        </p:nvSpPr>
+        <p:spPr>
+          <a:xfrm>
+            <a:off x="1097280" y="694944"/>
+            <a:ext cx="10058400" cy="349600"/>
+          </a:xfrm>
+          <a:prstGeom prst="rect">
+            <a:avLst/>
+          </a:prstGeom>
+          <a:noFill/>
+        </p:spPr>
+        <p:txBody>
+          <a:bodyPr wrap="square" anchor="t" lIns="0" rIns="0" tIns="0" bIns="0">
+            <a:spAutoFit/>
+          </a:bodyPr>
+          <a:lstStyle/>
+          <a:p>
+            <a:pPr algn="l">
+              <a:lnSpc>
+                <a:spcPct val="98000"/>
+              </a:lnSpc>
+            </a:pPr>
+            <a:r>
+              <a:rPr sz="2200" b="1" i="0">
+                <a:solidFill>
+                  <a:srgbClr val="0F2540"/>
+                </a:solidFill>
+                <a:latin typeface="Calibri"/>
+              </a:rPr>
+              <a:t>Upload the RFP; the copilot returns a point of view, not a template.</a:t>
+            </a:r>
+          </a:p>
+        </p:txBody>
+      </p:sp>
+      <p:sp>
+        <p:nvSpPr>
+          <p:cNvPr id="4" name="Rectangle 3"/>
           <p:cNvSpPr/>
           <p:nvPr/>
         </p:nvSpPr>
         <p:spPr>
           <a:xfrm>
-            <a:off x="0" y="0"/>
-            <a:ext cx="12191695" cy="146304"/>
-          </a:xfrm>
-          <a:prstGeom prst="rect">
-            <a:avLst/>
+            <a:off x="566928" y="846884"/>
+            <a:ext cx="384048" cy="27432"/>
+          </a:xfrm>
+          <a:prstGeom prst="rect">
+            <a:avLst/>
+          </a:prstGeom>
+          <a:solidFill>
+            <a:srgbClr val="C0642A"/>
+          </a:solidFill>
+          <a:ln>
+            <a:noFill/>
+          </a:ln>
+          <a:effectLst/>
+        </p:spPr>
+        <p:style>
+          <a:lnRef idx="1">
+            <a:schemeClr val="accent1"/>
+          </a:lnRef>
+          <a:fillRef idx="3">
+            <a:schemeClr val="accent1"/>
+          </a:fillRef>
+          <a:effectRef idx="2">
+            <a:schemeClr val="accent1"/>
+          </a:effectRef>
+          <a:fontRef idx="minor">
+            <a:schemeClr val="lt1"/>
+          </a:fontRef>
+        </p:style>
+        <p:txBody>
+          <a:bodyPr rtlCol="0" anchor="ctr" wrap="square"/>
+          <a:lstStyle/>
+          <a:p>
+            <a:pPr algn="ctr"/>
+          </a:p>
+        </p:txBody>
+      </p:sp>
+      <p:sp>
+        <p:nvSpPr>
+          <p:cNvPr id="5" name="TextBox 4"/>
+          <p:cNvSpPr txBox="1"/>
+          <p:nvPr/>
+        </p:nvSpPr>
+        <p:spPr>
+          <a:xfrm>
+            <a:off x="11002975" y="6400800"/>
+            <a:ext cx="621792" cy="237744"/>
+          </a:xfrm>
+          <a:prstGeom prst="rect">
+            <a:avLst/>
+          </a:prstGeom>
+          <a:noFill/>
+        </p:spPr>
+        <p:txBody>
+          <a:bodyPr wrap="square" anchor="t" lIns="0" rIns="0" tIns="0" bIns="0">
+            <a:spAutoFit/>
+          </a:bodyPr>
+          <a:lstStyle/>
+          <a:p>
+            <a:pPr algn="r">
+              <a:lnSpc>
+                <a:spcPct val="106000"/>
+              </a:lnSpc>
+            </a:pPr>
+            <a:r>
+              <a:rPr sz="1200" b="0" i="0">
+                <a:solidFill>
+                  <a:srgbClr val="4A5A6E"/>
+                </a:solidFill>
+                <a:latin typeface="Calibri"/>
+              </a:rPr>
+              <a:t>2 / 4</a:t>
+            </a:r>
+          </a:p>
+        </p:txBody>
+      </p:sp>
+      <p:sp>
+        <p:nvSpPr>
+          <p:cNvPr id="6" name="Rounded Rectangle 5"/>
+          <p:cNvSpPr/>
+          <p:nvPr/>
+        </p:nvSpPr>
+        <p:spPr>
+          <a:xfrm>
+            <a:off x="566928" y="1282288"/>
+            <a:ext cx="6803136" cy="274320"/>
+          </a:xfrm>
+          <a:prstGeom prst="roundRect">
+            <a:avLst>
+              <a:gd name="adj" fmla="val 20000"/>
+            </a:avLst>
           </a:prstGeom>
           <a:solidFill>
             <a:srgbClr val="0F2540"/>
@@ -3923,14 +4488,14 @@
       </p:sp>
       <p:sp>
         <p:nvSpPr>
-          <p:cNvPr id="3" name="TextBox 2"/>
+          <p:cNvPr id="7" name="TextBox 6"/>
           <p:cNvSpPr txBox="1"/>
           <p:nvPr/>
         </p:nvSpPr>
         <p:spPr>
           <a:xfrm>
-            <a:off x="566928" y="475488"/>
-            <a:ext cx="11055096" cy="237744"/>
+            <a:off x="804672" y="1323404"/>
+            <a:ext cx="6382512" cy="210375"/>
           </a:xfrm>
           <a:prstGeom prst="rect">
             <a:avLst/>
@@ -3943,29 +4508,33 @@
           </a:bodyPr>
           <a:lstStyle/>
           <a:p>
-            <a:pPr algn="l"/>
-            <a:r>
-              <a:rPr sz="1150" b="1" i="0" spc="120">
-                <a:solidFill>
-                  <a:srgbClr val="C0642A"/>
-                </a:solidFill>
-                <a:latin typeface="Calibri"/>
-              </a:rPr>
-              <a:t>THE SOLUTION  ·  RFP PURSUIT COPILOT</a:t>
-            </a:r>
-          </a:p>
-        </p:txBody>
-      </p:sp>
-      <p:sp>
-        <p:nvSpPr>
-          <p:cNvPr id="4" name="TextBox 3"/>
+            <a:pPr algn="l">
+              <a:lnSpc>
+                <a:spcPct val="100000"/>
+              </a:lnSpc>
+            </a:pPr>
+            <a:r>
+              <a:rPr sz="1250" b="1" i="0" spc="60">
+                <a:solidFill>
+                  <a:srgbClr val="FFFFFF"/>
+                </a:solidFill>
+                <a:latin typeface="Calibri"/>
+              </a:rPr>
+              <a:t>How It Works</a:t>
+            </a:r>
+          </a:p>
+        </p:txBody>
+      </p:sp>
+      <p:sp>
+        <p:nvSpPr>
+          <p:cNvPr id="8" name="TextBox 7"/>
           <p:cNvSpPr txBox="1"/>
           <p:nvPr/>
         </p:nvSpPr>
         <p:spPr>
           <a:xfrm>
-            <a:off x="566928" y="786384"/>
-            <a:ext cx="11055096" cy="566928"/>
+            <a:off x="1042416" y="1648048"/>
+            <a:ext cx="6254496" cy="230045"/>
           </a:xfrm>
           <a:prstGeom prst="rect">
             <a:avLst/>
@@ -3980,31 +4549,776 @@
           <a:p>
             <a:pPr algn="l">
               <a:lnSpc>
-                <a:spcPct val="95000"/>
+                <a:spcPct val="106000"/>
               </a:lnSpc>
             </a:pPr>
             <a:r>
-              <a:rPr sz="3000" b="1" i="0">
-                <a:solidFill>
-                  <a:srgbClr val="0F2540"/>
-                </a:solidFill>
-                <a:latin typeface="Calibri"/>
-              </a:rPr>
-              <a:t>Upload the RFP. Get a point of view, not a template.</a:t>
-            </a:r>
-          </a:p>
-        </p:txBody>
-      </p:sp>
-      <p:sp>
-        <p:nvSpPr>
-          <p:cNvPr id="5" name="Rectangle 4"/>
+              <a:rPr sz="1300" b="1" i="0">
+                <a:solidFill>
+                  <a:srgbClr val="1A2733"/>
+                </a:solidFill>
+                <a:latin typeface="Calibri"/>
+              </a:rPr>
+              <a:t>Ingest.</a:t>
+            </a:r>
+            <a:r>
+              <a:rPr sz="1300" b="0" i="0">
+                <a:solidFill>
+                  <a:srgbClr val="1A2733"/>
+                </a:solidFill>
+                <a:latin typeface="Calibri"/>
+              </a:rPr>
+              <a:t> RFP, Aberdeen credentials, prior proposals, case studies.</a:t>
+            </a:r>
+          </a:p>
+        </p:txBody>
+      </p:sp>
+      <p:sp>
+        <p:nvSpPr>
+          <p:cNvPr id="9" name="TextBox 8"/>
+          <p:cNvSpPr txBox="1"/>
+          <p:nvPr/>
+        </p:nvSpPr>
+        <p:spPr>
+          <a:xfrm>
+            <a:off x="1042416" y="1942101"/>
+            <a:ext cx="6254496" cy="230045"/>
+          </a:xfrm>
+          <a:prstGeom prst="rect">
+            <a:avLst/>
+          </a:prstGeom>
+          <a:noFill/>
+        </p:spPr>
+        <p:txBody>
+          <a:bodyPr wrap="square" anchor="t" lIns="0" rIns="0" tIns="0" bIns="0">
+            <a:spAutoFit/>
+          </a:bodyPr>
+          <a:lstStyle/>
+          <a:p>
+            <a:pPr algn="l">
+              <a:lnSpc>
+                <a:spcPct val="106000"/>
+              </a:lnSpc>
+            </a:pPr>
+            <a:r>
+              <a:rPr sz="1300" b="1" i="0">
+                <a:solidFill>
+                  <a:srgbClr val="1A2733"/>
+                </a:solidFill>
+                <a:latin typeface="Calibri"/>
+              </a:rPr>
+              <a:t>Analyze.</a:t>
+            </a:r>
+            <a:r>
+              <a:rPr sz="1300" b="0" i="0">
+                <a:solidFill>
+                  <a:srgbClr val="1A2733"/>
+                </a:solidFill>
+                <a:latin typeface="Calibri"/>
+              </a:rPr>
+              <a:t> Objectives, requirements, constraints, evaluation criteria.</a:t>
+            </a:r>
+          </a:p>
+        </p:txBody>
+      </p:sp>
+      <p:sp>
+        <p:nvSpPr>
+          <p:cNvPr id="10" name="TextBox 9"/>
+          <p:cNvSpPr txBox="1"/>
+          <p:nvPr/>
+        </p:nvSpPr>
+        <p:spPr>
+          <a:xfrm>
+            <a:off x="1042416" y="2236155"/>
+            <a:ext cx="6254496" cy="230045"/>
+          </a:xfrm>
+          <a:prstGeom prst="rect">
+            <a:avLst/>
+          </a:prstGeom>
+          <a:noFill/>
+        </p:spPr>
+        <p:txBody>
+          <a:bodyPr wrap="square" anchor="t" lIns="0" rIns="0" tIns="0" bIns="0">
+            <a:spAutoFit/>
+          </a:bodyPr>
+          <a:lstStyle/>
+          <a:p>
+            <a:pPr algn="l">
+              <a:lnSpc>
+                <a:spcPct val="106000"/>
+              </a:lnSpc>
+            </a:pPr>
+            <a:r>
+              <a:rPr sz="1300" b="1" i="0">
+                <a:solidFill>
+                  <a:srgbClr val="1A2733"/>
+                </a:solidFill>
+                <a:latin typeface="Calibri"/>
+              </a:rPr>
+              <a:t>Draft.</a:t>
+            </a:r>
+            <a:r>
+              <a:rPr sz="1300" b="0" i="0">
+                <a:solidFill>
+                  <a:srgbClr val="1A2733"/>
+                </a:solidFill>
+                <a:latin typeface="Calibri"/>
+              </a:rPr>
+              <a:t> Win themes first — then approach, staffing, timeline, copy.</a:t>
+            </a:r>
+          </a:p>
+        </p:txBody>
+      </p:sp>
+      <p:sp>
+        <p:nvSpPr>
+          <p:cNvPr id="11" name="TextBox 10"/>
+          <p:cNvSpPr txBox="1"/>
+          <p:nvPr/>
+        </p:nvSpPr>
+        <p:spPr>
+          <a:xfrm>
+            <a:off x="1042416" y="2530208"/>
+            <a:ext cx="6254496" cy="230045"/>
+          </a:xfrm>
+          <a:prstGeom prst="rect">
+            <a:avLst/>
+          </a:prstGeom>
+          <a:noFill/>
+        </p:spPr>
+        <p:txBody>
+          <a:bodyPr wrap="square" anchor="t" lIns="0" rIns="0" tIns="0" bIns="0">
+            <a:spAutoFit/>
+          </a:bodyPr>
+          <a:lstStyle/>
+          <a:p>
+            <a:pPr algn="l">
+              <a:lnSpc>
+                <a:spcPct val="106000"/>
+              </a:lnSpc>
+            </a:pPr>
+            <a:r>
+              <a:rPr sz="1300" b="1" i="0">
+                <a:solidFill>
+                  <a:srgbClr val="1A2733"/>
+                </a:solidFill>
+                <a:latin typeface="Calibri"/>
+              </a:rPr>
+              <a:t>Score.</a:t>
+            </a:r>
+            <a:r>
+              <a:rPr sz="1300" b="0" i="0">
+                <a:solidFill>
+                  <a:srgbClr val="1A2733"/>
+                </a:solidFill>
+                <a:latin typeface="Calibri"/>
+              </a:rPr>
+              <a:t> Predicted rubric score and completeness check before send.</a:t>
+            </a:r>
+          </a:p>
+        </p:txBody>
+      </p:sp>
+      <p:sp>
+        <p:nvSpPr>
+          <p:cNvPr id="12" name="Rectangle 11"/>
           <p:cNvSpPr/>
           <p:nvPr/>
         </p:nvSpPr>
         <p:spPr>
           <a:xfrm>
-            <a:off x="566928" y="1499616"/>
-            <a:ext cx="1371600" cy="41148"/>
+            <a:off x="816559" y="1602328"/>
+            <a:ext cx="12801" cy="1033758"/>
+          </a:xfrm>
+          <a:prstGeom prst="rect">
+            <a:avLst/>
+          </a:prstGeom>
+          <a:solidFill>
+            <a:srgbClr val="D3DAE2"/>
+          </a:solidFill>
+          <a:ln>
+            <a:noFill/>
+          </a:ln>
+          <a:effectLst/>
+        </p:spPr>
+        <p:style>
+          <a:lnRef idx="1">
+            <a:schemeClr val="accent1"/>
+          </a:lnRef>
+          <a:fillRef idx="3">
+            <a:schemeClr val="accent1"/>
+          </a:fillRef>
+          <a:effectRef idx="2">
+            <a:schemeClr val="accent1"/>
+          </a:effectRef>
+          <a:fontRef idx="minor">
+            <a:schemeClr val="lt1"/>
+          </a:fontRef>
+        </p:style>
+        <p:txBody>
+          <a:bodyPr rtlCol="0" anchor="ctr" wrap="square"/>
+          <a:lstStyle/>
+          <a:p>
+            <a:pPr algn="ctr"/>
+          </a:p>
+        </p:txBody>
+      </p:sp>
+      <p:sp>
+        <p:nvSpPr>
+          <p:cNvPr id="13" name="Oval 12"/>
+          <p:cNvSpPr/>
+          <p:nvPr/>
+        </p:nvSpPr>
+        <p:spPr>
+          <a:xfrm>
+            <a:off x="761238" y="1692205"/>
+            <a:ext cx="123444" cy="123444"/>
+          </a:xfrm>
+          <a:prstGeom prst="ellipse">
+            <a:avLst/>
+          </a:prstGeom>
+          <a:solidFill>
+            <a:srgbClr val="FFFFFF"/>
+          </a:solidFill>
+          <a:ln w="19050">
+            <a:solidFill>
+              <a:srgbClr val="C0642A"/>
+            </a:solidFill>
+          </a:ln>
+          <a:effectLst/>
+        </p:spPr>
+        <p:style>
+          <a:lnRef idx="1">
+            <a:schemeClr val="accent1"/>
+          </a:lnRef>
+          <a:fillRef idx="3">
+            <a:schemeClr val="accent1"/>
+          </a:fillRef>
+          <a:effectRef idx="2">
+            <a:schemeClr val="accent1"/>
+          </a:effectRef>
+          <a:fontRef idx="minor">
+            <a:schemeClr val="lt1"/>
+          </a:fontRef>
+        </p:style>
+        <p:txBody>
+          <a:bodyPr rtlCol="0" anchor="ctr" wrap="square"/>
+          <a:lstStyle/>
+          <a:p>
+            <a:pPr algn="ctr"/>
+          </a:p>
+        </p:txBody>
+      </p:sp>
+      <p:sp>
+        <p:nvSpPr>
+          <p:cNvPr id="14" name="Oval 13"/>
+          <p:cNvSpPr/>
+          <p:nvPr/>
+        </p:nvSpPr>
+        <p:spPr>
+          <a:xfrm>
+            <a:off x="761238" y="1986258"/>
+            <a:ext cx="123444" cy="123444"/>
+          </a:xfrm>
+          <a:prstGeom prst="ellipse">
+            <a:avLst/>
+          </a:prstGeom>
+          <a:solidFill>
+            <a:srgbClr val="FFFFFF"/>
+          </a:solidFill>
+          <a:ln w="19050">
+            <a:solidFill>
+              <a:srgbClr val="C0642A"/>
+            </a:solidFill>
+          </a:ln>
+          <a:effectLst/>
+        </p:spPr>
+        <p:style>
+          <a:lnRef idx="1">
+            <a:schemeClr val="accent1"/>
+          </a:lnRef>
+          <a:fillRef idx="3">
+            <a:schemeClr val="accent1"/>
+          </a:fillRef>
+          <a:effectRef idx="2">
+            <a:schemeClr val="accent1"/>
+          </a:effectRef>
+          <a:fontRef idx="minor">
+            <a:schemeClr val="lt1"/>
+          </a:fontRef>
+        </p:style>
+        <p:txBody>
+          <a:bodyPr rtlCol="0" anchor="ctr" wrap="square"/>
+          <a:lstStyle/>
+          <a:p>
+            <a:pPr algn="ctr"/>
+          </a:p>
+        </p:txBody>
+      </p:sp>
+      <p:sp>
+        <p:nvSpPr>
+          <p:cNvPr id="15" name="Oval 14"/>
+          <p:cNvSpPr/>
+          <p:nvPr/>
+        </p:nvSpPr>
+        <p:spPr>
+          <a:xfrm>
+            <a:off x="761238" y="2280311"/>
+            <a:ext cx="123444" cy="123444"/>
+          </a:xfrm>
+          <a:prstGeom prst="ellipse">
+            <a:avLst/>
+          </a:prstGeom>
+          <a:solidFill>
+            <a:srgbClr val="FFFFFF"/>
+          </a:solidFill>
+          <a:ln w="19050">
+            <a:solidFill>
+              <a:srgbClr val="C0642A"/>
+            </a:solidFill>
+          </a:ln>
+          <a:effectLst/>
+        </p:spPr>
+        <p:style>
+          <a:lnRef idx="1">
+            <a:schemeClr val="accent1"/>
+          </a:lnRef>
+          <a:fillRef idx="3">
+            <a:schemeClr val="accent1"/>
+          </a:fillRef>
+          <a:effectRef idx="2">
+            <a:schemeClr val="accent1"/>
+          </a:effectRef>
+          <a:fontRef idx="minor">
+            <a:schemeClr val="lt1"/>
+          </a:fontRef>
+        </p:style>
+        <p:txBody>
+          <a:bodyPr rtlCol="0" anchor="ctr" wrap="square"/>
+          <a:lstStyle/>
+          <a:p>
+            <a:pPr algn="ctr"/>
+          </a:p>
+        </p:txBody>
+      </p:sp>
+      <p:sp>
+        <p:nvSpPr>
+          <p:cNvPr id="16" name="Oval 15"/>
+          <p:cNvSpPr/>
+          <p:nvPr/>
+        </p:nvSpPr>
+        <p:spPr>
+          <a:xfrm>
+            <a:off x="761238" y="2574364"/>
+            <a:ext cx="123444" cy="123444"/>
+          </a:xfrm>
+          <a:prstGeom prst="ellipse">
+            <a:avLst/>
+          </a:prstGeom>
+          <a:solidFill>
+            <a:srgbClr val="FFFFFF"/>
+          </a:solidFill>
+          <a:ln w="19050">
+            <a:solidFill>
+              <a:srgbClr val="C0642A"/>
+            </a:solidFill>
+          </a:ln>
+          <a:effectLst/>
+        </p:spPr>
+        <p:style>
+          <a:lnRef idx="1">
+            <a:schemeClr val="accent1"/>
+          </a:lnRef>
+          <a:fillRef idx="3">
+            <a:schemeClr val="accent1"/>
+          </a:fillRef>
+          <a:effectRef idx="2">
+            <a:schemeClr val="accent1"/>
+          </a:effectRef>
+          <a:fontRef idx="minor">
+            <a:schemeClr val="lt1"/>
+          </a:fontRef>
+        </p:style>
+        <p:txBody>
+          <a:bodyPr rtlCol="0" anchor="ctr" wrap="square"/>
+          <a:lstStyle/>
+          <a:p>
+            <a:pPr algn="ctr"/>
+          </a:p>
+        </p:txBody>
+      </p:sp>
+      <p:sp>
+        <p:nvSpPr>
+          <p:cNvPr id="17" name="Rounded Rectangle 16"/>
+          <p:cNvSpPr/>
+          <p:nvPr/>
+        </p:nvSpPr>
+        <p:spPr>
+          <a:xfrm>
+            <a:off x="566928" y="2943133"/>
+            <a:ext cx="6803136" cy="274320"/>
+          </a:xfrm>
+          <a:prstGeom prst="roundRect">
+            <a:avLst>
+              <a:gd name="adj" fmla="val 20000"/>
+            </a:avLst>
+          </a:prstGeom>
+          <a:solidFill>
+            <a:srgbClr val="0F2540"/>
+          </a:solidFill>
+          <a:ln>
+            <a:noFill/>
+          </a:ln>
+          <a:effectLst/>
+        </p:spPr>
+        <p:style>
+          <a:lnRef idx="1">
+            <a:schemeClr val="accent1"/>
+          </a:lnRef>
+          <a:fillRef idx="3">
+            <a:schemeClr val="accent1"/>
+          </a:fillRef>
+          <a:effectRef idx="2">
+            <a:schemeClr val="accent1"/>
+          </a:effectRef>
+          <a:fontRef idx="minor">
+            <a:schemeClr val="lt1"/>
+          </a:fontRef>
+        </p:style>
+        <p:txBody>
+          <a:bodyPr rtlCol="0" anchor="ctr" wrap="square"/>
+          <a:lstStyle/>
+          <a:p>
+            <a:pPr algn="ctr"/>
+          </a:p>
+        </p:txBody>
+      </p:sp>
+      <p:sp>
+        <p:nvSpPr>
+          <p:cNvPr id="18" name="TextBox 17"/>
+          <p:cNvSpPr txBox="1"/>
+          <p:nvPr/>
+        </p:nvSpPr>
+        <p:spPr>
+          <a:xfrm>
+            <a:off x="804672" y="2984249"/>
+            <a:ext cx="6382512" cy="210375"/>
+          </a:xfrm>
+          <a:prstGeom prst="rect">
+            <a:avLst/>
+          </a:prstGeom>
+          <a:noFill/>
+        </p:spPr>
+        <p:txBody>
+          <a:bodyPr wrap="square" anchor="t" lIns="0" rIns="0" tIns="0" bIns="0">
+            <a:spAutoFit/>
+          </a:bodyPr>
+          <a:lstStyle/>
+          <a:p>
+            <a:pPr algn="l">
+              <a:lnSpc>
+                <a:spcPct val="100000"/>
+              </a:lnSpc>
+            </a:pPr>
+            <a:r>
+              <a:rPr sz="1250" b="1" i="0" spc="60">
+                <a:solidFill>
+                  <a:srgbClr val="FFFFFF"/>
+                </a:solidFill>
+                <a:latin typeface="Calibri"/>
+              </a:rPr>
+              <a:t>What It Hands You</a:t>
+            </a:r>
+          </a:p>
+        </p:txBody>
+      </p:sp>
+      <p:sp>
+        <p:nvSpPr>
+          <p:cNvPr id="19" name="TextBox 18"/>
+          <p:cNvSpPr txBox="1"/>
+          <p:nvPr/>
+        </p:nvSpPr>
+        <p:spPr>
+          <a:xfrm>
+            <a:off x="1042416" y="3308893"/>
+            <a:ext cx="6254496" cy="230045"/>
+          </a:xfrm>
+          <a:prstGeom prst="rect">
+            <a:avLst/>
+          </a:prstGeom>
+          <a:noFill/>
+        </p:spPr>
+        <p:txBody>
+          <a:bodyPr wrap="square" anchor="t" lIns="0" rIns="0" tIns="0" bIns="0">
+            <a:spAutoFit/>
+          </a:bodyPr>
+          <a:lstStyle/>
+          <a:p>
+            <a:pPr algn="l">
+              <a:lnSpc>
+                <a:spcPct val="106000"/>
+              </a:lnSpc>
+            </a:pPr>
+            <a:r>
+              <a:rPr sz="1300" b="1" i="0">
+                <a:solidFill>
+                  <a:srgbClr val="1A2733"/>
+                </a:solidFill>
+                <a:latin typeface="Calibri"/>
+              </a:rPr>
+              <a:t>Three win themes,</a:t>
+            </a:r>
+            <a:r>
+              <a:rPr sz="1300" b="0" i="0">
+                <a:solidFill>
+                  <a:srgbClr val="1A2733"/>
+                </a:solidFill>
+                <a:latin typeface="Calibri"/>
+              </a:rPr>
+              <a:t> tied to the client's stated priorities.</a:t>
+            </a:r>
+          </a:p>
+        </p:txBody>
+      </p:sp>
+      <p:sp>
+        <p:nvSpPr>
+          <p:cNvPr id="20" name="TextBox 19"/>
+          <p:cNvSpPr txBox="1"/>
+          <p:nvPr/>
+        </p:nvSpPr>
+        <p:spPr>
+          <a:xfrm>
+            <a:off x="1042416" y="3602946"/>
+            <a:ext cx="6254496" cy="230045"/>
+          </a:xfrm>
+          <a:prstGeom prst="rect">
+            <a:avLst/>
+          </a:prstGeom>
+          <a:noFill/>
+        </p:spPr>
+        <p:txBody>
+          <a:bodyPr wrap="square" anchor="t" lIns="0" rIns="0" tIns="0" bIns="0">
+            <a:spAutoFit/>
+          </a:bodyPr>
+          <a:lstStyle/>
+          <a:p>
+            <a:pPr algn="l">
+              <a:lnSpc>
+                <a:spcPct val="106000"/>
+              </a:lnSpc>
+            </a:pPr>
+            <a:r>
+              <a:rPr sz="1300" b="1" i="0">
+                <a:solidFill>
+                  <a:srgbClr val="1A2733"/>
+                </a:solidFill>
+                <a:latin typeface="Calibri"/>
+              </a:rPr>
+              <a:t>Solution approach,</a:t>
+            </a:r>
+            <a:r>
+              <a:rPr sz="1300" b="0" i="0">
+                <a:solidFill>
+                  <a:srgbClr val="1A2733"/>
+                </a:solidFill>
+                <a:latin typeface="Calibri"/>
+              </a:rPr>
+              <a:t> staffing model and timeline.</a:t>
+            </a:r>
+          </a:p>
+        </p:txBody>
+      </p:sp>
+      <p:sp>
+        <p:nvSpPr>
+          <p:cNvPr id="21" name="TextBox 20"/>
+          <p:cNvSpPr txBox="1"/>
+          <p:nvPr/>
+        </p:nvSpPr>
+        <p:spPr>
+          <a:xfrm>
+            <a:off x="1042416" y="3897000"/>
+            <a:ext cx="6254496" cy="230045"/>
+          </a:xfrm>
+          <a:prstGeom prst="rect">
+            <a:avLst/>
+          </a:prstGeom>
+          <a:noFill/>
+        </p:spPr>
+        <p:txBody>
+          <a:bodyPr wrap="square" anchor="t" lIns="0" rIns="0" tIns="0" bIns="0">
+            <a:spAutoFit/>
+          </a:bodyPr>
+          <a:lstStyle/>
+          <a:p>
+            <a:pPr algn="l">
+              <a:lnSpc>
+                <a:spcPct val="106000"/>
+              </a:lnSpc>
+            </a:pPr>
+            <a:r>
+              <a:rPr sz="1300" b="1" i="0">
+                <a:solidFill>
+                  <a:srgbClr val="1A2733"/>
+                </a:solidFill>
+                <a:latin typeface="Calibri"/>
+              </a:rPr>
+              <a:t>Aberdeen experience</a:t>
+            </a:r>
+            <a:r>
+              <a:rPr sz="1300" b="0" i="0">
+                <a:solidFill>
+                  <a:srgbClr val="1A2733"/>
+                </a:solidFill>
+                <a:latin typeface="Calibri"/>
+              </a:rPr>
+              <a:t> ranked by relevance — and why it is relevant.</a:t>
+            </a:r>
+          </a:p>
+        </p:txBody>
+      </p:sp>
+      <p:sp>
+        <p:nvSpPr>
+          <p:cNvPr id="22" name="TextBox 21"/>
+          <p:cNvSpPr txBox="1"/>
+          <p:nvPr/>
+        </p:nvSpPr>
+        <p:spPr>
+          <a:xfrm>
+            <a:off x="1042416" y="4191053"/>
+            <a:ext cx="6254496" cy="441802"/>
+          </a:xfrm>
+          <a:prstGeom prst="rect">
+            <a:avLst/>
+          </a:prstGeom>
+          <a:noFill/>
+        </p:spPr>
+        <p:txBody>
+          <a:bodyPr wrap="square" anchor="t" lIns="0" rIns="0" tIns="0" bIns="0">
+            <a:spAutoFit/>
+          </a:bodyPr>
+          <a:lstStyle/>
+          <a:p>
+            <a:pPr algn="l">
+              <a:lnSpc>
+                <a:spcPct val="106000"/>
+              </a:lnSpc>
+            </a:pPr>
+            <a:r>
+              <a:rPr sz="1300" b="1" i="0">
+                <a:solidFill>
+                  <a:srgbClr val="1A2733"/>
+                </a:solidFill>
+                <a:latin typeface="Calibri"/>
+              </a:rPr>
+              <a:t>First-draft copy</a:t>
+            </a:r>
+            <a:r>
+              <a:rPr sz="1300" b="0" i="0">
+                <a:solidFill>
+                  <a:srgbClr val="1A2733"/>
+                </a:solidFill>
+                <a:latin typeface="Calibri"/>
+              </a:rPr>
+              <a:t> for the opening sections, structured to the client's own required response items.</a:t>
+            </a:r>
+          </a:p>
+        </p:txBody>
+      </p:sp>
+      <p:sp>
+        <p:nvSpPr>
+          <p:cNvPr id="23" name="TextBox 22"/>
+          <p:cNvSpPr txBox="1"/>
+          <p:nvPr/>
+        </p:nvSpPr>
+        <p:spPr>
+          <a:xfrm>
+            <a:off x="1042416" y="4696863"/>
+            <a:ext cx="6254496" cy="230045"/>
+          </a:xfrm>
+          <a:prstGeom prst="rect">
+            <a:avLst/>
+          </a:prstGeom>
+          <a:noFill/>
+        </p:spPr>
+        <p:txBody>
+          <a:bodyPr wrap="square" anchor="t" lIns="0" rIns="0" tIns="0" bIns="0">
+            <a:spAutoFit/>
+          </a:bodyPr>
+          <a:lstStyle/>
+          <a:p>
+            <a:pPr algn="l">
+              <a:lnSpc>
+                <a:spcPct val="106000"/>
+              </a:lnSpc>
+            </a:pPr>
+            <a:r>
+              <a:rPr sz="1300" b="1" i="0">
+                <a:solidFill>
+                  <a:srgbClr val="1A2733"/>
+                </a:solidFill>
+                <a:latin typeface="Calibri"/>
+              </a:rPr>
+              <a:t>A Response Action per requirement:</a:t>
+            </a:r>
+            <a:r>
+              <a:rPr sz="1300" b="0" i="0">
+                <a:solidFill>
+                  <a:srgbClr val="1A2733"/>
+                </a:solidFill>
+                <a:latin typeface="Calibri"/>
+              </a:rPr>
+              <a:t> what it asks of us.</a:t>
+            </a:r>
+          </a:p>
+        </p:txBody>
+      </p:sp>
+      <p:sp>
+        <p:nvSpPr>
+          <p:cNvPr id="24" name="TextBox 23"/>
+          <p:cNvSpPr txBox="1"/>
+          <p:nvPr/>
+        </p:nvSpPr>
+        <p:spPr>
+          <a:xfrm>
+            <a:off x="1463040" y="4990917"/>
+            <a:ext cx="5833872" cy="221900"/>
+          </a:xfrm>
+          <a:prstGeom prst="rect">
+            <a:avLst/>
+          </a:prstGeom>
+          <a:noFill/>
+        </p:spPr>
+        <p:txBody>
+          <a:bodyPr wrap="square" anchor="t" lIns="0" rIns="0" tIns="0" bIns="0">
+            <a:spAutoFit/>
+          </a:bodyPr>
+          <a:lstStyle/>
+          <a:p>
+            <a:pPr algn="l">
+              <a:lnSpc>
+                <a:spcPct val="106000"/>
+              </a:lnSpc>
+            </a:pPr>
+            <a:r>
+              <a:rPr sz="1250" b="0" i="0">
+                <a:solidFill>
+                  <a:srgbClr val="33414F"/>
+                </a:solidFill>
+                <a:latin typeface="Calibri"/>
+              </a:rPr>
+              <a:t>Controlled vocabulary, five values:</a:t>
+            </a:r>
+          </a:p>
+        </p:txBody>
+      </p:sp>
+      <p:sp>
+        <p:nvSpPr>
+          <p:cNvPr id="25" name="Rectangle 24"/>
+          <p:cNvSpPr/>
+          <p:nvPr/>
+        </p:nvSpPr>
+        <p:spPr>
+          <a:xfrm>
+            <a:off x="1280160" y="5058433"/>
+            <a:ext cx="68580" cy="68580"/>
           </a:xfrm>
           <a:prstGeom prst="rect">
             <a:avLst/>
@@ -4041,14 +5355,14 @@
       </p:sp>
       <p:sp>
         <p:nvSpPr>
-          <p:cNvPr id="6" name="TextBox 5"/>
+          <p:cNvPr id="26" name="TextBox 25"/>
           <p:cNvSpPr txBox="1"/>
           <p:nvPr/>
         </p:nvSpPr>
         <p:spPr>
           <a:xfrm>
-            <a:off x="10424160" y="6382512"/>
-            <a:ext cx="1197864" cy="237744"/>
+            <a:off x="1664207" y="5263109"/>
+            <a:ext cx="5632704" cy="409224"/>
           </a:xfrm>
           <a:prstGeom prst="rect">
             <a:avLst/>
@@ -4061,40 +5375,42 @@
           </a:bodyPr>
           <a:lstStyle/>
           <a:p>
-            <a:pPr algn="r"/>
-            <a:r>
-              <a:rPr sz="1000" b="0" i="0">
-                <a:solidFill>
-                  <a:srgbClr val="4A5A6E"/>
-                </a:solidFill>
-                <a:latin typeface="Calibri"/>
-              </a:rPr>
-              <a:t>2 / 4</a:t>
-            </a:r>
-          </a:p>
-        </p:txBody>
-      </p:sp>
-      <p:sp>
-        <p:nvSpPr>
-          <p:cNvPr id="7" name="Rectangle 6"/>
+            <a:pPr algn="l">
+              <a:lnSpc>
+                <a:spcPct val="106000"/>
+              </a:lnSpc>
+            </a:pPr>
+            <a:r>
+              <a:rPr sz="1200" b="0" i="0">
+                <a:solidFill>
+                  <a:srgbClr val="33414F"/>
+                </a:solidFill>
+                <a:latin typeface="Calibri"/>
+              </a:rPr>
+              <a:t>– Address · Provide Information · Provide Attachment · Acknowledge / Confirm · Deliverable if Awarded</a:t>
+            </a:r>
+          </a:p>
+        </p:txBody>
+      </p:sp>
+      <p:sp>
+        <p:nvSpPr>
+          <p:cNvPr id="27" name="Rectangle 26"/>
           <p:cNvSpPr/>
           <p:nvPr/>
         </p:nvSpPr>
         <p:spPr>
           <a:xfrm>
-            <a:off x="566928" y="1773936"/>
-            <a:ext cx="2647188" cy="1170432"/>
+            <a:off x="816559" y="3263173"/>
+            <a:ext cx="12801" cy="1539568"/>
           </a:xfrm>
           <a:prstGeom prst="rect">
             <a:avLst/>
           </a:prstGeom>
           <a:solidFill>
-            <a:srgbClr val="F1F4F7"/>
+            <a:srgbClr val="D3DAE2"/>
           </a:solidFill>
-          <a:ln w="9525">
-            <a:solidFill>
-              <a:srgbClr val="D8DEE6"/>
-            </a:solidFill>
+          <a:ln>
+            <a:noFill/>
           </a:ln>
           <a:effectLst/>
         </p:spPr>
@@ -4122,20 +5438,252 @@
       </p:sp>
       <p:sp>
         <p:nvSpPr>
-          <p:cNvPr id="8" name="Rectangle 7"/>
+          <p:cNvPr id="28" name="Oval 27"/>
           <p:cNvSpPr/>
           <p:nvPr/>
         </p:nvSpPr>
         <p:spPr>
           <a:xfrm>
-            <a:off x="566928" y="1773936"/>
-            <a:ext cx="2647188" cy="50292"/>
-          </a:xfrm>
-          <a:prstGeom prst="rect">
+            <a:off x="761238" y="3353050"/>
+            <a:ext cx="123444" cy="123444"/>
+          </a:xfrm>
+          <a:prstGeom prst="ellipse">
             <a:avLst/>
           </a:prstGeom>
           <a:solidFill>
-            <a:srgbClr val="C0642A"/>
+            <a:srgbClr val="FFFFFF"/>
+          </a:solidFill>
+          <a:ln w="19050">
+            <a:solidFill>
+              <a:srgbClr val="C0642A"/>
+            </a:solidFill>
+          </a:ln>
+          <a:effectLst/>
+        </p:spPr>
+        <p:style>
+          <a:lnRef idx="1">
+            <a:schemeClr val="accent1"/>
+          </a:lnRef>
+          <a:fillRef idx="3">
+            <a:schemeClr val="accent1"/>
+          </a:fillRef>
+          <a:effectRef idx="2">
+            <a:schemeClr val="accent1"/>
+          </a:effectRef>
+          <a:fontRef idx="minor">
+            <a:schemeClr val="lt1"/>
+          </a:fontRef>
+        </p:style>
+        <p:txBody>
+          <a:bodyPr rtlCol="0" anchor="ctr" wrap="square"/>
+          <a:lstStyle/>
+          <a:p>
+            <a:pPr algn="ctr"/>
+          </a:p>
+        </p:txBody>
+      </p:sp>
+      <p:sp>
+        <p:nvSpPr>
+          <p:cNvPr id="29" name="Oval 28"/>
+          <p:cNvSpPr/>
+          <p:nvPr/>
+        </p:nvSpPr>
+        <p:spPr>
+          <a:xfrm>
+            <a:off x="761238" y="3647103"/>
+            <a:ext cx="123444" cy="123444"/>
+          </a:xfrm>
+          <a:prstGeom prst="ellipse">
+            <a:avLst/>
+          </a:prstGeom>
+          <a:solidFill>
+            <a:srgbClr val="FFFFFF"/>
+          </a:solidFill>
+          <a:ln w="19050">
+            <a:solidFill>
+              <a:srgbClr val="C0642A"/>
+            </a:solidFill>
+          </a:ln>
+          <a:effectLst/>
+        </p:spPr>
+        <p:style>
+          <a:lnRef idx="1">
+            <a:schemeClr val="accent1"/>
+          </a:lnRef>
+          <a:fillRef idx="3">
+            <a:schemeClr val="accent1"/>
+          </a:fillRef>
+          <a:effectRef idx="2">
+            <a:schemeClr val="accent1"/>
+          </a:effectRef>
+          <a:fontRef idx="minor">
+            <a:schemeClr val="lt1"/>
+          </a:fontRef>
+        </p:style>
+        <p:txBody>
+          <a:bodyPr rtlCol="0" anchor="ctr" wrap="square"/>
+          <a:lstStyle/>
+          <a:p>
+            <a:pPr algn="ctr"/>
+          </a:p>
+        </p:txBody>
+      </p:sp>
+      <p:sp>
+        <p:nvSpPr>
+          <p:cNvPr id="30" name="Oval 29"/>
+          <p:cNvSpPr/>
+          <p:nvPr/>
+        </p:nvSpPr>
+        <p:spPr>
+          <a:xfrm>
+            <a:off x="761238" y="3941156"/>
+            <a:ext cx="123444" cy="123444"/>
+          </a:xfrm>
+          <a:prstGeom prst="ellipse">
+            <a:avLst/>
+          </a:prstGeom>
+          <a:solidFill>
+            <a:srgbClr val="FFFFFF"/>
+          </a:solidFill>
+          <a:ln w="19050">
+            <a:solidFill>
+              <a:srgbClr val="C0642A"/>
+            </a:solidFill>
+          </a:ln>
+          <a:effectLst/>
+        </p:spPr>
+        <p:style>
+          <a:lnRef idx="1">
+            <a:schemeClr val="accent1"/>
+          </a:lnRef>
+          <a:fillRef idx="3">
+            <a:schemeClr val="accent1"/>
+          </a:fillRef>
+          <a:effectRef idx="2">
+            <a:schemeClr val="accent1"/>
+          </a:effectRef>
+          <a:fontRef idx="minor">
+            <a:schemeClr val="lt1"/>
+          </a:fontRef>
+        </p:style>
+        <p:txBody>
+          <a:bodyPr rtlCol="0" anchor="ctr" wrap="square"/>
+          <a:lstStyle/>
+          <a:p>
+            <a:pPr algn="ctr"/>
+          </a:p>
+        </p:txBody>
+      </p:sp>
+      <p:sp>
+        <p:nvSpPr>
+          <p:cNvPr id="31" name="Oval 30"/>
+          <p:cNvSpPr/>
+          <p:nvPr/>
+        </p:nvSpPr>
+        <p:spPr>
+          <a:xfrm>
+            <a:off x="761238" y="4235209"/>
+            <a:ext cx="123444" cy="123444"/>
+          </a:xfrm>
+          <a:prstGeom prst="ellipse">
+            <a:avLst/>
+          </a:prstGeom>
+          <a:solidFill>
+            <a:srgbClr val="FFFFFF"/>
+          </a:solidFill>
+          <a:ln w="19050">
+            <a:solidFill>
+              <a:srgbClr val="C0642A"/>
+            </a:solidFill>
+          </a:ln>
+          <a:effectLst/>
+        </p:spPr>
+        <p:style>
+          <a:lnRef idx="1">
+            <a:schemeClr val="accent1"/>
+          </a:lnRef>
+          <a:fillRef idx="3">
+            <a:schemeClr val="accent1"/>
+          </a:fillRef>
+          <a:effectRef idx="2">
+            <a:schemeClr val="accent1"/>
+          </a:effectRef>
+          <a:fontRef idx="minor">
+            <a:schemeClr val="lt1"/>
+          </a:fontRef>
+        </p:style>
+        <p:txBody>
+          <a:bodyPr rtlCol="0" anchor="ctr" wrap="square"/>
+          <a:lstStyle/>
+          <a:p>
+            <a:pPr algn="ctr"/>
+          </a:p>
+        </p:txBody>
+      </p:sp>
+      <p:sp>
+        <p:nvSpPr>
+          <p:cNvPr id="32" name="Oval 31"/>
+          <p:cNvSpPr/>
+          <p:nvPr/>
+        </p:nvSpPr>
+        <p:spPr>
+          <a:xfrm>
+            <a:off x="761238" y="4741020"/>
+            <a:ext cx="123444" cy="123444"/>
+          </a:xfrm>
+          <a:prstGeom prst="ellipse">
+            <a:avLst/>
+          </a:prstGeom>
+          <a:solidFill>
+            <a:srgbClr val="FFFFFF"/>
+          </a:solidFill>
+          <a:ln w="19050">
+            <a:solidFill>
+              <a:srgbClr val="C0642A"/>
+            </a:solidFill>
+          </a:ln>
+          <a:effectLst/>
+        </p:spPr>
+        <p:style>
+          <a:lnRef idx="1">
+            <a:schemeClr val="accent1"/>
+          </a:lnRef>
+          <a:fillRef idx="3">
+            <a:schemeClr val="accent1"/>
+          </a:fillRef>
+          <a:effectRef idx="2">
+            <a:schemeClr val="accent1"/>
+          </a:effectRef>
+          <a:fontRef idx="minor">
+            <a:schemeClr val="lt1"/>
+          </a:fontRef>
+        </p:style>
+        <p:txBody>
+          <a:bodyPr rtlCol="0" anchor="ctr" wrap="square"/>
+          <a:lstStyle/>
+          <a:p>
+            <a:pPr algn="ctr"/>
+          </a:p>
+        </p:txBody>
+      </p:sp>
+      <p:sp>
+        <p:nvSpPr>
+          <p:cNvPr id="33" name="Rounded Rectangle 32"/>
+          <p:cNvSpPr/>
+          <p:nvPr/>
+        </p:nvSpPr>
+        <p:spPr>
+          <a:xfrm>
+            <a:off x="7699248" y="1282288"/>
+            <a:ext cx="3922775" cy="274320"/>
+          </a:xfrm>
+          <a:prstGeom prst="roundRect">
+            <a:avLst>
+              <a:gd name="adj" fmla="val 20000"/>
+            </a:avLst>
+          </a:prstGeom>
+          <a:solidFill>
+            <a:srgbClr val="0F2540"/>
           </a:solidFill>
           <a:ln>
             <a:noFill/>
@@ -4166,14 +5714,14 @@
       </p:sp>
       <p:sp>
         <p:nvSpPr>
-          <p:cNvPr id="9" name="TextBox 8"/>
+          <p:cNvPr id="34" name="TextBox 33"/>
           <p:cNvSpPr txBox="1"/>
           <p:nvPr/>
         </p:nvSpPr>
         <p:spPr>
           <a:xfrm>
-            <a:off x="749808" y="1975104"/>
-            <a:ext cx="2281428" cy="914400"/>
+            <a:off x="7936992" y="1323404"/>
+            <a:ext cx="3502151" cy="210375"/>
           </a:xfrm>
           <a:prstGeom prst="rect">
             <a:avLst/>
@@ -4187,59 +5735,224 @@
           <a:lstStyle/>
           <a:p>
             <a:pPr algn="l">
-              <a:spcAft>
-                <a:spcPts val="500"/>
-              </a:spcAft>
+              <a:lnSpc>
+                <a:spcPct val="100000"/>
+              </a:lnSpc>
             </a:pPr>
             <a:r>
-              <a:rPr sz="1150" b="1" i="0" spc="80">
-                <a:solidFill>
-                  <a:srgbClr val="C0642A"/>
-                </a:solidFill>
-                <a:latin typeface="Calibri"/>
-              </a:rPr>
-              <a:t>01  INGEST</a:t>
-            </a:r>
-          </a:p>
+              <a:rPr sz="1250" b="1" i="0" spc="60">
+                <a:solidFill>
+                  <a:srgbClr val="FFFFFF"/>
+                </a:solidFill>
+                <a:latin typeface="Calibri"/>
+              </a:rPr>
+              <a:t>The Part Nobody Else Built</a:t>
+            </a:r>
+          </a:p>
+        </p:txBody>
+      </p:sp>
+      <p:sp>
+        <p:nvSpPr>
+          <p:cNvPr id="35" name="TextBox 34"/>
+          <p:cNvSpPr txBox="1"/>
+          <p:nvPr/>
+        </p:nvSpPr>
+        <p:spPr>
+          <a:xfrm>
+            <a:off x="8174736" y="1648048"/>
+            <a:ext cx="3374135" cy="441802"/>
+          </a:xfrm>
+          <a:prstGeom prst="rect">
+            <a:avLst/>
+          </a:prstGeom>
+          <a:noFill/>
+        </p:spPr>
+        <p:txBody>
+          <a:bodyPr wrap="square" anchor="t" lIns="0" rIns="0" tIns="0" bIns="0">
+            <a:spAutoFit/>
+          </a:bodyPr>
+          <a:lstStyle/>
           <a:p>
             <a:pPr algn="l">
               <a:lnSpc>
-                <a:spcPct val="105000"/>
+                <a:spcPct val="106000"/>
               </a:lnSpc>
             </a:pPr>
             <a:r>
+              <a:rPr sz="1300" b="1" i="0">
+                <a:solidFill>
+                  <a:srgbClr val="1A2733"/>
+                </a:solidFill>
+                <a:latin typeface="Calibri"/>
+              </a:rPr>
+              <a:t>It grades itself</a:t>
+            </a:r>
+            <a:r>
               <a:rPr sz="1300" b="0" i="0">
                 <a:solidFill>
-                  <a:srgbClr val="0F2540"/>
-                </a:solidFill>
-                <a:latin typeface="Calibri"/>
-              </a:rPr>
-              <a:t>RFP, Aberdeen credentials, prior proposals, case studies.</a:t>
-            </a:r>
-          </a:p>
-        </p:txBody>
-      </p:sp>
-      <p:sp>
-        <p:nvSpPr>
-          <p:cNvPr id="10" name="Rectangle 9"/>
+                  <a:srgbClr val="1A2733"/>
+                </a:solidFill>
+                <a:latin typeface="Calibri"/>
+              </a:rPr>
+              <a:t> against the client's own weighted rubric before you send it.</a:t>
+            </a:r>
+          </a:p>
+        </p:txBody>
+      </p:sp>
+      <p:sp>
+        <p:nvSpPr>
+          <p:cNvPr id="36" name="TextBox 35"/>
+          <p:cNvSpPr txBox="1"/>
+          <p:nvPr/>
+        </p:nvSpPr>
+        <p:spPr>
+          <a:xfrm>
+            <a:off x="8174736" y="2153859"/>
+            <a:ext cx="3374135" cy="441802"/>
+          </a:xfrm>
+          <a:prstGeom prst="rect">
+            <a:avLst/>
+          </a:prstGeom>
+          <a:noFill/>
+        </p:spPr>
+        <p:txBody>
+          <a:bodyPr wrap="square" anchor="t" lIns="0" rIns="0" tIns="0" bIns="0">
+            <a:spAutoFit/>
+          </a:bodyPr>
+          <a:lstStyle/>
+          <a:p>
+            <a:pPr algn="l">
+              <a:lnSpc>
+                <a:spcPct val="106000"/>
+              </a:lnSpc>
+            </a:pPr>
+            <a:r>
+              <a:rPr sz="1300" b="0" i="0">
+                <a:solidFill>
+                  <a:srgbClr val="1A2733"/>
+                </a:solidFill>
+                <a:latin typeface="Calibri"/>
+              </a:rPr>
+              <a:t>We have been the buy-side judge for years, so we already hold the scoring sheets.</a:t>
+            </a:r>
+          </a:p>
+        </p:txBody>
+      </p:sp>
+      <p:sp>
+        <p:nvSpPr>
+          <p:cNvPr id="37" name="TextBox 36"/>
+          <p:cNvSpPr txBox="1"/>
+          <p:nvPr/>
+        </p:nvSpPr>
+        <p:spPr>
+          <a:xfrm>
+            <a:off x="8174736" y="2659669"/>
+            <a:ext cx="3374135" cy="441802"/>
+          </a:xfrm>
+          <a:prstGeom prst="rect">
+            <a:avLst/>
+          </a:prstGeom>
+          <a:noFill/>
+        </p:spPr>
+        <p:txBody>
+          <a:bodyPr wrap="square" anchor="t" lIns="0" rIns="0" tIns="0" bIns="0">
+            <a:spAutoFit/>
+          </a:bodyPr>
+          <a:lstStyle/>
+          <a:p>
+            <a:pPr algn="l">
+              <a:lnSpc>
+                <a:spcPct val="106000"/>
+              </a:lnSpc>
+            </a:pPr>
+            <a:r>
+              <a:rPr sz="1300" b="1" i="0">
+                <a:solidFill>
+                  <a:srgbClr val="1A2733"/>
+                </a:solidFill>
+                <a:latin typeface="Calibri"/>
+              </a:rPr>
+              <a:t>Completeness check:</a:t>
+            </a:r>
+            <a:r>
+              <a:rPr sz="1300" b="0" i="0">
+                <a:solidFill>
+                  <a:srgbClr val="1A2733"/>
+                </a:solidFill>
+                <a:latin typeface="Calibri"/>
+              </a:rPr>
+              <a:t> an unanswered requirement is a non-responsive bid.</a:t>
+            </a:r>
+          </a:p>
+        </p:txBody>
+      </p:sp>
+      <p:sp>
+        <p:nvSpPr>
+          <p:cNvPr id="38" name="TextBox 37"/>
+          <p:cNvSpPr txBox="1"/>
+          <p:nvPr/>
+        </p:nvSpPr>
+        <p:spPr>
+          <a:xfrm>
+            <a:off x="8174736" y="3165480"/>
+            <a:ext cx="3374135" cy="865317"/>
+          </a:xfrm>
+          <a:prstGeom prst="rect">
+            <a:avLst/>
+          </a:prstGeom>
+          <a:noFill/>
+        </p:spPr>
+        <p:txBody>
+          <a:bodyPr wrap="square" anchor="t" lIns="0" rIns="0" tIns="0" bIns="0">
+            <a:spAutoFit/>
+          </a:bodyPr>
+          <a:lstStyle/>
+          <a:p>
+            <a:pPr algn="l">
+              <a:lnSpc>
+                <a:spcPct val="106000"/>
+              </a:lnSpc>
+            </a:pPr>
+            <a:r>
+              <a:rPr sz="1300" b="1" i="0">
+                <a:solidFill>
+                  <a:srgbClr val="1A2733"/>
+                </a:solidFill>
+                <a:latin typeface="Calibri"/>
+              </a:rPr>
+              <a:t>“Why Aberdeen”</a:t>
+            </a:r>
+            <a:r>
+              <a:rPr sz="1300" b="0" i="0">
+                <a:solidFill>
+                  <a:srgbClr val="1A2733"/>
+                </a:solidFill>
+                <a:latin typeface="Calibri"/>
+              </a:rPr>
+              <a:t> comes from our Culture Charter — low-ego, high-ownership partnership — with every claim citing its source.</a:t>
+            </a:r>
+          </a:p>
+        </p:txBody>
+      </p:sp>
+      <p:sp>
+        <p:nvSpPr>
+          <p:cNvPr id="39" name="Rectangle 38"/>
           <p:cNvSpPr/>
           <p:nvPr/>
         </p:nvSpPr>
         <p:spPr>
           <a:xfrm>
-            <a:off x="3369564" y="1773936"/>
-            <a:ext cx="2647188" cy="1170432"/>
+            <a:off x="7948879" y="1602328"/>
+            <a:ext cx="12801" cy="1669030"/>
           </a:xfrm>
           <a:prstGeom prst="rect">
             <a:avLst/>
           </a:prstGeom>
           <a:solidFill>
-            <a:srgbClr val="F1F4F7"/>
+            <a:srgbClr val="D3DAE2"/>
           </a:solidFill>
-          <a:ln w="9525">
-            <a:solidFill>
-              <a:srgbClr val="D8DEE6"/>
-            </a:solidFill>
+          <a:ln>
+            <a:noFill/>
           </a:ln>
           <a:effectLst/>
         </p:spPr>
@@ -4267,23 +5980,25 @@
       </p:sp>
       <p:sp>
         <p:nvSpPr>
-          <p:cNvPr id="11" name="Rectangle 10"/>
+          <p:cNvPr id="40" name="Oval 39"/>
           <p:cNvSpPr/>
           <p:nvPr/>
         </p:nvSpPr>
         <p:spPr>
           <a:xfrm>
-            <a:off x="3369564" y="1773936"/>
-            <a:ext cx="2647188" cy="50292"/>
-          </a:xfrm>
-          <a:prstGeom prst="rect">
+            <a:off x="7893557" y="1692205"/>
+            <a:ext cx="123444" cy="123444"/>
+          </a:xfrm>
+          <a:prstGeom prst="ellipse">
             <a:avLst/>
           </a:prstGeom>
           <a:solidFill>
-            <a:srgbClr val="C0642A"/>
+            <a:srgbClr val="FFFFFF"/>
           </a:solidFill>
-          <a:ln>
-            <a:noFill/>
+          <a:ln w="19050">
+            <a:solidFill>
+              <a:srgbClr val="C0642A"/>
+            </a:solidFill>
           </a:ln>
           <a:effectLst/>
         </p:spPr>
@@ -4311,79 +6026,24 @@
       </p:sp>
       <p:sp>
         <p:nvSpPr>
-          <p:cNvPr id="12" name="TextBox 11"/>
-          <p:cNvSpPr txBox="1"/>
-          <p:nvPr/>
-        </p:nvSpPr>
-        <p:spPr>
-          <a:xfrm>
-            <a:off x="3552444" y="1975104"/>
-            <a:ext cx="2281428" cy="914400"/>
-          </a:xfrm>
-          <a:prstGeom prst="rect">
-            <a:avLst/>
-          </a:prstGeom>
-          <a:noFill/>
-        </p:spPr>
-        <p:txBody>
-          <a:bodyPr wrap="square" anchor="t" lIns="0" rIns="0" tIns="0" bIns="0">
-            <a:spAutoFit/>
-          </a:bodyPr>
-          <a:lstStyle/>
-          <a:p>
-            <a:pPr algn="l">
-              <a:spcAft>
-                <a:spcPts val="500"/>
-              </a:spcAft>
-            </a:pPr>
-            <a:r>
-              <a:rPr sz="1150" b="1" i="0" spc="80">
-                <a:solidFill>
-                  <a:srgbClr val="C0642A"/>
-                </a:solidFill>
-                <a:latin typeface="Calibri"/>
-              </a:rPr>
-              <a:t>02  ANALYZE</a:t>
-            </a:r>
-          </a:p>
-          <a:p>
-            <a:pPr algn="l">
-              <a:lnSpc>
-                <a:spcPct val="105000"/>
-              </a:lnSpc>
-            </a:pPr>
-            <a:r>
-              <a:rPr sz="1300" b="0" i="0">
-                <a:solidFill>
-                  <a:srgbClr val="0F2540"/>
-                </a:solidFill>
-                <a:latin typeface="Calibri"/>
-              </a:rPr>
-              <a:t>Objectives, requirements, constraints, evaluation criteria.</a:t>
-            </a:r>
-          </a:p>
-        </p:txBody>
-      </p:sp>
-      <p:sp>
-        <p:nvSpPr>
-          <p:cNvPr id="13" name="Rectangle 12"/>
+          <p:cNvPr id="41" name="Oval 40"/>
           <p:cNvSpPr/>
           <p:nvPr/>
         </p:nvSpPr>
         <p:spPr>
           <a:xfrm>
-            <a:off x="6172200" y="1773936"/>
-            <a:ext cx="2647188" cy="1170432"/>
-          </a:xfrm>
-          <a:prstGeom prst="rect">
+            <a:off x="7893557" y="2198015"/>
+            <a:ext cx="123444" cy="123444"/>
+          </a:xfrm>
+          <a:prstGeom prst="ellipse">
             <a:avLst/>
           </a:prstGeom>
           <a:solidFill>
-            <a:srgbClr val="F1F4F7"/>
+            <a:srgbClr val="FFFFFF"/>
           </a:solidFill>
-          <a:ln w="9525">
+          <a:ln w="19050">
             <a:solidFill>
-              <a:srgbClr val="D8DEE6"/>
+              <a:srgbClr val="C0642A"/>
             </a:solidFill>
           </a:ln>
           <a:effectLst/>
@@ -4412,23 +6072,25 @@
       </p:sp>
       <p:sp>
         <p:nvSpPr>
-          <p:cNvPr id="14" name="Rectangle 13"/>
+          <p:cNvPr id="42" name="Oval 41"/>
           <p:cNvSpPr/>
           <p:nvPr/>
         </p:nvSpPr>
         <p:spPr>
           <a:xfrm>
-            <a:off x="6172200" y="1773936"/>
-            <a:ext cx="2647188" cy="50292"/>
-          </a:xfrm>
-          <a:prstGeom prst="rect">
+            <a:off x="7893557" y="2703826"/>
+            <a:ext cx="123444" cy="123444"/>
+          </a:xfrm>
+          <a:prstGeom prst="ellipse">
             <a:avLst/>
           </a:prstGeom>
           <a:solidFill>
-            <a:srgbClr val="C0642A"/>
+            <a:srgbClr val="FFFFFF"/>
           </a:solidFill>
-          <a:ln>
-            <a:noFill/>
+          <a:ln w="19050">
+            <a:solidFill>
+              <a:srgbClr val="C0642A"/>
+            </a:solidFill>
           </a:ln>
           <a:effectLst/>
         </p:spPr>
@@ -4456,79 +6118,24 @@
       </p:sp>
       <p:sp>
         <p:nvSpPr>
-          <p:cNvPr id="15" name="TextBox 14"/>
-          <p:cNvSpPr txBox="1"/>
-          <p:nvPr/>
-        </p:nvSpPr>
-        <p:spPr>
-          <a:xfrm>
-            <a:off x="6355080" y="1975104"/>
-            <a:ext cx="2281428" cy="914400"/>
-          </a:xfrm>
-          <a:prstGeom prst="rect">
-            <a:avLst/>
-          </a:prstGeom>
-          <a:noFill/>
-        </p:spPr>
-        <p:txBody>
-          <a:bodyPr wrap="square" anchor="t" lIns="0" rIns="0" tIns="0" bIns="0">
-            <a:spAutoFit/>
-          </a:bodyPr>
-          <a:lstStyle/>
-          <a:p>
-            <a:pPr algn="l">
-              <a:spcAft>
-                <a:spcPts val="500"/>
-              </a:spcAft>
-            </a:pPr>
-            <a:r>
-              <a:rPr sz="1150" b="1" i="0" spc="80">
-                <a:solidFill>
-                  <a:srgbClr val="C0642A"/>
-                </a:solidFill>
-                <a:latin typeface="Calibri"/>
-              </a:rPr>
-              <a:t>03  DRAFT</a:t>
-            </a:r>
-          </a:p>
-          <a:p>
-            <a:pPr algn="l">
-              <a:lnSpc>
-                <a:spcPct val="105000"/>
-              </a:lnSpc>
-            </a:pPr>
-            <a:r>
-              <a:rPr sz="1300" b="0" i="0">
-                <a:solidFill>
-                  <a:srgbClr val="0F2540"/>
-                </a:solidFill>
-                <a:latin typeface="Calibri"/>
-              </a:rPr>
-              <a:t>Win themes first — then approach, staffing, timeline, copy.</a:t>
-            </a:r>
-          </a:p>
-        </p:txBody>
-      </p:sp>
-      <p:sp>
-        <p:nvSpPr>
-          <p:cNvPr id="16" name="Rectangle 15"/>
+          <p:cNvPr id="43" name="Oval 42"/>
           <p:cNvSpPr/>
           <p:nvPr/>
         </p:nvSpPr>
         <p:spPr>
           <a:xfrm>
-            <a:off x="8974836" y="1773936"/>
-            <a:ext cx="2647188" cy="1170432"/>
-          </a:xfrm>
-          <a:prstGeom prst="rect">
+            <a:off x="7893557" y="3209636"/>
+            <a:ext cx="123444" cy="123444"/>
+          </a:xfrm>
+          <a:prstGeom prst="ellipse">
             <a:avLst/>
           </a:prstGeom>
           <a:solidFill>
-            <a:srgbClr val="F1F4F7"/>
+            <a:srgbClr val="FFFFFF"/>
           </a:solidFill>
-          <a:ln w="9525">
+          <a:ln w="19050">
             <a:solidFill>
-              <a:srgbClr val="D8DEE6"/>
+              <a:srgbClr val="C0642A"/>
             </a:solidFill>
           </a:ln>
           <a:effectLst/>
@@ -4557,58 +6164,14 @@
       </p:sp>
       <p:sp>
         <p:nvSpPr>
-          <p:cNvPr id="17" name="Rectangle 16"/>
-          <p:cNvSpPr/>
-          <p:nvPr/>
-        </p:nvSpPr>
-        <p:spPr>
-          <a:xfrm>
-            <a:off x="8974836" y="1773936"/>
-            <a:ext cx="2647188" cy="50292"/>
-          </a:xfrm>
-          <a:prstGeom prst="rect">
-            <a:avLst/>
-          </a:prstGeom>
-          <a:solidFill>
-            <a:srgbClr val="C0642A"/>
-          </a:solidFill>
-          <a:ln>
-            <a:noFill/>
-          </a:ln>
-          <a:effectLst/>
-        </p:spPr>
-        <p:style>
-          <a:lnRef idx="1">
-            <a:schemeClr val="accent1"/>
-          </a:lnRef>
-          <a:fillRef idx="3">
-            <a:schemeClr val="accent1"/>
-          </a:fillRef>
-          <a:effectRef idx="2">
-            <a:schemeClr val="accent1"/>
-          </a:effectRef>
-          <a:fontRef idx="minor">
-            <a:schemeClr val="lt1"/>
-          </a:fontRef>
-        </p:style>
-        <p:txBody>
-          <a:bodyPr rtlCol="0" anchor="ctr" wrap="square"/>
-          <a:lstStyle/>
-          <a:p>
-            <a:pPr algn="ctr"/>
-          </a:p>
-        </p:txBody>
-      </p:sp>
-      <p:sp>
-        <p:nvSpPr>
-          <p:cNvPr id="18" name="TextBox 17"/>
+          <p:cNvPr id="44" name="TextBox 43"/>
           <p:cNvSpPr txBox="1"/>
           <p:nvPr/>
         </p:nvSpPr>
         <p:spPr>
           <a:xfrm>
-            <a:off x="9157715" y="1975104"/>
-            <a:ext cx="2281428" cy="914400"/>
+            <a:off x="566928" y="6345936"/>
+            <a:ext cx="10058400" cy="217444"/>
           </a:xfrm>
           <a:prstGeom prst="rect">
             <a:avLst/>
@@ -4620,402 +6183,6 @@
             <a:spAutoFit/>
           </a:bodyPr>
           <a:lstStyle/>
-          <a:p>
-            <a:pPr algn="l">
-              <a:spcAft>
-                <a:spcPts val="500"/>
-              </a:spcAft>
-            </a:pPr>
-            <a:r>
-              <a:rPr sz="1150" b="1" i="0" spc="80">
-                <a:solidFill>
-                  <a:srgbClr val="C0642A"/>
-                </a:solidFill>
-                <a:latin typeface="Calibri"/>
-              </a:rPr>
-              <a:t>04  SCORE</a:t>
-            </a:r>
-          </a:p>
-          <a:p>
-            <a:pPr algn="l">
-              <a:lnSpc>
-                <a:spcPct val="105000"/>
-              </a:lnSpc>
-            </a:pPr>
-            <a:r>
-              <a:rPr sz="1300" b="0" i="0">
-                <a:solidFill>
-                  <a:srgbClr val="0F2540"/>
-                </a:solidFill>
-                <a:latin typeface="Calibri"/>
-              </a:rPr>
-              <a:t>Predicted rubric score and completeness check before send.</a:t>
-            </a:r>
-          </a:p>
-        </p:txBody>
-      </p:sp>
-      <p:sp>
-        <p:nvSpPr>
-          <p:cNvPr id="19" name="Rectangle 18"/>
-          <p:cNvSpPr/>
-          <p:nvPr/>
-        </p:nvSpPr>
-        <p:spPr>
-          <a:xfrm>
-            <a:off x="566928" y="3145536"/>
-            <a:ext cx="5330952" cy="2889504"/>
-          </a:xfrm>
-          <a:prstGeom prst="rect">
-            <a:avLst/>
-          </a:prstGeom>
-          <a:solidFill>
-            <a:srgbClr val="F1F4F7"/>
-          </a:solidFill>
-          <a:ln w="9525">
-            <a:solidFill>
-              <a:srgbClr val="D8DEE6"/>
-            </a:solidFill>
-          </a:ln>
-          <a:effectLst/>
-        </p:spPr>
-        <p:style>
-          <a:lnRef idx="1">
-            <a:schemeClr val="accent1"/>
-          </a:lnRef>
-          <a:fillRef idx="3">
-            <a:schemeClr val="accent1"/>
-          </a:fillRef>
-          <a:effectRef idx="2">
-            <a:schemeClr val="accent1"/>
-          </a:effectRef>
-          <a:fontRef idx="minor">
-            <a:schemeClr val="lt1"/>
-          </a:fontRef>
-        </p:style>
-        <p:txBody>
-          <a:bodyPr rtlCol="0" anchor="ctr" wrap="square"/>
-          <a:lstStyle/>
-          <a:p>
-            <a:pPr algn="ctr"/>
-          </a:p>
-        </p:txBody>
-      </p:sp>
-      <p:sp>
-        <p:nvSpPr>
-          <p:cNvPr id="20" name="TextBox 19"/>
-          <p:cNvSpPr txBox="1"/>
-          <p:nvPr/>
-        </p:nvSpPr>
-        <p:spPr>
-          <a:xfrm>
-            <a:off x="804672" y="3346704"/>
-            <a:ext cx="4855464" cy="2487168"/>
-          </a:xfrm>
-          <a:prstGeom prst="rect">
-            <a:avLst/>
-          </a:prstGeom>
-          <a:noFill/>
-        </p:spPr>
-        <p:txBody>
-          <a:bodyPr wrap="square" anchor="t" lIns="0" rIns="0" tIns="0" bIns="0">
-            <a:spAutoFit/>
-          </a:bodyPr>
-          <a:lstStyle/>
-          <a:p>
-            <a:pPr algn="l">
-              <a:spcAft>
-                <a:spcPts val="700"/>
-              </a:spcAft>
-            </a:pPr>
-            <a:r>
-              <a:rPr sz="1300" b="1" i="0" spc="80">
-                <a:solidFill>
-                  <a:srgbClr val="0F2540"/>
-                </a:solidFill>
-                <a:latin typeface="Calibri"/>
-              </a:rPr>
-              <a:t>WHAT IT HANDS YOU</a:t>
-            </a:r>
-          </a:p>
-          <a:p>
-            <a:pPr algn="l">
-              <a:lnSpc>
-                <a:spcPct val="105000"/>
-              </a:lnSpc>
-              <a:spcAft>
-                <a:spcPts val="900"/>
-              </a:spcAft>
-            </a:pPr>
-            <a:r>
-              <a:rPr sz="1400" b="0" i="0">
-                <a:solidFill>
-                  <a:srgbClr val="4A5A6E"/>
-                </a:solidFill>
-                <a:latin typeface="Calibri"/>
-              </a:rPr>
-              <a:t>Three win themes, tied to the client's stated priorities.</a:t>
-            </a:r>
-          </a:p>
-          <a:p>
-            <a:pPr algn="l">
-              <a:lnSpc>
-                <a:spcPct val="105000"/>
-              </a:lnSpc>
-              <a:spcAft>
-                <a:spcPts val="900"/>
-              </a:spcAft>
-            </a:pPr>
-            <a:r>
-              <a:rPr sz="1400" b="0" i="0">
-                <a:solidFill>
-                  <a:srgbClr val="4A5A6E"/>
-                </a:solidFill>
-                <a:latin typeface="Calibri"/>
-              </a:rPr>
-              <a:t>Solution approach, staffing model, timeline.</a:t>
-            </a:r>
-          </a:p>
-          <a:p>
-            <a:pPr algn="l">
-              <a:lnSpc>
-                <a:spcPct val="105000"/>
-              </a:lnSpc>
-              <a:spcAft>
-                <a:spcPts val="900"/>
-              </a:spcAft>
-            </a:pPr>
-            <a:r>
-              <a:rPr sz="1400" b="0" i="0">
-                <a:solidFill>
-                  <a:srgbClr val="4A5A6E"/>
-                </a:solidFill>
-                <a:latin typeface="Calibri"/>
-              </a:rPr>
-              <a:t>Aberdeen experience ranked by relevance — and why it is relevant.</a:t>
-            </a:r>
-          </a:p>
-          <a:p>
-            <a:pPr algn="l">
-              <a:lnSpc>
-                <a:spcPct val="105000"/>
-              </a:lnSpc>
-              <a:spcAft>
-                <a:spcPts val="900"/>
-              </a:spcAft>
-            </a:pPr>
-            <a:r>
-              <a:rPr sz="1400" b="0" i="0">
-                <a:solidFill>
-                  <a:srgbClr val="4A5A6E"/>
-                </a:solidFill>
-                <a:latin typeface="Calibri"/>
-              </a:rPr>
-              <a:t>First-draft copy for the opening sections, structured to the client's own required response items.</a:t>
-            </a:r>
-          </a:p>
-          <a:p>
-            <a:pPr algn="l">
-              <a:lnSpc>
-                <a:spcPct val="105000"/>
-              </a:lnSpc>
-              <a:spcAft>
-                <a:spcPts val="0"/>
-              </a:spcAft>
-            </a:pPr>
-            <a:r>
-              <a:rPr sz="1400" b="0" i="0">
-                <a:solidFill>
-                  <a:srgbClr val="4A5A6E"/>
-                </a:solidFill>
-                <a:latin typeface="Calibri"/>
-              </a:rPr>
-              <a:t>A Response Action per requirement: what it asks of us.</a:t>
-            </a:r>
-          </a:p>
-        </p:txBody>
-      </p:sp>
-      <p:sp>
-        <p:nvSpPr>
-          <p:cNvPr id="21" name="Rectangle 20"/>
-          <p:cNvSpPr/>
-          <p:nvPr/>
-        </p:nvSpPr>
-        <p:spPr>
-          <a:xfrm>
-            <a:off x="6291072" y="3145536"/>
-            <a:ext cx="5330952" cy="2889504"/>
-          </a:xfrm>
-          <a:prstGeom prst="rect">
-            <a:avLst/>
-          </a:prstGeom>
-          <a:solidFill>
-            <a:srgbClr val="0B1C30"/>
-          </a:solidFill>
-          <a:ln>
-            <a:noFill/>
-          </a:ln>
-          <a:effectLst/>
-        </p:spPr>
-        <p:style>
-          <a:lnRef idx="1">
-            <a:schemeClr val="accent1"/>
-          </a:lnRef>
-          <a:fillRef idx="3">
-            <a:schemeClr val="accent1"/>
-          </a:fillRef>
-          <a:effectRef idx="2">
-            <a:schemeClr val="accent1"/>
-          </a:effectRef>
-          <a:fontRef idx="minor">
-            <a:schemeClr val="lt1"/>
-          </a:fontRef>
-        </p:style>
-        <p:txBody>
-          <a:bodyPr rtlCol="0" anchor="ctr" wrap="square"/>
-          <a:lstStyle/>
-          <a:p>
-            <a:pPr algn="ctr"/>
-          </a:p>
-        </p:txBody>
-      </p:sp>
-      <p:sp>
-        <p:nvSpPr>
-          <p:cNvPr id="22" name="Rectangle 21"/>
-          <p:cNvSpPr/>
-          <p:nvPr/>
-        </p:nvSpPr>
-        <p:spPr>
-          <a:xfrm>
-            <a:off x="6291072" y="3145536"/>
-            <a:ext cx="5330952" cy="64008"/>
-          </a:xfrm>
-          <a:prstGeom prst="rect">
-            <a:avLst/>
-          </a:prstGeom>
-          <a:solidFill>
-            <a:srgbClr val="C0642A"/>
-          </a:solidFill>
-          <a:ln>
-            <a:noFill/>
-          </a:ln>
-          <a:effectLst/>
-        </p:spPr>
-        <p:style>
-          <a:lnRef idx="1">
-            <a:schemeClr val="accent1"/>
-          </a:lnRef>
-          <a:fillRef idx="3">
-            <a:schemeClr val="accent1"/>
-          </a:fillRef>
-          <a:effectRef idx="2">
-            <a:schemeClr val="accent1"/>
-          </a:effectRef>
-          <a:fontRef idx="minor">
-            <a:schemeClr val="lt1"/>
-          </a:fontRef>
-        </p:style>
-        <p:txBody>
-          <a:bodyPr rtlCol="0" anchor="ctr" wrap="square"/>
-          <a:lstStyle/>
-          <a:p>
-            <a:pPr algn="ctr"/>
-          </a:p>
-        </p:txBody>
-      </p:sp>
-      <p:sp>
-        <p:nvSpPr>
-          <p:cNvPr id="23" name="TextBox 22"/>
-          <p:cNvSpPr txBox="1"/>
-          <p:nvPr/>
-        </p:nvSpPr>
-        <p:spPr>
-          <a:xfrm>
-            <a:off x="6528816" y="3383280"/>
-            <a:ext cx="4855464" cy="2487168"/>
-          </a:xfrm>
-          <a:prstGeom prst="rect">
-            <a:avLst/>
-          </a:prstGeom>
-          <a:noFill/>
-        </p:spPr>
-        <p:txBody>
-          <a:bodyPr wrap="square" anchor="t" lIns="0" rIns="0" tIns="0" bIns="0">
-            <a:spAutoFit/>
-          </a:bodyPr>
-          <a:lstStyle/>
-          <a:p>
-            <a:pPr algn="l">
-              <a:spcAft>
-                <a:spcPts val="900"/>
-              </a:spcAft>
-            </a:pPr>
-            <a:r>
-              <a:rPr sz="1300" b="1" i="0" spc="80">
-                <a:solidFill>
-                  <a:srgbClr val="C0642A"/>
-                </a:solidFill>
-                <a:latin typeface="Calibri"/>
-              </a:rPr>
-              <a:t>THE PART NOBODY ELSE BUILT</a:t>
-            </a:r>
-          </a:p>
-          <a:p>
-            <a:pPr algn="l">
-              <a:lnSpc>
-                <a:spcPct val="108000"/>
-              </a:lnSpc>
-              <a:spcAft>
-                <a:spcPts val="700"/>
-              </a:spcAft>
-            </a:pPr>
-            <a:r>
-              <a:rPr sz="1400" b="1" i="0">
-                <a:solidFill>
-                  <a:srgbClr val="FFFFFF"/>
-                </a:solidFill>
-                <a:latin typeface="Calibri"/>
-              </a:rPr>
-              <a:t>It grades itself against the client's own weighted rubric before you send it.</a:t>
-            </a:r>
-          </a:p>
-          <a:p>
-            <a:pPr algn="l">
-              <a:lnSpc>
-                <a:spcPct val="108000"/>
-              </a:lnSpc>
-              <a:spcAft>
-                <a:spcPts val="700"/>
-              </a:spcAft>
-            </a:pPr>
-            <a:r>
-              <a:rPr sz="1300" b="0" i="0">
-                <a:solidFill>
-                  <a:srgbClr val="D9E1EA"/>
-                </a:solidFill>
-                <a:latin typeface="Calibri"/>
-              </a:rPr>
-              <a:t>We have been the buy-side judge for years, so we already hold the scoring sheets.</a:t>
-            </a:r>
-          </a:p>
-          <a:p>
-            <a:pPr algn="l">
-              <a:lnSpc>
-                <a:spcPct val="108000"/>
-              </a:lnSpc>
-              <a:spcAft>
-                <a:spcPts val="700"/>
-              </a:spcAft>
-            </a:pPr>
-            <a:r>
-              <a:rPr sz="1300" b="0" i="0">
-                <a:solidFill>
-                  <a:srgbClr val="D9E1EA"/>
-                </a:solidFill>
-                <a:latin typeface="Calibri"/>
-              </a:rPr>
-              <a:t>Completeness check: an unanswered requirement is a non-responsive bid.</a:t>
-            </a:r>
-          </a:p>
           <a:p>
             <a:pPr algn="l">
               <a:lnSpc>
@@ -5023,42 +6190,7 @@
               </a:lnSpc>
             </a:pPr>
             <a:r>
-              <a:rPr sz="1300" b="0" i="0">
-                <a:solidFill>
-                  <a:srgbClr val="D9E1EA"/>
-                </a:solidFill>
-                <a:latin typeface="Calibri"/>
-              </a:rPr>
-              <a:t>“Why Aberdeen” comes from our Culture Charter — low-ego, high-ownership partnership — with every claim citing its source.</a:t>
-            </a:r>
-          </a:p>
-        </p:txBody>
-      </p:sp>
-      <p:sp>
-        <p:nvSpPr>
-          <p:cNvPr id="24" name="TextBox 23"/>
-          <p:cNvSpPr txBox="1"/>
-          <p:nvPr/>
-        </p:nvSpPr>
-        <p:spPr>
-          <a:xfrm>
-            <a:off x="566928" y="6345936"/>
-            <a:ext cx="11055096" cy="274320"/>
-          </a:xfrm>
-          <a:prstGeom prst="rect">
-            <a:avLst/>
-          </a:prstGeom>
-          <a:noFill/>
-        </p:spPr>
-        <p:txBody>
-          <a:bodyPr wrap="square" anchor="t" lIns="0" rIns="0" tIns="0" bIns="0">
-            <a:spAutoFit/>
-          </a:bodyPr>
-          <a:lstStyle/>
-          <a:p>
-            <a:pPr algn="l"/>
-            <a:r>
-              <a:rPr sz="1250" b="0" i="1">
+              <a:rPr sz="1200" b="0" i="1">
                 <a:solidFill>
                   <a:srgbClr val="4A5A6E"/>
                 </a:solidFill>
@@ -5089,17 +6221,180 @@
       <p:grpSpPr/>
       <p:sp>
         <p:nvSpPr>
-          <p:cNvPr id="2" name="Rectangle 1"/>
+          <p:cNvPr id="2" name="TextBox 1"/>
+          <p:cNvSpPr txBox="1"/>
+          <p:nvPr/>
+        </p:nvSpPr>
+        <p:spPr>
+          <a:xfrm>
+            <a:off x="1097280" y="402336"/>
+            <a:ext cx="10058400" cy="237744"/>
+          </a:xfrm>
+          <a:prstGeom prst="rect">
+            <a:avLst/>
+          </a:prstGeom>
+          <a:noFill/>
+        </p:spPr>
+        <p:txBody>
+          <a:bodyPr wrap="square" anchor="t" lIns="0" rIns="0" tIns="0" bIns="0">
+            <a:spAutoFit/>
+          </a:bodyPr>
+          <a:lstStyle/>
+          <a:p>
+            <a:pPr algn="l">
+              <a:lnSpc>
+                <a:spcPct val="106000"/>
+              </a:lnSpc>
+            </a:pPr>
+            <a:r>
+              <a:rPr sz="1200" b="1" i="0" spc="140">
+                <a:solidFill>
+                  <a:srgbClr val="C0642A"/>
+                </a:solidFill>
+                <a:latin typeface="Calibri"/>
+              </a:rPr>
+              <a:t>DEMO</a:t>
+            </a:r>
+          </a:p>
+        </p:txBody>
+      </p:sp>
+      <p:sp>
+        <p:nvSpPr>
+          <p:cNvPr id="3" name="TextBox 2"/>
+          <p:cNvSpPr txBox="1"/>
+          <p:nvPr/>
+        </p:nvSpPr>
+        <p:spPr>
+          <a:xfrm>
+            <a:off x="1097280" y="694944"/>
+            <a:ext cx="10058400" cy="349600"/>
+          </a:xfrm>
+          <a:prstGeom prst="rect">
+            <a:avLst/>
+          </a:prstGeom>
+          <a:noFill/>
+        </p:spPr>
+        <p:txBody>
+          <a:bodyPr wrap="square" anchor="t" lIns="0" rIns="0" tIns="0" bIns="0">
+            <a:spAutoFit/>
+          </a:bodyPr>
+          <a:lstStyle/>
+          <a:p>
+            <a:pPr algn="l">
+              <a:lnSpc>
+                <a:spcPct val="98000"/>
+              </a:lnSpc>
+            </a:pPr>
+            <a:r>
+              <a:rPr sz="2200" b="1" i="0">
+                <a:solidFill>
+                  <a:srgbClr val="0F2540"/>
+                </a:solidFill>
+                <a:latin typeface="Calibri"/>
+              </a:rPr>
+              <a:t>A Wayfarer Market Co. walkthrough, from upload to predicted score.</a:t>
+            </a:r>
+          </a:p>
+        </p:txBody>
+      </p:sp>
+      <p:sp>
+        <p:nvSpPr>
+          <p:cNvPr id="4" name="Rectangle 3"/>
           <p:cNvSpPr/>
           <p:nvPr/>
         </p:nvSpPr>
         <p:spPr>
           <a:xfrm>
-            <a:off x="0" y="0"/>
-            <a:ext cx="12191695" cy="146304"/>
-          </a:xfrm>
-          <a:prstGeom prst="rect">
-            <a:avLst/>
+            <a:off x="566928" y="846884"/>
+            <a:ext cx="384048" cy="27432"/>
+          </a:xfrm>
+          <a:prstGeom prst="rect">
+            <a:avLst/>
+          </a:prstGeom>
+          <a:solidFill>
+            <a:srgbClr val="C0642A"/>
+          </a:solidFill>
+          <a:ln>
+            <a:noFill/>
+          </a:ln>
+          <a:effectLst/>
+        </p:spPr>
+        <p:style>
+          <a:lnRef idx="1">
+            <a:schemeClr val="accent1"/>
+          </a:lnRef>
+          <a:fillRef idx="3">
+            <a:schemeClr val="accent1"/>
+          </a:fillRef>
+          <a:effectRef idx="2">
+            <a:schemeClr val="accent1"/>
+          </a:effectRef>
+          <a:fontRef idx="minor">
+            <a:schemeClr val="lt1"/>
+          </a:fontRef>
+        </p:style>
+        <p:txBody>
+          <a:bodyPr rtlCol="0" anchor="ctr" wrap="square"/>
+          <a:lstStyle/>
+          <a:p>
+            <a:pPr algn="ctr"/>
+          </a:p>
+        </p:txBody>
+      </p:sp>
+      <p:sp>
+        <p:nvSpPr>
+          <p:cNvPr id="5" name="TextBox 4"/>
+          <p:cNvSpPr txBox="1"/>
+          <p:nvPr/>
+        </p:nvSpPr>
+        <p:spPr>
+          <a:xfrm>
+            <a:off x="11002975" y="6400800"/>
+            <a:ext cx="621792" cy="237744"/>
+          </a:xfrm>
+          <a:prstGeom prst="rect">
+            <a:avLst/>
+          </a:prstGeom>
+          <a:noFill/>
+        </p:spPr>
+        <p:txBody>
+          <a:bodyPr wrap="square" anchor="t" lIns="0" rIns="0" tIns="0" bIns="0">
+            <a:spAutoFit/>
+          </a:bodyPr>
+          <a:lstStyle/>
+          <a:p>
+            <a:pPr algn="r">
+              <a:lnSpc>
+                <a:spcPct val="106000"/>
+              </a:lnSpc>
+            </a:pPr>
+            <a:r>
+              <a:rPr sz="1200" b="0" i="0">
+                <a:solidFill>
+                  <a:srgbClr val="4A5A6E"/>
+                </a:solidFill>
+                <a:latin typeface="Calibri"/>
+              </a:rPr>
+              <a:t>3 / 4</a:t>
+            </a:r>
+          </a:p>
+        </p:txBody>
+      </p:sp>
+      <p:sp>
+        <p:nvSpPr>
+          <p:cNvPr id="6" name="Rounded Rectangle 5"/>
+          <p:cNvSpPr/>
+          <p:nvPr/>
+        </p:nvSpPr>
+        <p:spPr>
+          <a:xfrm>
+            <a:off x="566928" y="1282288"/>
+            <a:ext cx="6803136" cy="274320"/>
+          </a:xfrm>
+          <a:prstGeom prst="roundRect">
+            <a:avLst>
+              <a:gd name="adj" fmla="val 20000"/>
+            </a:avLst>
           </a:prstGeom>
           <a:solidFill>
             <a:srgbClr val="0F2540"/>
@@ -5133,14 +6428,14 @@
       </p:sp>
       <p:sp>
         <p:nvSpPr>
-          <p:cNvPr id="3" name="TextBox 2"/>
+          <p:cNvPr id="7" name="TextBox 6"/>
           <p:cNvSpPr txBox="1"/>
           <p:nvPr/>
         </p:nvSpPr>
         <p:spPr>
           <a:xfrm>
-            <a:off x="566928" y="475488"/>
-            <a:ext cx="11055096" cy="237744"/>
+            <a:off x="804672" y="1323404"/>
+            <a:ext cx="6382512" cy="210375"/>
           </a:xfrm>
           <a:prstGeom prst="rect">
             <a:avLst/>
@@ -5153,29 +6448,33 @@
           </a:bodyPr>
           <a:lstStyle/>
           <a:p>
-            <a:pPr algn="l"/>
-            <a:r>
-              <a:rPr sz="1150" b="1" i="0" spc="120">
-                <a:solidFill>
-                  <a:srgbClr val="C0642A"/>
-                </a:solidFill>
-                <a:latin typeface="Calibri"/>
-              </a:rPr>
-              <a:t>DEMO  ·  WAYFARER MARKET CO.</a:t>
-            </a:r>
-          </a:p>
-        </p:txBody>
-      </p:sp>
-      <p:sp>
-        <p:nvSpPr>
-          <p:cNvPr id="4" name="TextBox 3"/>
+            <a:pPr algn="l">
+              <a:lnSpc>
+                <a:spcPct val="100000"/>
+              </a:lnSpc>
+            </a:pPr>
+            <a:r>
+              <a:rPr sz="1250" b="1" i="0" spc="60">
+                <a:solidFill>
+                  <a:srgbClr val="FFFFFF"/>
+                </a:solidFill>
+                <a:latin typeface="Calibri"/>
+              </a:rPr>
+              <a:t>The Input</a:t>
+            </a:r>
+          </a:p>
+        </p:txBody>
+      </p:sp>
+      <p:sp>
+        <p:nvSpPr>
+          <p:cNvPr id="8" name="TextBox 7"/>
           <p:cNvSpPr txBox="1"/>
           <p:nvPr/>
         </p:nvSpPr>
         <p:spPr>
           <a:xfrm>
-            <a:off x="566928" y="786384"/>
-            <a:ext cx="11055096" cy="566928"/>
+            <a:off x="1042416" y="1648048"/>
+            <a:ext cx="6254496" cy="230045"/>
           </a:xfrm>
           <a:prstGeom prst="rect">
             <a:avLst/>
@@ -5190,37 +6489,46 @@
           <a:p>
             <a:pPr algn="l">
               <a:lnSpc>
-                <a:spcPct val="95000"/>
+                <a:spcPct val="106000"/>
               </a:lnSpc>
             </a:pPr>
             <a:r>
-              <a:rPr sz="3000" b="1" i="0">
-                <a:solidFill>
-                  <a:srgbClr val="0F2540"/>
-                </a:solidFill>
-                <a:latin typeface="Calibri"/>
-              </a:rPr>
-              <a:t>Watch a generic proposal lose on the client's criteria.</a:t>
-            </a:r>
-          </a:p>
-        </p:txBody>
-      </p:sp>
-      <p:sp>
-        <p:nvSpPr>
-          <p:cNvPr id="5" name="Rectangle 4"/>
+              <a:rPr sz="1300" b="1" i="0">
+                <a:solidFill>
+                  <a:srgbClr val="1A2733"/>
+                </a:solidFill>
+                <a:latin typeface="Calibri"/>
+              </a:rPr>
+              <a:t>Specialty grocer,</a:t>
+            </a:r>
+            <a:r>
+              <a:rPr sz="1300" b="0" i="0">
+                <a:solidFill>
+                  <a:srgbClr val="1A2733"/>
+                </a:solidFill>
+                <a:latin typeface="Calibri"/>
+              </a:rPr>
+              <a:t> ~500 stores, ~50,000 crew. Grow revenue, keep crew culture intact.</a:t>
+            </a:r>
+          </a:p>
+        </p:txBody>
+      </p:sp>
+      <p:sp>
+        <p:nvSpPr>
+          <p:cNvPr id="9" name="Rectangle 8"/>
           <p:cNvSpPr/>
           <p:nvPr/>
         </p:nvSpPr>
         <p:spPr>
           <a:xfrm>
-            <a:off x="566928" y="1499616"/>
-            <a:ext cx="1371600" cy="41148"/>
+            <a:off x="816559" y="1602328"/>
+            <a:ext cx="12801" cy="151598"/>
           </a:xfrm>
           <a:prstGeom prst="rect">
             <a:avLst/>
           </a:prstGeom>
           <a:solidFill>
-            <a:srgbClr val="C0642A"/>
+            <a:srgbClr val="D3DAE2"/>
           </a:solidFill>
           <a:ln>
             <a:noFill/>
@@ -5251,59 +6559,24 @@
       </p:sp>
       <p:sp>
         <p:nvSpPr>
-          <p:cNvPr id="6" name="TextBox 5"/>
-          <p:cNvSpPr txBox="1"/>
-          <p:nvPr/>
-        </p:nvSpPr>
-        <p:spPr>
-          <a:xfrm>
-            <a:off x="10424160" y="6382512"/>
-            <a:ext cx="1197864" cy="237744"/>
-          </a:xfrm>
-          <a:prstGeom prst="rect">
-            <a:avLst/>
-          </a:prstGeom>
-          <a:noFill/>
-        </p:spPr>
-        <p:txBody>
-          <a:bodyPr wrap="square" anchor="t" lIns="0" rIns="0" tIns="0" bIns="0">
-            <a:spAutoFit/>
-          </a:bodyPr>
-          <a:lstStyle/>
-          <a:p>
-            <a:pPr algn="r"/>
-            <a:r>
-              <a:rPr sz="1000" b="0" i="0">
-                <a:solidFill>
-                  <a:srgbClr val="4A5A6E"/>
-                </a:solidFill>
-                <a:latin typeface="Calibri"/>
-              </a:rPr>
-              <a:t>3 / 4</a:t>
-            </a:r>
-          </a:p>
-        </p:txBody>
-      </p:sp>
-      <p:sp>
-        <p:nvSpPr>
-          <p:cNvPr id="7" name="Rectangle 6"/>
+          <p:cNvPr id="10" name="Oval 9"/>
           <p:cNvSpPr/>
           <p:nvPr/>
         </p:nvSpPr>
         <p:spPr>
           <a:xfrm>
-            <a:off x="566928" y="1773936"/>
-            <a:ext cx="6446520" cy="676656"/>
-          </a:xfrm>
-          <a:prstGeom prst="rect">
+            <a:off x="761238" y="1692205"/>
+            <a:ext cx="123444" cy="123444"/>
+          </a:xfrm>
+          <a:prstGeom prst="ellipse">
             <a:avLst/>
           </a:prstGeom>
           <a:solidFill>
-            <a:srgbClr val="F7EEE7"/>
+            <a:srgbClr val="FFFFFF"/>
           </a:solidFill>
-          <a:ln w="9525">
+          <a:ln w="19050">
             <a:solidFill>
-              <a:srgbClr val="D8DEE6"/>
+              <a:srgbClr val="C0642A"/>
             </a:solidFill>
           </a:ln>
           <a:effectLst/>
@@ -5332,56 +6605,19 @@
       </p:sp>
       <p:sp>
         <p:nvSpPr>
-          <p:cNvPr id="8" name="TextBox 7"/>
-          <p:cNvSpPr txBox="1"/>
-          <p:nvPr/>
-        </p:nvSpPr>
-        <p:spPr>
-          <a:xfrm>
-            <a:off x="768096" y="1920240"/>
-            <a:ext cx="6044184" cy="420624"/>
-          </a:xfrm>
-          <a:prstGeom prst="rect">
-            <a:avLst/>
-          </a:prstGeom>
-          <a:noFill/>
-        </p:spPr>
-        <p:txBody>
-          <a:bodyPr wrap="square" anchor="t" lIns="0" rIns="0" tIns="0" bIns="0">
-            <a:spAutoFit/>
-          </a:bodyPr>
-          <a:lstStyle/>
-          <a:p>
-            <a:pPr algn="l">
-              <a:lnSpc>
-                <a:spcPct val="105000"/>
-              </a:lnSpc>
-            </a:pPr>
-            <a:r>
-              <a:rPr sz="1300" b="1" i="0">
-                <a:solidFill>
-                  <a:srgbClr val="0F2540"/>
-                </a:solidFill>
-                <a:latin typeface="Calibri"/>
-              </a:rPr>
-              <a:t>Input: specialty grocer, ~500 stores, ~50,000 crew. Grow revenue without eroding crew culture.</a:t>
-            </a:r>
-          </a:p>
-        </p:txBody>
-      </p:sp>
-      <p:sp>
-        <p:nvSpPr>
-          <p:cNvPr id="9" name="Rectangle 8"/>
+          <p:cNvPr id="11" name="Rounded Rectangle 10"/>
           <p:cNvSpPr/>
           <p:nvPr/>
         </p:nvSpPr>
         <p:spPr>
           <a:xfrm>
-            <a:off x="566928" y="2720340"/>
-            <a:ext cx="274320" cy="274320"/>
-          </a:xfrm>
-          <a:prstGeom prst="rect">
-            <a:avLst/>
+            <a:off x="566928" y="2060973"/>
+            <a:ext cx="6803136" cy="274320"/>
+          </a:xfrm>
+          <a:prstGeom prst="roundRect">
+            <a:avLst>
+              <a:gd name="adj" fmla="val 20000"/>
+            </a:avLst>
           </a:prstGeom>
           <a:solidFill>
             <a:srgbClr val="0F2540"/>
@@ -5415,14 +6651,14 @@
       </p:sp>
       <p:sp>
         <p:nvSpPr>
-          <p:cNvPr id="10" name="TextBox 9"/>
+          <p:cNvPr id="12" name="TextBox 11"/>
           <p:cNvSpPr txBox="1"/>
           <p:nvPr/>
         </p:nvSpPr>
         <p:spPr>
           <a:xfrm>
-            <a:off x="566928" y="2756916"/>
-            <a:ext cx="274320" cy="219456"/>
+            <a:off x="804672" y="2102090"/>
+            <a:ext cx="6382512" cy="210375"/>
           </a:xfrm>
           <a:prstGeom prst="rect">
             <a:avLst/>
@@ -5435,29 +6671,547 @@
           </a:bodyPr>
           <a:lstStyle/>
           <a:p>
+            <a:pPr algn="l">
+              <a:lnSpc>
+                <a:spcPct val="100000"/>
+              </a:lnSpc>
+            </a:pPr>
+            <a:r>
+              <a:rPr sz="1250" b="1" i="0" spc="60">
+                <a:solidFill>
+                  <a:srgbClr val="FFFFFF"/>
+                </a:solidFill>
+                <a:latin typeface="Calibri"/>
+              </a:rPr>
+              <a:t>Walkthrough</a:t>
+            </a:r>
+          </a:p>
+        </p:txBody>
+      </p:sp>
+      <p:sp>
+        <p:nvSpPr>
+          <p:cNvPr id="13" name="TextBox 12"/>
+          <p:cNvSpPr txBox="1"/>
+          <p:nvPr/>
+        </p:nvSpPr>
+        <p:spPr>
+          <a:xfrm>
+            <a:off x="1042416" y="2426733"/>
+            <a:ext cx="6254496" cy="441802"/>
+          </a:xfrm>
+          <a:prstGeom prst="rect">
+            <a:avLst/>
+          </a:prstGeom>
+          <a:noFill/>
+        </p:spPr>
+        <p:txBody>
+          <a:bodyPr wrap="square" anchor="t" lIns="0" rIns="0" tIns="0" bIns="0">
+            <a:spAutoFit/>
+          </a:bodyPr>
+          <a:lstStyle/>
+          <a:p>
+            <a:pPr algn="l" marL="201168" indent="-201168">
+              <a:lnSpc>
+                <a:spcPct val="106000"/>
+              </a:lnSpc>
+            </a:pPr>
+            <a:r>
+              <a:rPr sz="1300" b="1" i="0">
+                <a:solidFill>
+                  <a:srgbClr val="1A2733"/>
+                </a:solidFill>
+                <a:latin typeface="Calibri"/>
+              </a:rPr>
+              <a:t>1  </a:t>
+            </a:r>
+            <a:r>
+              <a:rPr sz="1300" b="0" i="0">
+                <a:solidFill>
+                  <a:srgbClr val="1A2733"/>
+                </a:solidFill>
+                <a:latin typeface="Calibri"/>
+              </a:rPr>
+              <a:t>Copilot parses the RFP: scope, deliverables D1–D5, requirements 5.1–5.7, weighted criteria, page limit.</a:t>
+            </a:r>
+          </a:p>
+        </p:txBody>
+      </p:sp>
+      <p:sp>
+        <p:nvSpPr>
+          <p:cNvPr id="14" name="TextBox 13"/>
+          <p:cNvSpPr txBox="1"/>
+          <p:nvPr/>
+        </p:nvSpPr>
+        <p:spPr>
+          <a:xfrm>
+            <a:off x="1042416" y="2932544"/>
+            <a:ext cx="6254496" cy="230045"/>
+          </a:xfrm>
+          <a:prstGeom prst="rect">
+            <a:avLst/>
+          </a:prstGeom>
+          <a:noFill/>
+        </p:spPr>
+        <p:txBody>
+          <a:bodyPr wrap="square" anchor="t" lIns="0" rIns="0" tIns="0" bIns="0">
+            <a:spAutoFit/>
+          </a:bodyPr>
+          <a:lstStyle/>
+          <a:p>
+            <a:pPr algn="l" marL="201168" indent="-201168">
+              <a:lnSpc>
+                <a:spcPct val="106000"/>
+              </a:lnSpc>
+            </a:pPr>
+            <a:r>
+              <a:rPr sz="1300" b="1" i="0">
+                <a:solidFill>
+                  <a:srgbClr val="1A2733"/>
+                </a:solidFill>
+                <a:latin typeface="Calibri"/>
+              </a:rPr>
+              <a:t>2  </a:t>
+            </a:r>
+            <a:r>
+              <a:rPr sz="1300" b="0" i="0">
+                <a:solidFill>
+                  <a:srgbClr val="1A2733"/>
+                </a:solidFill>
+                <a:latin typeface="Calibri"/>
+              </a:rPr>
+              <a:t>It pins the non-negotiable up front: nothing that erodes crew culture.</a:t>
+            </a:r>
+          </a:p>
+        </p:txBody>
+      </p:sp>
+      <p:sp>
+        <p:nvSpPr>
+          <p:cNvPr id="15" name="TextBox 14"/>
+          <p:cNvSpPr txBox="1"/>
+          <p:nvPr/>
+        </p:nvSpPr>
+        <p:spPr>
+          <a:xfrm>
+            <a:off x="1042416" y="3226597"/>
+            <a:ext cx="6254496" cy="230045"/>
+          </a:xfrm>
+          <a:prstGeom prst="rect">
+            <a:avLst/>
+          </a:prstGeom>
+          <a:noFill/>
+        </p:spPr>
+        <p:txBody>
+          <a:bodyPr wrap="square" anchor="t" lIns="0" rIns="0" tIns="0" bIns="0">
+            <a:spAutoFit/>
+          </a:bodyPr>
+          <a:lstStyle/>
+          <a:p>
+            <a:pPr algn="l" marL="201168" indent="-201168">
+              <a:lnSpc>
+                <a:spcPct val="106000"/>
+              </a:lnSpc>
+            </a:pPr>
+            <a:r>
+              <a:rPr sz="1300" b="1" i="0">
+                <a:solidFill>
+                  <a:srgbClr val="1A2733"/>
+                </a:solidFill>
+                <a:latin typeface="Calibri"/>
+              </a:rPr>
+              <a:t>3  </a:t>
+            </a:r>
+            <a:r>
+              <a:rPr sz="1300" b="0" i="0">
+                <a:solidFill>
+                  <a:srgbClr val="1A2733"/>
+                </a:solidFill>
+                <a:latin typeface="Calibri"/>
+              </a:rPr>
+              <a:t>Win themes come back in Wayfarer's language — crew first, growth second.</a:t>
+            </a:r>
+          </a:p>
+        </p:txBody>
+      </p:sp>
+      <p:sp>
+        <p:nvSpPr>
+          <p:cNvPr id="16" name="TextBox 15"/>
+          <p:cNvSpPr txBox="1"/>
+          <p:nvPr/>
+        </p:nvSpPr>
+        <p:spPr>
+          <a:xfrm>
+            <a:off x="1042416" y="3520650"/>
+            <a:ext cx="6254496" cy="230045"/>
+          </a:xfrm>
+          <a:prstGeom prst="rect">
+            <a:avLst/>
+          </a:prstGeom>
+          <a:noFill/>
+        </p:spPr>
+        <p:txBody>
+          <a:bodyPr wrap="square" anchor="t" lIns="0" rIns="0" tIns="0" bIns="0">
+            <a:spAutoFit/>
+          </a:bodyPr>
+          <a:lstStyle/>
+          <a:p>
+            <a:pPr algn="l" marL="201168" indent="-201168">
+              <a:lnSpc>
+                <a:spcPct val="106000"/>
+              </a:lnSpc>
+            </a:pPr>
+            <a:r>
+              <a:rPr sz="1300" b="1" i="0">
+                <a:solidFill>
+                  <a:srgbClr val="1A2733"/>
+                </a:solidFill>
+                <a:latin typeface="Calibri"/>
+              </a:rPr>
+              <a:t>4  </a:t>
+            </a:r>
+            <a:r>
+              <a:rPr sz="1300" b="0" i="0">
+                <a:solidFill>
+                  <a:srgbClr val="1A2733"/>
+                </a:solidFill>
+                <a:latin typeface="Calibri"/>
+              </a:rPr>
+              <a:t>The draft assembles against Exhibit B, the client's ten required response items.</a:t>
+            </a:r>
+          </a:p>
+        </p:txBody>
+      </p:sp>
+      <p:sp>
+        <p:nvSpPr>
+          <p:cNvPr id="17" name="TextBox 16"/>
+          <p:cNvSpPr txBox="1"/>
+          <p:nvPr/>
+        </p:nvSpPr>
+        <p:spPr>
+          <a:xfrm>
+            <a:off x="1042416" y="3814704"/>
+            <a:ext cx="6254496" cy="230045"/>
+          </a:xfrm>
+          <a:prstGeom prst="rect">
+            <a:avLst/>
+          </a:prstGeom>
+          <a:noFill/>
+        </p:spPr>
+        <p:txBody>
+          <a:bodyPr wrap="square" anchor="t" lIns="0" rIns="0" tIns="0" bIns="0">
+            <a:spAutoFit/>
+          </a:bodyPr>
+          <a:lstStyle/>
+          <a:p>
+            <a:pPr algn="l" marL="201168" indent="-201168">
+              <a:lnSpc>
+                <a:spcPct val="106000"/>
+              </a:lnSpc>
+            </a:pPr>
+            <a:r>
+              <a:rPr sz="1300" b="1" i="0">
+                <a:solidFill>
+                  <a:srgbClr val="1A2733"/>
+                </a:solidFill>
+                <a:latin typeface="Calibri"/>
+              </a:rPr>
+              <a:t>5  </a:t>
+            </a:r>
+            <a:r>
+              <a:rPr sz="1300" b="0" i="0">
+                <a:solidFill>
+                  <a:srgbClr val="1A2733"/>
+                </a:solidFill>
+                <a:latin typeface="Calibri"/>
+              </a:rPr>
+              <a:t>Predicted score names the gap: the playbook fails the 30% culture criterion.</a:t>
+            </a:r>
+          </a:p>
+        </p:txBody>
+      </p:sp>
+      <p:sp>
+        <p:nvSpPr>
+          <p:cNvPr id="18" name="Rectangle 17"/>
+          <p:cNvSpPr/>
+          <p:nvPr/>
+        </p:nvSpPr>
+        <p:spPr>
+          <a:xfrm>
+            <a:off x="816559" y="2381013"/>
+            <a:ext cx="12801" cy="1539568"/>
+          </a:xfrm>
+          <a:prstGeom prst="rect">
+            <a:avLst/>
+          </a:prstGeom>
+          <a:solidFill>
+            <a:srgbClr val="D3DAE2"/>
+          </a:solidFill>
+          <a:ln>
+            <a:noFill/>
+          </a:ln>
+          <a:effectLst/>
+        </p:spPr>
+        <p:style>
+          <a:lnRef idx="1">
+            <a:schemeClr val="accent1"/>
+          </a:lnRef>
+          <a:fillRef idx="3">
+            <a:schemeClr val="accent1"/>
+          </a:fillRef>
+          <a:effectRef idx="2">
+            <a:schemeClr val="accent1"/>
+          </a:effectRef>
+          <a:fontRef idx="minor">
+            <a:schemeClr val="lt1"/>
+          </a:fontRef>
+        </p:style>
+        <p:txBody>
+          <a:bodyPr rtlCol="0" anchor="ctr" wrap="square"/>
+          <a:lstStyle/>
+          <a:p>
             <a:pPr algn="ctr"/>
-            <a:r>
-              <a:rPr sz="1200" b="1" i="0">
-                <a:solidFill>
-                  <a:srgbClr val="FFFFFF"/>
-                </a:solidFill>
-                <a:latin typeface="Calibri"/>
-              </a:rPr>
-              <a:t>1</a:t>
-            </a:r>
-          </a:p>
-        </p:txBody>
-      </p:sp>
-      <p:sp>
-        <p:nvSpPr>
-          <p:cNvPr id="11" name="TextBox 10"/>
+          </a:p>
+        </p:txBody>
+      </p:sp>
+      <p:sp>
+        <p:nvSpPr>
+          <p:cNvPr id="19" name="Oval 18"/>
+          <p:cNvSpPr/>
+          <p:nvPr/>
+        </p:nvSpPr>
+        <p:spPr>
+          <a:xfrm>
+            <a:off x="761238" y="2470890"/>
+            <a:ext cx="123444" cy="123444"/>
+          </a:xfrm>
+          <a:prstGeom prst="ellipse">
+            <a:avLst/>
+          </a:prstGeom>
+          <a:solidFill>
+            <a:srgbClr val="FFFFFF"/>
+          </a:solidFill>
+          <a:ln w="19050">
+            <a:solidFill>
+              <a:srgbClr val="C0642A"/>
+            </a:solidFill>
+          </a:ln>
+          <a:effectLst/>
+        </p:spPr>
+        <p:style>
+          <a:lnRef idx="1">
+            <a:schemeClr val="accent1"/>
+          </a:lnRef>
+          <a:fillRef idx="3">
+            <a:schemeClr val="accent1"/>
+          </a:fillRef>
+          <a:effectRef idx="2">
+            <a:schemeClr val="accent1"/>
+          </a:effectRef>
+          <a:fontRef idx="minor">
+            <a:schemeClr val="lt1"/>
+          </a:fontRef>
+        </p:style>
+        <p:txBody>
+          <a:bodyPr rtlCol="0" anchor="ctr" wrap="square"/>
+          <a:lstStyle/>
+          <a:p>
+            <a:pPr algn="ctr"/>
+          </a:p>
+        </p:txBody>
+      </p:sp>
+      <p:sp>
+        <p:nvSpPr>
+          <p:cNvPr id="20" name="Oval 19"/>
+          <p:cNvSpPr/>
+          <p:nvPr/>
+        </p:nvSpPr>
+        <p:spPr>
+          <a:xfrm>
+            <a:off x="761238" y="2976700"/>
+            <a:ext cx="123444" cy="123444"/>
+          </a:xfrm>
+          <a:prstGeom prst="ellipse">
+            <a:avLst/>
+          </a:prstGeom>
+          <a:solidFill>
+            <a:srgbClr val="FFFFFF"/>
+          </a:solidFill>
+          <a:ln w="19050">
+            <a:solidFill>
+              <a:srgbClr val="C0642A"/>
+            </a:solidFill>
+          </a:ln>
+          <a:effectLst/>
+        </p:spPr>
+        <p:style>
+          <a:lnRef idx="1">
+            <a:schemeClr val="accent1"/>
+          </a:lnRef>
+          <a:fillRef idx="3">
+            <a:schemeClr val="accent1"/>
+          </a:fillRef>
+          <a:effectRef idx="2">
+            <a:schemeClr val="accent1"/>
+          </a:effectRef>
+          <a:fontRef idx="minor">
+            <a:schemeClr val="lt1"/>
+          </a:fontRef>
+        </p:style>
+        <p:txBody>
+          <a:bodyPr rtlCol="0" anchor="ctr" wrap="square"/>
+          <a:lstStyle/>
+          <a:p>
+            <a:pPr algn="ctr"/>
+          </a:p>
+        </p:txBody>
+      </p:sp>
+      <p:sp>
+        <p:nvSpPr>
+          <p:cNvPr id="21" name="Oval 20"/>
+          <p:cNvSpPr/>
+          <p:nvPr/>
+        </p:nvSpPr>
+        <p:spPr>
+          <a:xfrm>
+            <a:off x="761238" y="3270754"/>
+            <a:ext cx="123444" cy="123444"/>
+          </a:xfrm>
+          <a:prstGeom prst="ellipse">
+            <a:avLst/>
+          </a:prstGeom>
+          <a:solidFill>
+            <a:srgbClr val="FFFFFF"/>
+          </a:solidFill>
+          <a:ln w="19050">
+            <a:solidFill>
+              <a:srgbClr val="C0642A"/>
+            </a:solidFill>
+          </a:ln>
+          <a:effectLst/>
+        </p:spPr>
+        <p:style>
+          <a:lnRef idx="1">
+            <a:schemeClr val="accent1"/>
+          </a:lnRef>
+          <a:fillRef idx="3">
+            <a:schemeClr val="accent1"/>
+          </a:fillRef>
+          <a:effectRef idx="2">
+            <a:schemeClr val="accent1"/>
+          </a:effectRef>
+          <a:fontRef idx="minor">
+            <a:schemeClr val="lt1"/>
+          </a:fontRef>
+        </p:style>
+        <p:txBody>
+          <a:bodyPr rtlCol="0" anchor="ctr" wrap="square"/>
+          <a:lstStyle/>
+          <a:p>
+            <a:pPr algn="ctr"/>
+          </a:p>
+        </p:txBody>
+      </p:sp>
+      <p:sp>
+        <p:nvSpPr>
+          <p:cNvPr id="22" name="Oval 21"/>
+          <p:cNvSpPr/>
+          <p:nvPr/>
+        </p:nvSpPr>
+        <p:spPr>
+          <a:xfrm>
+            <a:off x="761238" y="3564807"/>
+            <a:ext cx="123444" cy="123444"/>
+          </a:xfrm>
+          <a:prstGeom prst="ellipse">
+            <a:avLst/>
+          </a:prstGeom>
+          <a:solidFill>
+            <a:srgbClr val="FFFFFF"/>
+          </a:solidFill>
+          <a:ln w="19050">
+            <a:solidFill>
+              <a:srgbClr val="C0642A"/>
+            </a:solidFill>
+          </a:ln>
+          <a:effectLst/>
+        </p:spPr>
+        <p:style>
+          <a:lnRef idx="1">
+            <a:schemeClr val="accent1"/>
+          </a:lnRef>
+          <a:fillRef idx="3">
+            <a:schemeClr val="accent1"/>
+          </a:fillRef>
+          <a:effectRef idx="2">
+            <a:schemeClr val="accent1"/>
+          </a:effectRef>
+          <a:fontRef idx="minor">
+            <a:schemeClr val="lt1"/>
+          </a:fontRef>
+        </p:style>
+        <p:txBody>
+          <a:bodyPr rtlCol="0" anchor="ctr" wrap="square"/>
+          <a:lstStyle/>
+          <a:p>
+            <a:pPr algn="ctr"/>
+          </a:p>
+        </p:txBody>
+      </p:sp>
+      <p:sp>
+        <p:nvSpPr>
+          <p:cNvPr id="23" name="Oval 22"/>
+          <p:cNvSpPr/>
+          <p:nvPr/>
+        </p:nvSpPr>
+        <p:spPr>
+          <a:xfrm>
+            <a:off x="761238" y="3858860"/>
+            <a:ext cx="123444" cy="123444"/>
+          </a:xfrm>
+          <a:prstGeom prst="ellipse">
+            <a:avLst/>
+          </a:prstGeom>
+          <a:solidFill>
+            <a:srgbClr val="FFFFFF"/>
+          </a:solidFill>
+          <a:ln w="19050">
+            <a:solidFill>
+              <a:srgbClr val="C0642A"/>
+            </a:solidFill>
+          </a:ln>
+          <a:effectLst/>
+        </p:spPr>
+        <p:style>
+          <a:lnRef idx="1">
+            <a:schemeClr val="accent1"/>
+          </a:lnRef>
+          <a:fillRef idx="3">
+            <a:schemeClr val="accent1"/>
+          </a:fillRef>
+          <a:effectRef idx="2">
+            <a:schemeClr val="accent1"/>
+          </a:effectRef>
+          <a:fontRef idx="minor">
+            <a:schemeClr val="lt1"/>
+          </a:fontRef>
+        </p:style>
+        <p:txBody>
+          <a:bodyPr rtlCol="0" anchor="ctr" wrap="square"/>
+          <a:lstStyle/>
+          <a:p>
+            <a:pPr algn="ctr"/>
+          </a:p>
+        </p:txBody>
+      </p:sp>
+      <p:sp>
+        <p:nvSpPr>
+          <p:cNvPr id="24" name="TextBox 23"/>
           <p:cNvSpPr txBox="1"/>
           <p:nvPr/>
         </p:nvSpPr>
         <p:spPr>
           <a:xfrm>
-            <a:off x="987552" y="2715768"/>
-            <a:ext cx="6025896" cy="566928"/>
+            <a:off x="1042416" y="4191053"/>
+            <a:ext cx="6254496" cy="416600"/>
           </a:xfrm>
           <a:prstGeom prst="rect">
             <a:avLst/>
@@ -5476,30 +7230,32 @@
               </a:lnSpc>
             </a:pPr>
             <a:r>
-              <a:rPr sz="1400" b="0" i="0">
-                <a:solidFill>
-                  <a:srgbClr val="0F2540"/>
-                </a:solidFill>
-                <a:latin typeface="Calibri"/>
-              </a:rPr>
-              <a:t>Copilot parses the RFP: scope, deliverables D1–D5, requirements 5.1–5.7, weighted criteria, page limit.</a:t>
-            </a:r>
-          </a:p>
-        </p:txBody>
-      </p:sp>
-      <p:sp>
-        <p:nvSpPr>
-          <p:cNvPr id="12" name="Rectangle 11"/>
+              <a:rPr sz="1200" b="0" i="1">
+                <a:solidFill>
+                  <a:srgbClr val="4A5A6E"/>
+                </a:solidFill>
+                <a:latin typeface="Calibri"/>
+              </a:rPr>
+              <a:t>What the judges see: a proposal that argues the client's own priorities back to them — and a number saying how it would be scored.</a:t>
+            </a:r>
+          </a:p>
+        </p:txBody>
+      </p:sp>
+      <p:sp>
+        <p:nvSpPr>
+          <p:cNvPr id="25" name="Rounded Rectangle 24"/>
           <p:cNvSpPr/>
           <p:nvPr/>
         </p:nvSpPr>
         <p:spPr>
           <a:xfrm>
-            <a:off x="566928" y="3396996"/>
-            <a:ext cx="274320" cy="274320"/>
-          </a:xfrm>
-          <a:prstGeom prst="rect">
-            <a:avLst/>
+            <a:off x="7699248" y="1282288"/>
+            <a:ext cx="3922775" cy="274320"/>
+          </a:xfrm>
+          <a:prstGeom prst="roundRect">
+            <a:avLst>
+              <a:gd name="adj" fmla="val 20000"/>
+            </a:avLst>
           </a:prstGeom>
           <a:solidFill>
             <a:srgbClr val="0F2540"/>
@@ -5533,14 +7289,14 @@
       </p:sp>
       <p:sp>
         <p:nvSpPr>
-          <p:cNvPr id="13" name="TextBox 12"/>
+          <p:cNvPr id="26" name="TextBox 25"/>
           <p:cNvSpPr txBox="1"/>
           <p:nvPr/>
         </p:nvSpPr>
         <p:spPr>
           <a:xfrm>
-            <a:off x="566928" y="3433572"/>
-            <a:ext cx="274320" cy="219456"/>
+            <a:off x="7936992" y="1323404"/>
+            <a:ext cx="3502151" cy="210375"/>
           </a:xfrm>
           <a:prstGeom prst="rect">
             <a:avLst/>
@@ -5553,467 +7309,39 @@
           </a:bodyPr>
           <a:lstStyle/>
           <a:p>
-            <a:pPr algn="ctr"/>
-            <a:r>
-              <a:rPr sz="1200" b="1" i="0">
-                <a:solidFill>
-                  <a:srgbClr val="FFFFFF"/>
-                </a:solidFill>
-                <a:latin typeface="Calibri"/>
-              </a:rPr>
-              <a:t>2</a:t>
-            </a:r>
-          </a:p>
-        </p:txBody>
-      </p:sp>
-      <p:sp>
-        <p:nvSpPr>
-          <p:cNvPr id="14" name="TextBox 13"/>
-          <p:cNvSpPr txBox="1"/>
-          <p:nvPr/>
-        </p:nvSpPr>
-        <p:spPr>
-          <a:xfrm>
-            <a:off x="987552" y="3392424"/>
-            <a:ext cx="6025896" cy="566928"/>
-          </a:xfrm>
-          <a:prstGeom prst="rect">
-            <a:avLst/>
-          </a:prstGeom>
-          <a:noFill/>
-        </p:spPr>
-        <p:txBody>
-          <a:bodyPr wrap="square" anchor="t" lIns="0" rIns="0" tIns="0" bIns="0">
-            <a:spAutoFit/>
-          </a:bodyPr>
-          <a:lstStyle/>
-          <a:p>
             <a:pPr algn="l">
               <a:lnSpc>
-                <a:spcPct val="108000"/>
+                <a:spcPct val="100000"/>
               </a:lnSpc>
             </a:pPr>
             <a:r>
-              <a:rPr sz="1400" b="0" i="0">
-                <a:solidFill>
-                  <a:srgbClr val="0F2540"/>
-                </a:solidFill>
-                <a:latin typeface="Calibri"/>
-              </a:rPr>
-              <a:t>It pins the non-negotiable up front: nothing that erodes crew culture.</a:t>
-            </a:r>
-          </a:p>
-        </p:txBody>
-      </p:sp>
-      <p:sp>
-        <p:nvSpPr>
-          <p:cNvPr id="15" name="Rectangle 14"/>
+              <a:rPr sz="1250" b="1" i="0" spc="60">
+                <a:solidFill>
+                  <a:srgbClr val="FFFFFF"/>
+                </a:solidFill>
+                <a:latin typeface="Calibri"/>
+              </a:rPr>
+              <a:t>The Screen</a:t>
+            </a:r>
+          </a:p>
+        </p:txBody>
+      </p:sp>
+      <p:sp>
+        <p:nvSpPr>
+          <p:cNvPr id="27" name="Rectangle 26"/>
           <p:cNvSpPr/>
           <p:nvPr/>
         </p:nvSpPr>
         <p:spPr>
           <a:xfrm>
-            <a:off x="566928" y="4073652"/>
-            <a:ext cx="274320" cy="274320"/>
+            <a:off x="7699248" y="1648048"/>
+            <a:ext cx="3922775" cy="3566160"/>
           </a:xfrm>
           <a:prstGeom prst="rect">
             <a:avLst/>
           </a:prstGeom>
           <a:solidFill>
-            <a:srgbClr val="0F2540"/>
-          </a:solidFill>
-          <a:ln>
-            <a:noFill/>
-          </a:ln>
-          <a:effectLst/>
-        </p:spPr>
-        <p:style>
-          <a:lnRef idx="1">
-            <a:schemeClr val="accent1"/>
-          </a:lnRef>
-          <a:fillRef idx="3">
-            <a:schemeClr val="accent1"/>
-          </a:fillRef>
-          <a:effectRef idx="2">
-            <a:schemeClr val="accent1"/>
-          </a:effectRef>
-          <a:fontRef idx="minor">
-            <a:schemeClr val="lt1"/>
-          </a:fontRef>
-        </p:style>
-        <p:txBody>
-          <a:bodyPr rtlCol="0" anchor="ctr" wrap="square"/>
-          <a:lstStyle/>
-          <a:p>
-            <a:pPr algn="ctr"/>
-          </a:p>
-        </p:txBody>
-      </p:sp>
-      <p:sp>
-        <p:nvSpPr>
-          <p:cNvPr id="16" name="TextBox 15"/>
-          <p:cNvSpPr txBox="1"/>
-          <p:nvPr/>
-        </p:nvSpPr>
-        <p:spPr>
-          <a:xfrm>
-            <a:off x="566928" y="4110228"/>
-            <a:ext cx="274320" cy="219456"/>
-          </a:xfrm>
-          <a:prstGeom prst="rect">
-            <a:avLst/>
-          </a:prstGeom>
-          <a:noFill/>
-        </p:spPr>
-        <p:txBody>
-          <a:bodyPr wrap="square" anchor="t" lIns="0" rIns="0" tIns="0" bIns="0">
-            <a:spAutoFit/>
-          </a:bodyPr>
-          <a:lstStyle/>
-          <a:p>
-            <a:pPr algn="ctr"/>
-            <a:r>
-              <a:rPr sz="1200" b="1" i="0">
-                <a:solidFill>
-                  <a:srgbClr val="FFFFFF"/>
-                </a:solidFill>
-                <a:latin typeface="Calibri"/>
-              </a:rPr>
-              <a:t>3</a:t>
-            </a:r>
-          </a:p>
-        </p:txBody>
-      </p:sp>
-      <p:sp>
-        <p:nvSpPr>
-          <p:cNvPr id="17" name="TextBox 16"/>
-          <p:cNvSpPr txBox="1"/>
-          <p:nvPr/>
-        </p:nvSpPr>
-        <p:spPr>
-          <a:xfrm>
-            <a:off x="987552" y="4069080"/>
-            <a:ext cx="6025896" cy="566928"/>
-          </a:xfrm>
-          <a:prstGeom prst="rect">
-            <a:avLst/>
-          </a:prstGeom>
-          <a:noFill/>
-        </p:spPr>
-        <p:txBody>
-          <a:bodyPr wrap="square" anchor="t" lIns="0" rIns="0" tIns="0" bIns="0">
-            <a:spAutoFit/>
-          </a:bodyPr>
-          <a:lstStyle/>
-          <a:p>
-            <a:pPr algn="l">
-              <a:lnSpc>
-                <a:spcPct val="108000"/>
-              </a:lnSpc>
-            </a:pPr>
-            <a:r>
-              <a:rPr sz="1400" b="0" i="0">
-                <a:solidFill>
-                  <a:srgbClr val="0F2540"/>
-                </a:solidFill>
-                <a:latin typeface="Calibri"/>
-              </a:rPr>
-              <a:t>Win themes come back in Wayfarer's language, not ours — crew first, growth second.</a:t>
-            </a:r>
-          </a:p>
-        </p:txBody>
-      </p:sp>
-      <p:sp>
-        <p:nvSpPr>
-          <p:cNvPr id="18" name="Rectangle 17"/>
-          <p:cNvSpPr/>
-          <p:nvPr/>
-        </p:nvSpPr>
-        <p:spPr>
-          <a:xfrm>
-            <a:off x="566928" y="4750308"/>
-            <a:ext cx="274320" cy="274320"/>
-          </a:xfrm>
-          <a:prstGeom prst="rect">
-            <a:avLst/>
-          </a:prstGeom>
-          <a:solidFill>
-            <a:srgbClr val="0F2540"/>
-          </a:solidFill>
-          <a:ln>
-            <a:noFill/>
-          </a:ln>
-          <a:effectLst/>
-        </p:spPr>
-        <p:style>
-          <a:lnRef idx="1">
-            <a:schemeClr val="accent1"/>
-          </a:lnRef>
-          <a:fillRef idx="3">
-            <a:schemeClr val="accent1"/>
-          </a:fillRef>
-          <a:effectRef idx="2">
-            <a:schemeClr val="accent1"/>
-          </a:effectRef>
-          <a:fontRef idx="minor">
-            <a:schemeClr val="lt1"/>
-          </a:fontRef>
-        </p:style>
-        <p:txBody>
-          <a:bodyPr rtlCol="0" anchor="ctr" wrap="square"/>
-          <a:lstStyle/>
-          <a:p>
-            <a:pPr algn="ctr"/>
-          </a:p>
-        </p:txBody>
-      </p:sp>
-      <p:sp>
-        <p:nvSpPr>
-          <p:cNvPr id="19" name="TextBox 18"/>
-          <p:cNvSpPr txBox="1"/>
-          <p:nvPr/>
-        </p:nvSpPr>
-        <p:spPr>
-          <a:xfrm>
-            <a:off x="566928" y="4786884"/>
-            <a:ext cx="274320" cy="219456"/>
-          </a:xfrm>
-          <a:prstGeom prst="rect">
-            <a:avLst/>
-          </a:prstGeom>
-          <a:noFill/>
-        </p:spPr>
-        <p:txBody>
-          <a:bodyPr wrap="square" anchor="t" lIns="0" rIns="0" tIns="0" bIns="0">
-            <a:spAutoFit/>
-          </a:bodyPr>
-          <a:lstStyle/>
-          <a:p>
-            <a:pPr algn="ctr"/>
-            <a:r>
-              <a:rPr sz="1200" b="1" i="0">
-                <a:solidFill>
-                  <a:srgbClr val="FFFFFF"/>
-                </a:solidFill>
-                <a:latin typeface="Calibri"/>
-              </a:rPr>
-              <a:t>4</a:t>
-            </a:r>
-          </a:p>
-        </p:txBody>
-      </p:sp>
-      <p:sp>
-        <p:nvSpPr>
-          <p:cNvPr id="20" name="TextBox 19"/>
-          <p:cNvSpPr txBox="1"/>
-          <p:nvPr/>
-        </p:nvSpPr>
-        <p:spPr>
-          <a:xfrm>
-            <a:off x="987552" y="4745736"/>
-            <a:ext cx="6025896" cy="566928"/>
-          </a:xfrm>
-          <a:prstGeom prst="rect">
-            <a:avLst/>
-          </a:prstGeom>
-          <a:noFill/>
-        </p:spPr>
-        <p:txBody>
-          <a:bodyPr wrap="square" anchor="t" lIns="0" rIns="0" tIns="0" bIns="0">
-            <a:spAutoFit/>
-          </a:bodyPr>
-          <a:lstStyle/>
-          <a:p>
-            <a:pPr algn="l">
-              <a:lnSpc>
-                <a:spcPct val="108000"/>
-              </a:lnSpc>
-            </a:pPr>
-            <a:r>
-              <a:rPr sz="1400" b="0" i="0">
-                <a:solidFill>
-                  <a:srgbClr val="0F2540"/>
-                </a:solidFill>
-                <a:latin typeface="Calibri"/>
-              </a:rPr>
-              <a:t>The draft assembles against Exhibit B, the client's own ten required response items.</a:t>
-            </a:r>
-          </a:p>
-        </p:txBody>
-      </p:sp>
-      <p:sp>
-        <p:nvSpPr>
-          <p:cNvPr id="21" name="Rectangle 20"/>
-          <p:cNvSpPr/>
-          <p:nvPr/>
-        </p:nvSpPr>
-        <p:spPr>
-          <a:xfrm>
-            <a:off x="566928" y="5426964"/>
-            <a:ext cx="274320" cy="274320"/>
-          </a:xfrm>
-          <a:prstGeom prst="rect">
-            <a:avLst/>
-          </a:prstGeom>
-          <a:solidFill>
-            <a:srgbClr val="0F2540"/>
-          </a:solidFill>
-          <a:ln>
-            <a:noFill/>
-          </a:ln>
-          <a:effectLst/>
-        </p:spPr>
-        <p:style>
-          <a:lnRef idx="1">
-            <a:schemeClr val="accent1"/>
-          </a:lnRef>
-          <a:fillRef idx="3">
-            <a:schemeClr val="accent1"/>
-          </a:fillRef>
-          <a:effectRef idx="2">
-            <a:schemeClr val="accent1"/>
-          </a:effectRef>
-          <a:fontRef idx="minor">
-            <a:schemeClr val="lt1"/>
-          </a:fontRef>
-        </p:style>
-        <p:txBody>
-          <a:bodyPr rtlCol="0" anchor="ctr" wrap="square"/>
-          <a:lstStyle/>
-          <a:p>
-            <a:pPr algn="ctr"/>
-          </a:p>
-        </p:txBody>
-      </p:sp>
-      <p:sp>
-        <p:nvSpPr>
-          <p:cNvPr id="22" name="TextBox 21"/>
-          <p:cNvSpPr txBox="1"/>
-          <p:nvPr/>
-        </p:nvSpPr>
-        <p:spPr>
-          <a:xfrm>
-            <a:off x="566928" y="5463540"/>
-            <a:ext cx="274320" cy="219456"/>
-          </a:xfrm>
-          <a:prstGeom prst="rect">
-            <a:avLst/>
-          </a:prstGeom>
-          <a:noFill/>
-        </p:spPr>
-        <p:txBody>
-          <a:bodyPr wrap="square" anchor="t" lIns="0" rIns="0" tIns="0" bIns="0">
-            <a:spAutoFit/>
-          </a:bodyPr>
-          <a:lstStyle/>
-          <a:p>
-            <a:pPr algn="ctr"/>
-            <a:r>
-              <a:rPr sz="1200" b="1" i="0">
-                <a:solidFill>
-                  <a:srgbClr val="FFFFFF"/>
-                </a:solidFill>
-                <a:latin typeface="Calibri"/>
-              </a:rPr>
-              <a:t>5</a:t>
-            </a:r>
-          </a:p>
-        </p:txBody>
-      </p:sp>
-      <p:sp>
-        <p:nvSpPr>
-          <p:cNvPr id="23" name="TextBox 22"/>
-          <p:cNvSpPr txBox="1"/>
-          <p:nvPr/>
-        </p:nvSpPr>
-        <p:spPr>
-          <a:xfrm>
-            <a:off x="987552" y="5422392"/>
-            <a:ext cx="6025896" cy="566928"/>
-          </a:xfrm>
-          <a:prstGeom prst="rect">
-            <a:avLst/>
-          </a:prstGeom>
-          <a:noFill/>
-        </p:spPr>
-        <p:txBody>
-          <a:bodyPr wrap="square" anchor="t" lIns="0" rIns="0" tIns="0" bIns="0">
-            <a:spAutoFit/>
-          </a:bodyPr>
-          <a:lstStyle/>
-          <a:p>
-            <a:pPr algn="l">
-              <a:lnSpc>
-                <a:spcPct val="108000"/>
-              </a:lnSpc>
-            </a:pPr>
-            <a:r>
-              <a:rPr sz="1400" b="0" i="0">
-                <a:solidFill>
-                  <a:srgbClr val="0F2540"/>
-                </a:solidFill>
-                <a:latin typeface="Calibri"/>
-              </a:rPr>
-              <a:t>Predicted score names the gap: the generic playbook fails the 30% culture criterion.</a:t>
-            </a:r>
-          </a:p>
-        </p:txBody>
-      </p:sp>
-      <p:sp>
-        <p:nvSpPr>
-          <p:cNvPr id="24" name="TextBox 23"/>
-          <p:cNvSpPr txBox="1"/>
-          <p:nvPr/>
-        </p:nvSpPr>
-        <p:spPr>
-          <a:xfrm>
-            <a:off x="566928" y="6163056"/>
-            <a:ext cx="6446520" cy="512064"/>
-          </a:xfrm>
-          <a:prstGeom prst="rect">
-            <a:avLst/>
-          </a:prstGeom>
-          <a:noFill/>
-        </p:spPr>
-        <p:txBody>
-          <a:bodyPr wrap="square" anchor="t" lIns="0" rIns="0" tIns="0" bIns="0">
-            <a:spAutoFit/>
-          </a:bodyPr>
-          <a:lstStyle/>
-          <a:p>
-            <a:pPr algn="l">
-              <a:lnSpc>
-                <a:spcPct val="110000"/>
-              </a:lnSpc>
-            </a:pPr>
-            <a:r>
-              <a:rPr sz="1300" b="0" i="1">
-                <a:solidFill>
-                  <a:srgbClr val="4A5A6E"/>
-                </a:solidFill>
-                <a:latin typeface="Calibri"/>
-              </a:rPr>
-              <a:t>What the judges see: a proposal that argues the client's own priorities back to them — and a number saying how it would be scored.</a:t>
-            </a:r>
-          </a:p>
-        </p:txBody>
-      </p:sp>
-      <p:sp>
-        <p:nvSpPr>
-          <p:cNvPr id="25" name="Rectangle 24"/>
-          <p:cNvSpPr/>
-          <p:nvPr/>
-        </p:nvSpPr>
-        <p:spPr>
-          <a:xfrm>
-            <a:off x="7443216" y="1773936"/>
-            <a:ext cx="4178808" cy="4059936"/>
-          </a:xfrm>
-          <a:prstGeom prst="rect">
-            <a:avLst/>
-          </a:prstGeom>
-          <a:solidFill>
-            <a:srgbClr val="F1F4F7"/>
+            <a:srgbClr val="F4F6F9"/>
           </a:solidFill>
           <a:ln w="15875">
             <a:solidFill>
@@ -6047,14 +7375,14 @@
       </p:sp>
       <p:sp>
         <p:nvSpPr>
-          <p:cNvPr id="26" name="TextBox 25"/>
+          <p:cNvPr id="28" name="TextBox 27"/>
           <p:cNvSpPr txBox="1"/>
           <p:nvPr/>
         </p:nvSpPr>
         <p:spPr>
           <a:xfrm>
-            <a:off x="7717536" y="3474720"/>
-            <a:ext cx="3630168" cy="914400"/>
+            <a:off x="7973568" y="3047080"/>
+            <a:ext cx="3374135" cy="768096"/>
           </a:xfrm>
           <a:prstGeom prst="rect">
             <a:avLst/>
@@ -6068,12 +7396,15 @@
           <a:lstStyle/>
           <a:p>
             <a:pPr algn="ctr">
+              <a:lnSpc>
+                <a:spcPct val="106000"/>
+              </a:lnSpc>
               <a:spcAft>
                 <a:spcPts val="700"/>
               </a:spcAft>
             </a:pPr>
             <a:r>
-              <a:rPr sz="1400" b="1" i="0">
+              <a:rPr sz="1300" b="1" i="0">
                 <a:solidFill>
                   <a:srgbClr val="4A5A6E"/>
                 </a:solidFill>
@@ -6083,7 +7414,11 @@
             </a:r>
           </a:p>
           <a:p>
-            <a:pPr algn="ctr"/>
+            <a:pPr algn="ctr">
+              <a:lnSpc>
+                <a:spcPct val="106000"/>
+              </a:lnSpc>
+            </a:pPr>
             <a:r>
               <a:rPr sz="1200" b="0" i="1">
                 <a:solidFill>
@@ -6098,14 +7433,14 @@
       </p:sp>
       <p:sp>
         <p:nvSpPr>
-          <p:cNvPr id="27" name="TextBox 26"/>
+          <p:cNvPr id="29" name="TextBox 28"/>
           <p:cNvSpPr txBox="1"/>
           <p:nvPr/>
         </p:nvSpPr>
         <p:spPr>
           <a:xfrm>
-            <a:off x="7443216" y="5980176"/>
-            <a:ext cx="4178808" cy="274320"/>
+            <a:off x="7699248" y="5342224"/>
+            <a:ext cx="3922775" cy="219456"/>
           </a:xfrm>
           <a:prstGeom prst="rect">
             <a:avLst/>
@@ -6118,7 +7453,11 @@
           </a:bodyPr>
           <a:lstStyle/>
           <a:p>
-            <a:pPr algn="ctr"/>
+            <a:pPr algn="ctr">
+              <a:lnSpc>
+                <a:spcPct val="106000"/>
+              </a:lnSpc>
+            </a:pPr>
             <a:r>
               <a:rPr sz="1200" b="0" i="0">
                 <a:solidFill>
@@ -6151,17 +7490,180 @@
       <p:grpSpPr/>
       <p:sp>
         <p:nvSpPr>
-          <p:cNvPr id="2" name="Rectangle 1"/>
+          <p:cNvPr id="2" name="TextBox 1"/>
+          <p:cNvSpPr txBox="1"/>
+          <p:nvPr/>
+        </p:nvSpPr>
+        <p:spPr>
+          <a:xfrm>
+            <a:off x="1097280" y="402336"/>
+            <a:ext cx="10058400" cy="237744"/>
+          </a:xfrm>
+          <a:prstGeom prst="rect">
+            <a:avLst/>
+          </a:prstGeom>
+          <a:noFill/>
+        </p:spPr>
+        <p:txBody>
+          <a:bodyPr wrap="square" anchor="t" lIns="0" rIns="0" tIns="0" bIns="0">
+            <a:spAutoFit/>
+          </a:bodyPr>
+          <a:lstStyle/>
+          <a:p>
+            <a:pPr algn="l">
+              <a:lnSpc>
+                <a:spcPct val="106000"/>
+              </a:lnSpc>
+            </a:pPr>
+            <a:r>
+              <a:rPr sz="1200" b="1" i="0" spc="140">
+                <a:solidFill>
+                  <a:srgbClr val="C0642A"/>
+                </a:solidFill>
+                <a:latin typeface="Calibri"/>
+              </a:rPr>
+              <a:t>IMPACT  ·  PATH TO MARKET</a:t>
+            </a:r>
+          </a:p>
+        </p:txBody>
+      </p:sp>
+      <p:sp>
+        <p:nvSpPr>
+          <p:cNvPr id="3" name="TextBox 2"/>
+          <p:cNvSpPr txBox="1"/>
+          <p:nvPr/>
+        </p:nvSpPr>
+        <p:spPr>
+          <a:xfrm>
+            <a:off x="1097280" y="694944"/>
+            <a:ext cx="10058400" cy="349600"/>
+          </a:xfrm>
+          <a:prstGeom prst="rect">
+            <a:avLst/>
+          </a:prstGeom>
+          <a:noFill/>
+        </p:spPr>
+        <p:txBody>
+          <a:bodyPr wrap="square" anchor="t" lIns="0" rIns="0" tIns="0" bIns="0">
+            <a:spAutoFit/>
+          </a:bodyPr>
+          <a:lstStyle/>
+          <a:p>
+            <a:pPr algn="l">
+              <a:lnSpc>
+                <a:spcPct val="98000"/>
+              </a:lnSpc>
+            </a:pPr>
+            <a:r>
+              <a:rPr sz="2200" b="1" i="0">
+                <a:solidFill>
+                  <a:srgbClr val="0F2540"/>
+                </a:solidFill>
+                <a:latin typeface="Calibri"/>
+              </a:rPr>
+              <a:t>Where the value sits, how we would pilot it, what could go wrong.</a:t>
+            </a:r>
+          </a:p>
+        </p:txBody>
+      </p:sp>
+      <p:sp>
+        <p:nvSpPr>
+          <p:cNvPr id="4" name="Rectangle 3"/>
           <p:cNvSpPr/>
           <p:nvPr/>
         </p:nvSpPr>
         <p:spPr>
           <a:xfrm>
-            <a:off x="0" y="0"/>
-            <a:ext cx="12191695" cy="146304"/>
-          </a:xfrm>
-          <a:prstGeom prst="rect">
-            <a:avLst/>
+            <a:off x="566928" y="846884"/>
+            <a:ext cx="384048" cy="27432"/>
+          </a:xfrm>
+          <a:prstGeom prst="rect">
+            <a:avLst/>
+          </a:prstGeom>
+          <a:solidFill>
+            <a:srgbClr val="C0642A"/>
+          </a:solidFill>
+          <a:ln>
+            <a:noFill/>
+          </a:ln>
+          <a:effectLst/>
+        </p:spPr>
+        <p:style>
+          <a:lnRef idx="1">
+            <a:schemeClr val="accent1"/>
+          </a:lnRef>
+          <a:fillRef idx="3">
+            <a:schemeClr val="accent1"/>
+          </a:fillRef>
+          <a:effectRef idx="2">
+            <a:schemeClr val="accent1"/>
+          </a:effectRef>
+          <a:fontRef idx="minor">
+            <a:schemeClr val="lt1"/>
+          </a:fontRef>
+        </p:style>
+        <p:txBody>
+          <a:bodyPr rtlCol="0" anchor="ctr" wrap="square"/>
+          <a:lstStyle/>
+          <a:p>
+            <a:pPr algn="ctr"/>
+          </a:p>
+        </p:txBody>
+      </p:sp>
+      <p:sp>
+        <p:nvSpPr>
+          <p:cNvPr id="5" name="TextBox 4"/>
+          <p:cNvSpPr txBox="1"/>
+          <p:nvPr/>
+        </p:nvSpPr>
+        <p:spPr>
+          <a:xfrm>
+            <a:off x="11002975" y="6400800"/>
+            <a:ext cx="621792" cy="237744"/>
+          </a:xfrm>
+          <a:prstGeom prst="rect">
+            <a:avLst/>
+          </a:prstGeom>
+          <a:noFill/>
+        </p:spPr>
+        <p:txBody>
+          <a:bodyPr wrap="square" anchor="t" lIns="0" rIns="0" tIns="0" bIns="0">
+            <a:spAutoFit/>
+          </a:bodyPr>
+          <a:lstStyle/>
+          <a:p>
+            <a:pPr algn="r">
+              <a:lnSpc>
+                <a:spcPct val="106000"/>
+              </a:lnSpc>
+            </a:pPr>
+            <a:r>
+              <a:rPr sz="1200" b="0" i="0">
+                <a:solidFill>
+                  <a:srgbClr val="4A5A6E"/>
+                </a:solidFill>
+                <a:latin typeface="Calibri"/>
+              </a:rPr>
+              <a:t>4 / 4</a:t>
+            </a:r>
+          </a:p>
+        </p:txBody>
+      </p:sp>
+      <p:sp>
+        <p:nvSpPr>
+          <p:cNvPr id="6" name="Rounded Rectangle 5"/>
+          <p:cNvSpPr/>
+          <p:nvPr/>
+        </p:nvSpPr>
+        <p:spPr>
+          <a:xfrm>
+            <a:off x="566928" y="1282288"/>
+            <a:ext cx="6803136" cy="274320"/>
+          </a:xfrm>
+          <a:prstGeom prst="roundRect">
+            <a:avLst>
+              <a:gd name="adj" fmla="val 20000"/>
+            </a:avLst>
           </a:prstGeom>
           <a:solidFill>
             <a:srgbClr val="0F2540"/>
@@ -6195,14 +7697,14 @@
       </p:sp>
       <p:sp>
         <p:nvSpPr>
-          <p:cNvPr id="3" name="TextBox 2"/>
+          <p:cNvPr id="7" name="TextBox 6"/>
           <p:cNvSpPr txBox="1"/>
           <p:nvPr/>
         </p:nvSpPr>
         <p:spPr>
           <a:xfrm>
-            <a:off x="566928" y="475488"/>
-            <a:ext cx="11055096" cy="237744"/>
+            <a:off x="804672" y="1323404"/>
+            <a:ext cx="6382512" cy="210375"/>
           </a:xfrm>
           <a:prstGeom prst="rect">
             <a:avLst/>
@@ -6215,29 +7717,33 @@
           </a:bodyPr>
           <a:lstStyle/>
           <a:p>
-            <a:pPr algn="l"/>
-            <a:r>
-              <a:rPr sz="1150" b="1" i="0" spc="120">
-                <a:solidFill>
-                  <a:srgbClr val="C0642A"/>
-                </a:solidFill>
-                <a:latin typeface="Calibri"/>
-              </a:rPr>
-              <a:t>IMPACT  ·  PATH TO MARKET</a:t>
-            </a:r>
-          </a:p>
-        </p:txBody>
-      </p:sp>
-      <p:sp>
-        <p:nvSpPr>
-          <p:cNvPr id="4" name="TextBox 3"/>
+            <a:pPr algn="l">
+              <a:lnSpc>
+                <a:spcPct val="100000"/>
+              </a:lnSpc>
+            </a:pPr>
+            <a:r>
+              <a:rPr sz="1250" b="1" i="0" spc="60">
+                <a:solidFill>
+                  <a:srgbClr val="FFFFFF"/>
+                </a:solidFill>
+                <a:latin typeface="Calibri"/>
+              </a:rPr>
+              <a:t>Business Value</a:t>
+            </a:r>
+          </a:p>
+        </p:txBody>
+      </p:sp>
+      <p:sp>
+        <p:nvSpPr>
+          <p:cNvPr id="8" name="TextBox 7"/>
           <p:cNvSpPr txBox="1"/>
           <p:nvPr/>
         </p:nvSpPr>
         <p:spPr>
           <a:xfrm>
-            <a:off x="566928" y="786384"/>
-            <a:ext cx="11055096" cy="566928"/>
+            <a:off x="1042416" y="1648048"/>
+            <a:ext cx="6254496" cy="230045"/>
           </a:xfrm>
           <a:prstGeom prst="rect">
             <a:avLst/>
@@ -6252,31 +7758,435 @@
           <a:p>
             <a:pPr algn="l">
               <a:lnSpc>
-                <a:spcPct val="95000"/>
+                <a:spcPct val="106000"/>
               </a:lnSpc>
             </a:pPr>
             <a:r>
-              <a:rPr sz="3000" b="1" i="0">
-                <a:solidFill>
-                  <a:srgbClr val="0F2540"/>
-                </a:solidFill>
-                <a:latin typeface="Calibri"/>
-              </a:rPr>
-              <a:t>Faster is table stakes. We play for the 45% that decides.</a:t>
-            </a:r>
-          </a:p>
-        </p:txBody>
-      </p:sp>
-      <p:sp>
-        <p:nvSpPr>
-          <p:cNvPr id="5" name="Rectangle 4"/>
+              <a:rPr sz="1300" b="0" i="0">
+                <a:solidFill>
+                  <a:srgbClr val="1A2733"/>
+                </a:solidFill>
+                <a:latin typeface="Calibri"/>
+              </a:rPr>
+              <a:t>More pursuits answered, at steadier quality.</a:t>
+            </a:r>
+          </a:p>
+        </p:txBody>
+      </p:sp>
+      <p:sp>
+        <p:nvSpPr>
+          <p:cNvPr id="9" name="TextBox 8"/>
+          <p:cNvSpPr txBox="1"/>
+          <p:nvPr/>
+        </p:nvSpPr>
+        <p:spPr>
+          <a:xfrm>
+            <a:off x="1042416" y="1942101"/>
+            <a:ext cx="6254496" cy="441802"/>
+          </a:xfrm>
+          <a:prstGeom prst="rect">
+            <a:avLst/>
+          </a:prstGeom>
+          <a:noFill/>
+        </p:spPr>
+        <p:txBody>
+          <a:bodyPr wrap="square" anchor="t" lIns="0" rIns="0" tIns="0" bIns="0">
+            <a:spAutoFit/>
+          </a:bodyPr>
+          <a:lstStyle/>
+          <a:p>
+            <a:pPr algn="l">
+              <a:lnSpc>
+                <a:spcPct val="106000"/>
+              </a:lnSpc>
+            </a:pPr>
+            <a:r>
+              <a:rPr sz="1300" b="1" i="0">
+                <a:solidFill>
+                  <a:srgbClr val="1A2733"/>
+                </a:solidFill>
+                <a:latin typeface="Calibri"/>
+              </a:rPr>
+              <a:t>Effort moves to the heaviest criteria:</a:t>
+            </a:r>
+            <a:r>
+              <a:rPr sz="1300" b="0" i="0">
+                <a:solidFill>
+                  <a:srgbClr val="1A2733"/>
+                </a:solidFill>
+                <a:latin typeface="Calibri"/>
+              </a:rPr>
+              <a:t> demonstrated understanding is roughly 45% of a rubric, against ~15% for functionality.</a:t>
+            </a:r>
+          </a:p>
+        </p:txBody>
+      </p:sp>
+      <p:sp>
+        <p:nvSpPr>
+          <p:cNvPr id="10" name="Rectangle 9"/>
           <p:cNvSpPr/>
           <p:nvPr/>
         </p:nvSpPr>
         <p:spPr>
           <a:xfrm>
-            <a:off x="566928" y="1499616"/>
-            <a:ext cx="1371600" cy="41148"/>
+            <a:off x="816559" y="1602328"/>
+            <a:ext cx="12801" cy="445651"/>
+          </a:xfrm>
+          <a:prstGeom prst="rect">
+            <a:avLst/>
+          </a:prstGeom>
+          <a:solidFill>
+            <a:srgbClr val="D3DAE2"/>
+          </a:solidFill>
+          <a:ln>
+            <a:noFill/>
+          </a:ln>
+          <a:effectLst/>
+        </p:spPr>
+        <p:style>
+          <a:lnRef idx="1">
+            <a:schemeClr val="accent1"/>
+          </a:lnRef>
+          <a:fillRef idx="3">
+            <a:schemeClr val="accent1"/>
+          </a:fillRef>
+          <a:effectRef idx="2">
+            <a:schemeClr val="accent1"/>
+          </a:effectRef>
+          <a:fontRef idx="minor">
+            <a:schemeClr val="lt1"/>
+          </a:fontRef>
+        </p:style>
+        <p:txBody>
+          <a:bodyPr rtlCol="0" anchor="ctr" wrap="square"/>
+          <a:lstStyle/>
+          <a:p>
+            <a:pPr algn="ctr"/>
+          </a:p>
+        </p:txBody>
+      </p:sp>
+      <p:sp>
+        <p:nvSpPr>
+          <p:cNvPr id="11" name="Oval 10"/>
+          <p:cNvSpPr/>
+          <p:nvPr/>
+        </p:nvSpPr>
+        <p:spPr>
+          <a:xfrm>
+            <a:off x="761238" y="1692205"/>
+            <a:ext cx="123444" cy="123444"/>
+          </a:xfrm>
+          <a:prstGeom prst="ellipse">
+            <a:avLst/>
+          </a:prstGeom>
+          <a:solidFill>
+            <a:srgbClr val="FFFFFF"/>
+          </a:solidFill>
+          <a:ln w="19050">
+            <a:solidFill>
+              <a:srgbClr val="C0642A"/>
+            </a:solidFill>
+          </a:ln>
+          <a:effectLst/>
+        </p:spPr>
+        <p:style>
+          <a:lnRef idx="1">
+            <a:schemeClr val="accent1"/>
+          </a:lnRef>
+          <a:fillRef idx="3">
+            <a:schemeClr val="accent1"/>
+          </a:fillRef>
+          <a:effectRef idx="2">
+            <a:schemeClr val="accent1"/>
+          </a:effectRef>
+          <a:fontRef idx="minor">
+            <a:schemeClr val="lt1"/>
+          </a:fontRef>
+        </p:style>
+        <p:txBody>
+          <a:bodyPr rtlCol="0" anchor="ctr" wrap="square"/>
+          <a:lstStyle/>
+          <a:p>
+            <a:pPr algn="ctr"/>
+          </a:p>
+        </p:txBody>
+      </p:sp>
+      <p:sp>
+        <p:nvSpPr>
+          <p:cNvPr id="12" name="Oval 11"/>
+          <p:cNvSpPr/>
+          <p:nvPr/>
+        </p:nvSpPr>
+        <p:spPr>
+          <a:xfrm>
+            <a:off x="761238" y="1986258"/>
+            <a:ext cx="123444" cy="123444"/>
+          </a:xfrm>
+          <a:prstGeom prst="ellipse">
+            <a:avLst/>
+          </a:prstGeom>
+          <a:solidFill>
+            <a:srgbClr val="FFFFFF"/>
+          </a:solidFill>
+          <a:ln w="19050">
+            <a:solidFill>
+              <a:srgbClr val="C0642A"/>
+            </a:solidFill>
+          </a:ln>
+          <a:effectLst/>
+        </p:spPr>
+        <p:style>
+          <a:lnRef idx="1">
+            <a:schemeClr val="accent1"/>
+          </a:lnRef>
+          <a:fillRef idx="3">
+            <a:schemeClr val="accent1"/>
+          </a:fillRef>
+          <a:effectRef idx="2">
+            <a:schemeClr val="accent1"/>
+          </a:effectRef>
+          <a:fontRef idx="minor">
+            <a:schemeClr val="lt1"/>
+          </a:fontRef>
+        </p:style>
+        <p:txBody>
+          <a:bodyPr rtlCol="0" anchor="ctr" wrap="square"/>
+          <a:lstStyle/>
+          <a:p>
+            <a:pPr algn="ctr"/>
+          </a:p>
+        </p:txBody>
+      </p:sp>
+      <p:sp>
+        <p:nvSpPr>
+          <p:cNvPr id="13" name="Rounded Rectangle 12"/>
+          <p:cNvSpPr/>
+          <p:nvPr/>
+        </p:nvSpPr>
+        <p:spPr>
+          <a:xfrm>
+            <a:off x="566928" y="2566784"/>
+            <a:ext cx="6803136" cy="274320"/>
+          </a:xfrm>
+          <a:prstGeom prst="roundRect">
+            <a:avLst>
+              <a:gd name="adj" fmla="val 20000"/>
+            </a:avLst>
+          </a:prstGeom>
+          <a:solidFill>
+            <a:srgbClr val="0F2540"/>
+          </a:solidFill>
+          <a:ln>
+            <a:noFill/>
+          </a:ln>
+          <a:effectLst/>
+        </p:spPr>
+        <p:style>
+          <a:lnRef idx="1">
+            <a:schemeClr val="accent1"/>
+          </a:lnRef>
+          <a:fillRef idx="3">
+            <a:schemeClr val="accent1"/>
+          </a:fillRef>
+          <a:effectRef idx="2">
+            <a:schemeClr val="accent1"/>
+          </a:effectRef>
+          <a:fontRef idx="minor">
+            <a:schemeClr val="lt1"/>
+          </a:fontRef>
+        </p:style>
+        <p:txBody>
+          <a:bodyPr rtlCol="0" anchor="ctr" wrap="square"/>
+          <a:lstStyle/>
+          <a:p>
+            <a:pPr algn="ctr"/>
+          </a:p>
+        </p:txBody>
+      </p:sp>
+      <p:sp>
+        <p:nvSpPr>
+          <p:cNvPr id="14" name="TextBox 13"/>
+          <p:cNvSpPr txBox="1"/>
+          <p:nvPr/>
+        </p:nvSpPr>
+        <p:spPr>
+          <a:xfrm>
+            <a:off x="804672" y="2607900"/>
+            <a:ext cx="6382512" cy="210375"/>
+          </a:xfrm>
+          <a:prstGeom prst="rect">
+            <a:avLst/>
+          </a:prstGeom>
+          <a:noFill/>
+        </p:spPr>
+        <p:txBody>
+          <a:bodyPr wrap="square" anchor="t" lIns="0" rIns="0" tIns="0" bIns="0">
+            <a:spAutoFit/>
+          </a:bodyPr>
+          <a:lstStyle/>
+          <a:p>
+            <a:pPr algn="l">
+              <a:lnSpc>
+                <a:spcPct val="100000"/>
+              </a:lnSpc>
+            </a:pPr>
+            <a:r>
+              <a:rPr sz="1250" b="1" i="0" spc="60">
+                <a:solidFill>
+                  <a:srgbClr val="FFFFFF"/>
+                </a:solidFill>
+                <a:latin typeface="Calibri"/>
+              </a:rPr>
+              <a:t>Pilot Plan</a:t>
+            </a:r>
+          </a:p>
+        </p:txBody>
+      </p:sp>
+      <p:sp>
+        <p:nvSpPr>
+          <p:cNvPr id="15" name="TextBox 14"/>
+          <p:cNvSpPr txBox="1"/>
+          <p:nvPr/>
+        </p:nvSpPr>
+        <p:spPr>
+          <a:xfrm>
+            <a:off x="1042416" y="2932544"/>
+            <a:ext cx="6254496" cy="230045"/>
+          </a:xfrm>
+          <a:prstGeom prst="rect">
+            <a:avLst/>
+          </a:prstGeom>
+          <a:noFill/>
+        </p:spPr>
+        <p:txBody>
+          <a:bodyPr wrap="square" anchor="t" lIns="0" rIns="0" tIns="0" bIns="0">
+            <a:spAutoFit/>
+          </a:bodyPr>
+          <a:lstStyle/>
+          <a:p>
+            <a:pPr algn="l" marL="201168" indent="-201168">
+              <a:lnSpc>
+                <a:spcPct val="106000"/>
+              </a:lnSpc>
+            </a:pPr>
+            <a:r>
+              <a:rPr sz="1300" b="1" i="0">
+                <a:solidFill>
+                  <a:srgbClr val="1A2733"/>
+                </a:solidFill>
+                <a:latin typeface="Calibri"/>
+              </a:rPr>
+              <a:t>1  </a:t>
+            </a:r>
+            <a:r>
+              <a:rPr sz="1300" b="0" i="0">
+                <a:solidFill>
+                  <a:srgbClr val="1A2733"/>
+                </a:solidFill>
+                <a:latin typeface="Calibri"/>
+              </a:rPr>
+              <a:t>Run in parallel on the next live pursuit, beside the human draft.</a:t>
+            </a:r>
+          </a:p>
+        </p:txBody>
+      </p:sp>
+      <p:sp>
+        <p:nvSpPr>
+          <p:cNvPr id="16" name="TextBox 15"/>
+          <p:cNvSpPr txBox="1"/>
+          <p:nvPr/>
+        </p:nvSpPr>
+        <p:spPr>
+          <a:xfrm>
+            <a:off x="1042416" y="3226597"/>
+            <a:ext cx="6254496" cy="230045"/>
+          </a:xfrm>
+          <a:prstGeom prst="rect">
+            <a:avLst/>
+          </a:prstGeom>
+          <a:noFill/>
+        </p:spPr>
+        <p:txBody>
+          <a:bodyPr wrap="square" anchor="t" lIns="0" rIns="0" tIns="0" bIns="0">
+            <a:spAutoFit/>
+          </a:bodyPr>
+          <a:lstStyle/>
+          <a:p>
+            <a:pPr algn="l" marL="201168" indent="-201168">
+              <a:lnSpc>
+                <a:spcPct val="106000"/>
+              </a:lnSpc>
+            </a:pPr>
+            <a:r>
+              <a:rPr sz="1300" b="1" i="0">
+                <a:solidFill>
+                  <a:srgbClr val="1A2733"/>
+                </a:solidFill>
+                <a:latin typeface="Calibri"/>
+              </a:rPr>
+              <a:t>2  </a:t>
+            </a:r>
+            <a:r>
+              <a:rPr sz="1300" b="0" i="0">
+                <a:solidFill>
+                  <a:srgbClr val="1A2733"/>
+                </a:solidFill>
+                <a:latin typeface="Calibri"/>
+              </a:rPr>
+              <a:t>Stand up a curated library of credentials, proposals and case studies.</a:t>
+            </a:r>
+          </a:p>
+        </p:txBody>
+      </p:sp>
+      <p:sp>
+        <p:nvSpPr>
+          <p:cNvPr id="17" name="TextBox 16"/>
+          <p:cNvSpPr txBox="1"/>
+          <p:nvPr/>
+        </p:nvSpPr>
+        <p:spPr>
+          <a:xfrm>
+            <a:off x="1463040" y="3520650"/>
+            <a:ext cx="5833872" cy="221900"/>
+          </a:xfrm>
+          <a:prstGeom prst="rect">
+            <a:avLst/>
+          </a:prstGeom>
+          <a:noFill/>
+        </p:spPr>
+        <p:txBody>
+          <a:bodyPr wrap="square" anchor="t" lIns="0" rIns="0" tIns="0" bIns="0">
+            <a:spAutoFit/>
+          </a:bodyPr>
+          <a:lstStyle/>
+          <a:p>
+            <a:pPr algn="l">
+              <a:lnSpc>
+                <a:spcPct val="106000"/>
+              </a:lnSpc>
+            </a:pPr>
+            <a:r>
+              <a:rPr sz="1250" b="0" i="0">
+                <a:solidFill>
+                  <a:srgbClr val="33414F"/>
+                </a:solidFill>
+                <a:latin typeface="Calibri"/>
+              </a:rPr>
+              <a:t>The main dependency — and empty today.</a:t>
+            </a:r>
+          </a:p>
+        </p:txBody>
+      </p:sp>
+      <p:sp>
+        <p:nvSpPr>
+          <p:cNvPr id="18" name="Rectangle 17"/>
+          <p:cNvSpPr/>
+          <p:nvPr/>
+        </p:nvSpPr>
+        <p:spPr>
+          <a:xfrm>
+            <a:off x="1280160" y="3588167"/>
+            <a:ext cx="68580" cy="68580"/>
           </a:xfrm>
           <a:prstGeom prst="rect">
             <a:avLst/>
@@ -6313,14 +8223,14 @@
       </p:sp>
       <p:sp>
         <p:nvSpPr>
-          <p:cNvPr id="6" name="TextBox 5"/>
+          <p:cNvPr id="19" name="TextBox 18"/>
           <p:cNvSpPr txBox="1"/>
           <p:nvPr/>
         </p:nvSpPr>
         <p:spPr>
           <a:xfrm>
-            <a:off x="10424160" y="6382512"/>
-            <a:ext cx="1197864" cy="237744"/>
+            <a:off x="1042416" y="3792843"/>
+            <a:ext cx="6254496" cy="230045"/>
           </a:xfrm>
           <a:prstGeom prst="rect">
             <a:avLst/>
@@ -6333,40 +8243,51 @@
           </a:bodyPr>
           <a:lstStyle/>
           <a:p>
-            <a:pPr algn="r"/>
-            <a:r>
-              <a:rPr sz="1000" b="0" i="0">
-                <a:solidFill>
-                  <a:srgbClr val="4A5A6E"/>
-                </a:solidFill>
-                <a:latin typeface="Calibri"/>
-              </a:rPr>
-              <a:t>4 / 4</a:t>
-            </a:r>
-          </a:p>
-        </p:txBody>
-      </p:sp>
-      <p:sp>
-        <p:nvSpPr>
-          <p:cNvPr id="7" name="Rectangle 6"/>
+            <a:pPr algn="l" marL="201168" indent="-201168">
+              <a:lnSpc>
+                <a:spcPct val="106000"/>
+              </a:lnSpc>
+            </a:pPr>
+            <a:r>
+              <a:rPr sz="1300" b="1" i="0">
+                <a:solidFill>
+                  <a:srgbClr val="1A2733"/>
+                </a:solidFill>
+                <a:latin typeface="Calibri"/>
+              </a:rPr>
+              <a:t>3  </a:t>
+            </a:r>
+            <a:r>
+              <a:rPr sz="1300" b="0" i="0">
+                <a:solidFill>
+                  <a:srgbClr val="1A2733"/>
+                </a:solidFill>
+                <a:latin typeface="Calibri"/>
+              </a:rPr>
+              <a:t>Partner review before anything ships. A rule, not a setting.</a:t>
+            </a:r>
+          </a:p>
+        </p:txBody>
+      </p:sp>
+      <p:sp>
+        <p:nvSpPr>
+          <p:cNvPr id="20" name="Rectangle 19"/>
           <p:cNvSpPr/>
           <p:nvPr/>
         </p:nvSpPr>
         <p:spPr>
           <a:xfrm>
-            <a:off x="566928" y="1773936"/>
-            <a:ext cx="2647188" cy="3310128"/>
+            <a:off x="816559" y="2886824"/>
+            <a:ext cx="12801" cy="1011897"/>
           </a:xfrm>
           <a:prstGeom prst="rect">
             <a:avLst/>
           </a:prstGeom>
           <a:solidFill>
-            <a:srgbClr val="F1F4F7"/>
+            <a:srgbClr val="D3DAE2"/>
           </a:solidFill>
-          <a:ln w="9525">
-            <a:solidFill>
-              <a:srgbClr val="D8DEE6"/>
-            </a:solidFill>
+          <a:ln>
+            <a:noFill/>
           </a:ln>
           <a:effectLst/>
         </p:spPr>
@@ -6394,101 +8315,24 @@
       </p:sp>
       <p:sp>
         <p:nvSpPr>
-          <p:cNvPr id="8" name="TextBox 7"/>
-          <p:cNvSpPr txBox="1"/>
-          <p:nvPr/>
-        </p:nvSpPr>
-        <p:spPr>
-          <a:xfrm>
-            <a:off x="804672" y="1975104"/>
-            <a:ext cx="2171700" cy="2907792"/>
-          </a:xfrm>
-          <a:prstGeom prst="rect">
-            <a:avLst/>
-          </a:prstGeom>
-          <a:noFill/>
-        </p:spPr>
-        <p:txBody>
-          <a:bodyPr wrap="square" anchor="t" lIns="0" rIns="0" tIns="0" bIns="0">
-            <a:spAutoFit/>
-          </a:bodyPr>
-          <a:lstStyle/>
-          <a:p>
-            <a:pPr algn="l">
-              <a:spcAft>
-                <a:spcPts val="700"/>
-              </a:spcAft>
-            </a:pPr>
-            <a:r>
-              <a:rPr sz="1300" b="1" i="0" spc="80">
-                <a:solidFill>
-                  <a:srgbClr val="0F2540"/>
-                </a:solidFill>
-                <a:latin typeface="Calibri"/>
-              </a:rPr>
-              <a:t>BUSINESS VALUE</a:t>
-            </a:r>
-          </a:p>
-          <a:p>
-            <a:pPr algn="l">
-              <a:lnSpc>
-                <a:spcPct val="105000"/>
-              </a:lnSpc>
-              <a:spcAft>
-                <a:spcPts val="700"/>
-              </a:spcAft>
-            </a:pPr>
-            <a:r>
-              <a:rPr sz="1300" b="0" i="0">
-                <a:solidFill>
-                  <a:srgbClr val="4A5A6E"/>
-                </a:solidFill>
-                <a:latin typeface="Calibri"/>
-              </a:rPr>
-              <a:t>More pursuits answered, at steadier quality.</a:t>
-            </a:r>
-          </a:p>
-          <a:p>
-            <a:pPr algn="l">
-              <a:lnSpc>
-                <a:spcPct val="105000"/>
-              </a:lnSpc>
-              <a:spcAft>
-                <a:spcPts val="0"/>
-              </a:spcAft>
-            </a:pPr>
-            <a:r>
-              <a:rPr sz="1300" b="0" i="0">
-                <a:solidFill>
-                  <a:srgbClr val="4A5A6E"/>
-                </a:solidFill>
-                <a:latin typeface="Calibri"/>
-              </a:rPr>
-              <a:t>Effort moves to the criteria carrying the most weight: demonstrated understanding, roughly 45% of a rubric, against ~15% for functionality.</a:t>
-            </a:r>
-          </a:p>
-        </p:txBody>
-      </p:sp>
-      <p:sp>
-        <p:nvSpPr>
-          <p:cNvPr id="9" name="Rectangle 8"/>
+          <p:cNvPr id="21" name="Oval 20"/>
           <p:cNvSpPr/>
           <p:nvPr/>
         </p:nvSpPr>
         <p:spPr>
           <a:xfrm>
-            <a:off x="3369564" y="1773936"/>
-            <a:ext cx="2647188" cy="3310128"/>
-          </a:xfrm>
-          <a:prstGeom prst="rect">
+            <a:off x="761238" y="2976700"/>
+            <a:ext cx="123444" cy="123444"/>
+          </a:xfrm>
+          <a:prstGeom prst="ellipse">
             <a:avLst/>
           </a:prstGeom>
           <a:solidFill>
-            <a:srgbClr val="F1F4F7"/>
+            <a:srgbClr val="FFFFFF"/>
           </a:solidFill>
-          <a:ln w="9525">
+          <a:ln w="19050">
             <a:solidFill>
-              <a:srgbClr val="D8DEE6"/>
+              <a:srgbClr val="C0642A"/>
             </a:solidFill>
           </a:ln>
           <a:effectLst/>
@@ -6517,120 +8361,24 @@
       </p:sp>
       <p:sp>
         <p:nvSpPr>
-          <p:cNvPr id="10" name="TextBox 9"/>
-          <p:cNvSpPr txBox="1"/>
-          <p:nvPr/>
-        </p:nvSpPr>
-        <p:spPr>
-          <a:xfrm>
-            <a:off x="3607308" y="1975104"/>
-            <a:ext cx="2171700" cy="2907792"/>
-          </a:xfrm>
-          <a:prstGeom prst="rect">
-            <a:avLst/>
-          </a:prstGeom>
-          <a:noFill/>
-        </p:spPr>
-        <p:txBody>
-          <a:bodyPr wrap="square" anchor="t" lIns="0" rIns="0" tIns="0" bIns="0">
-            <a:spAutoFit/>
-          </a:bodyPr>
-          <a:lstStyle/>
-          <a:p>
-            <a:pPr algn="l">
-              <a:spcAft>
-                <a:spcPts val="700"/>
-              </a:spcAft>
-            </a:pPr>
-            <a:r>
-              <a:rPr sz="1300" b="1" i="0" spc="80">
-                <a:solidFill>
-                  <a:srgbClr val="0F2540"/>
-                </a:solidFill>
-                <a:latin typeface="Calibri"/>
-              </a:rPr>
-              <a:t>PILOT PLAN</a:t>
-            </a:r>
-          </a:p>
-          <a:p>
-            <a:pPr algn="l">
-              <a:lnSpc>
-                <a:spcPct val="105000"/>
-              </a:lnSpc>
-              <a:spcAft>
-                <a:spcPts val="700"/>
-              </a:spcAft>
-            </a:pPr>
-            <a:r>
-              <a:rPr sz="1300" b="0" i="0">
-                <a:solidFill>
-                  <a:srgbClr val="4A5A6E"/>
-                </a:solidFill>
-                <a:latin typeface="Calibri"/>
-              </a:rPr>
-              <a:t>1  Run in parallel on the next live pursuit, beside the human draft.</a:t>
-            </a:r>
-          </a:p>
-          <a:p>
-            <a:pPr algn="l">
-              <a:lnSpc>
-                <a:spcPct val="105000"/>
-              </a:lnSpc>
-              <a:spcAft>
-                <a:spcPts val="700"/>
-              </a:spcAft>
-            </a:pPr>
-            <a:r>
-              <a:rPr sz="1300" b="0" i="0">
-                <a:solidFill>
-                  <a:srgbClr val="4A5A6E"/>
-                </a:solidFill>
-                <a:latin typeface="Calibri"/>
-              </a:rPr>
-              <a:t>2  Stand up a curated library of credentials, proposals and case studies — the main dependency, and empty today.</a:t>
-            </a:r>
-          </a:p>
-          <a:p>
-            <a:pPr algn="l">
-              <a:lnSpc>
-                <a:spcPct val="105000"/>
-              </a:lnSpc>
-              <a:spcAft>
-                <a:spcPts val="0"/>
-              </a:spcAft>
-            </a:pPr>
-            <a:r>
-              <a:rPr sz="1300" b="0" i="0">
-                <a:solidFill>
-                  <a:srgbClr val="4A5A6E"/>
-                </a:solidFill>
-                <a:latin typeface="Calibri"/>
-              </a:rPr>
-              <a:t>3  Partner review before anything ships. A rule, not a setting.</a:t>
-            </a:r>
-          </a:p>
-        </p:txBody>
-      </p:sp>
-      <p:sp>
-        <p:nvSpPr>
-          <p:cNvPr id="11" name="Rectangle 10"/>
+          <p:cNvPr id="22" name="Oval 21"/>
           <p:cNvSpPr/>
           <p:nvPr/>
         </p:nvSpPr>
         <p:spPr>
           <a:xfrm>
-            <a:off x="6172200" y="1773936"/>
-            <a:ext cx="2647188" cy="3310128"/>
-          </a:xfrm>
-          <a:prstGeom prst="rect">
+            <a:off x="761238" y="3270754"/>
+            <a:ext cx="123444" cy="123444"/>
+          </a:xfrm>
+          <a:prstGeom prst="ellipse">
             <a:avLst/>
           </a:prstGeom>
           <a:solidFill>
-            <a:srgbClr val="F1F4F7"/>
+            <a:srgbClr val="FFFFFF"/>
           </a:solidFill>
-          <a:ln w="9525">
+          <a:ln w="19050">
             <a:solidFill>
-              <a:srgbClr val="D8DEE6"/>
+              <a:srgbClr val="C0642A"/>
             </a:solidFill>
           </a:ln>
           <a:effectLst/>
@@ -6659,158 +8407,24 @@
       </p:sp>
       <p:sp>
         <p:nvSpPr>
-          <p:cNvPr id="12" name="TextBox 11"/>
-          <p:cNvSpPr txBox="1"/>
-          <p:nvPr/>
-        </p:nvSpPr>
-        <p:spPr>
-          <a:xfrm>
-            <a:off x="6409944" y="1975104"/>
-            <a:ext cx="2171700" cy="2907792"/>
-          </a:xfrm>
-          <a:prstGeom prst="rect">
-            <a:avLst/>
-          </a:prstGeom>
-          <a:noFill/>
-        </p:spPr>
-        <p:txBody>
-          <a:bodyPr wrap="square" anchor="t" lIns="0" rIns="0" tIns="0" bIns="0">
-            <a:spAutoFit/>
-          </a:bodyPr>
-          <a:lstStyle/>
-          <a:p>
-            <a:pPr algn="l">
-              <a:spcAft>
-                <a:spcPts val="700"/>
-              </a:spcAft>
-            </a:pPr>
-            <a:r>
-              <a:rPr sz="1300" b="1" i="0" spc="80">
-                <a:solidFill>
-                  <a:srgbClr val="0F2540"/>
-                </a:solidFill>
-                <a:latin typeface="Calibri"/>
-              </a:rPr>
-              <a:t>WHAT WE WILL MEASURE</a:t>
-            </a:r>
-          </a:p>
-          <a:p>
-            <a:pPr algn="l">
-              <a:lnSpc>
-                <a:spcPct val="105000"/>
-              </a:lnSpc>
-              <a:spcAft>
-                <a:spcPts val="700"/>
-              </a:spcAft>
-            </a:pPr>
-            <a:r>
-              <a:rPr sz="1300" b="0" i="0">
-                <a:solidFill>
-                  <a:srgbClr val="4A5A6E"/>
-                </a:solidFill>
-                <a:latin typeface="Calibri"/>
-              </a:rPr>
-              <a:t>Draft-to-first-review time.</a:t>
-            </a:r>
-          </a:p>
-          <a:p>
-            <a:pPr algn="l">
-              <a:lnSpc>
-                <a:spcPct val="105000"/>
-              </a:lnSpc>
-              <a:spcAft>
-                <a:spcPts val="700"/>
-              </a:spcAft>
-            </a:pPr>
-            <a:r>
-              <a:rPr sz="1300" b="0" i="0">
-                <a:solidFill>
-                  <a:srgbClr val="4A5A6E"/>
-                </a:solidFill>
-                <a:latin typeface="Calibri"/>
-              </a:rPr>
-              <a:t>Rubric completeness rate.</a:t>
-            </a:r>
-          </a:p>
-          <a:p>
-            <a:pPr algn="l">
-              <a:lnSpc>
-                <a:spcPct val="105000"/>
-              </a:lnSpc>
-              <a:spcAft>
-                <a:spcPts val="700"/>
-              </a:spcAft>
-            </a:pPr>
-            <a:r>
-              <a:rPr sz="1300" b="0" i="0">
-                <a:solidFill>
-                  <a:srgbClr val="4A5A6E"/>
-                </a:solidFill>
-                <a:latin typeface="Calibri"/>
-              </a:rPr>
-              <a:t>Predicted versus actual evaluator score.</a:t>
-            </a:r>
-          </a:p>
-          <a:p>
-            <a:pPr algn="l">
-              <a:lnSpc>
-                <a:spcPct val="105000"/>
-              </a:lnSpc>
-              <a:spcAft>
-                <a:spcPts val="700"/>
-              </a:spcAft>
-            </a:pPr>
-            <a:r>
-              <a:rPr sz="1300" b="0" i="0">
-                <a:solidFill>
-                  <a:srgbClr val="4A5A6E"/>
-                </a:solidFill>
-                <a:latin typeface="Calibri"/>
-              </a:rPr>
-              <a:t>Win rate where it was used.</a:t>
-            </a:r>
-          </a:p>
-          <a:p>
-            <a:pPr algn="l">
-              <a:lnSpc>
-                <a:spcPct val="105000"/>
-              </a:lnSpc>
-              <a:spcAft>
-                <a:spcPts val="0"/>
-              </a:spcAft>
-            </a:pPr>
-            <a:r>
-              <a:rPr sz="1300" b="0" i="0">
-                <a:solidFill>
-                  <a:srgbClr val="4A5A6E"/>
-                </a:solidFill>
-                <a:latin typeface="Calibri"/>
-              </a:rPr>
-              <a:t>Baselines set in the pilot. Nothing claimed yet.</a:t>
-            </a:r>
-          </a:p>
-        </p:txBody>
-      </p:sp>
-      <p:sp>
-        <p:nvSpPr>
-          <p:cNvPr id="13" name="Rectangle 12"/>
+          <p:cNvPr id="23" name="Oval 22"/>
           <p:cNvSpPr/>
           <p:nvPr/>
         </p:nvSpPr>
         <p:spPr>
           <a:xfrm>
-            <a:off x="8974836" y="1773936"/>
-            <a:ext cx="2647188" cy="3310128"/>
-          </a:xfrm>
-          <a:prstGeom prst="rect">
+            <a:off x="761238" y="3837000"/>
+            <a:ext cx="123444" cy="123444"/>
+          </a:xfrm>
+          <a:prstGeom prst="ellipse">
             <a:avLst/>
           </a:prstGeom>
           <a:solidFill>
-            <a:srgbClr val="F1F4F7"/>
+            <a:srgbClr val="FFFFFF"/>
           </a:solidFill>
-          <a:ln w="9525">
+          <a:ln w="19050">
             <a:solidFill>
-              <a:srgbClr val="D8DEE6"/>
+              <a:srgbClr val="C0642A"/>
             </a:solidFill>
           </a:ln>
           <a:effectLst/>
@@ -6839,135 +8453,22 @@
       </p:sp>
       <p:sp>
         <p:nvSpPr>
-          <p:cNvPr id="14" name="TextBox 13"/>
-          <p:cNvSpPr txBox="1"/>
-          <p:nvPr/>
-        </p:nvSpPr>
-        <p:spPr>
-          <a:xfrm>
-            <a:off x="9212580" y="1975104"/>
-            <a:ext cx="2171700" cy="2907792"/>
-          </a:xfrm>
-          <a:prstGeom prst="rect">
-            <a:avLst/>
-          </a:prstGeom>
-          <a:noFill/>
-        </p:spPr>
-        <p:txBody>
-          <a:bodyPr wrap="square" anchor="t" lIns="0" rIns="0" tIns="0" bIns="0">
-            <a:spAutoFit/>
-          </a:bodyPr>
-          <a:lstStyle/>
-          <a:p>
-            <a:pPr algn="l">
-              <a:spcAft>
-                <a:spcPts val="700"/>
-              </a:spcAft>
-            </a:pPr>
-            <a:r>
-              <a:rPr sz="1300" b="1" i="0" spc="80">
-                <a:solidFill>
-                  <a:srgbClr val="0F2540"/>
-                </a:solidFill>
-                <a:latin typeface="Calibri"/>
-              </a:rPr>
-              <a:t>RISKS, HONESTLY</a:t>
-            </a:r>
-          </a:p>
-          <a:p>
-            <a:pPr algn="l">
-              <a:lnSpc>
-                <a:spcPct val="105000"/>
-              </a:lnSpc>
-              <a:spcAft>
-                <a:spcPts val="700"/>
-              </a:spcAft>
-            </a:pPr>
-            <a:r>
-              <a:rPr sz="1300" b="0" i="0">
-                <a:solidFill>
-                  <a:srgbClr val="4A5A6E"/>
-                </a:solidFill>
-                <a:latin typeface="Calibri"/>
-              </a:rPr>
-              <a:t>Invented credentials or client facts.</a:t>
-            </a:r>
-          </a:p>
-          <a:p>
-            <a:pPr algn="l">
-              <a:lnSpc>
-                <a:spcPct val="105000"/>
-              </a:lnSpc>
-              <a:spcAft>
-                <a:spcPts val="700"/>
-              </a:spcAft>
-            </a:pPr>
-            <a:r>
-              <a:rPr sz="1300" b="0" i="0">
-                <a:solidFill>
-                  <a:srgbClr val="4A5A6E"/>
-                </a:solidFill>
-                <a:latin typeface="Calibri"/>
-              </a:rPr>
-              <a:t>One uniform voice across every pursuit.</a:t>
-            </a:r>
-          </a:p>
-          <a:p>
-            <a:pPr algn="l">
-              <a:lnSpc>
-                <a:spcPct val="105000"/>
-              </a:lnSpc>
-              <a:spcAft>
-                <a:spcPts val="700"/>
-              </a:spcAft>
-            </a:pPr>
-            <a:r>
-              <a:rPr sz="1300" b="0" i="0">
-                <a:solidFill>
-                  <a:srgbClr val="4A5A6E"/>
-                </a:solidFill>
-                <a:latin typeface="Calibri"/>
-              </a:rPr>
-              <a:t>Confidentiality of client RFP material.</a:t>
-            </a:r>
-          </a:p>
-          <a:p>
-            <a:pPr algn="l">
-              <a:lnSpc>
-                <a:spcPct val="105000"/>
-              </a:lnSpc>
-              <a:spcAft>
-                <a:spcPts val="0"/>
-              </a:spcAft>
-            </a:pPr>
-            <a:r>
-              <a:rPr sz="1300" b="0" i="0">
-                <a:solidFill>
-                  <a:srgbClr val="4A5A6E"/>
-                </a:solidFill>
-                <a:latin typeface="Calibri"/>
-              </a:rPr>
-              <a:t>Mitigation: partner sign-off on anything sent, and a cited source behind every claim.</a:t>
-            </a:r>
-          </a:p>
-        </p:txBody>
-      </p:sp>
-      <p:sp>
-        <p:nvSpPr>
-          <p:cNvPr id="15" name="Rectangle 14"/>
+          <p:cNvPr id="24" name="Rounded Rectangle 23"/>
           <p:cNvSpPr/>
           <p:nvPr/>
         </p:nvSpPr>
         <p:spPr>
           <a:xfrm>
-            <a:off x="566928" y="5340096"/>
-            <a:ext cx="11055096" cy="1060704"/>
-          </a:xfrm>
-          <a:prstGeom prst="rect">
-            <a:avLst/>
+            <a:off x="566928" y="4205768"/>
+            <a:ext cx="6803136" cy="274320"/>
+          </a:xfrm>
+          <a:prstGeom prst="roundRect">
+            <a:avLst>
+              <a:gd name="adj" fmla="val 20000"/>
+            </a:avLst>
           </a:prstGeom>
           <a:solidFill>
-            <a:srgbClr val="0B1C30"/>
+            <a:srgbClr val="0F2540"/>
           </a:solidFill>
           <a:ln>
             <a:noFill/>
@@ -6998,14 +8499,726 @@
       </p:sp>
       <p:sp>
         <p:nvSpPr>
-          <p:cNvPr id="16" name="Rectangle 15"/>
+          <p:cNvPr id="25" name="TextBox 24"/>
+          <p:cNvSpPr txBox="1"/>
+          <p:nvPr/>
+        </p:nvSpPr>
+        <p:spPr>
+          <a:xfrm>
+            <a:off x="804672" y="4246885"/>
+            <a:ext cx="6382512" cy="210375"/>
+          </a:xfrm>
+          <a:prstGeom prst="rect">
+            <a:avLst/>
+          </a:prstGeom>
+          <a:noFill/>
+        </p:spPr>
+        <p:txBody>
+          <a:bodyPr wrap="square" anchor="t" lIns="0" rIns="0" tIns="0" bIns="0">
+            <a:spAutoFit/>
+          </a:bodyPr>
+          <a:lstStyle/>
+          <a:p>
+            <a:pPr algn="l">
+              <a:lnSpc>
+                <a:spcPct val="100000"/>
+              </a:lnSpc>
+            </a:pPr>
+            <a:r>
+              <a:rPr sz="1250" b="1" i="0" spc="60">
+                <a:solidFill>
+                  <a:srgbClr val="FFFFFF"/>
+                </a:solidFill>
+                <a:latin typeface="Calibri"/>
+              </a:rPr>
+              <a:t>Risks, Honestly</a:t>
+            </a:r>
+          </a:p>
+        </p:txBody>
+      </p:sp>
+      <p:sp>
+        <p:nvSpPr>
+          <p:cNvPr id="26" name="TextBox 25"/>
+          <p:cNvSpPr txBox="1"/>
+          <p:nvPr/>
+        </p:nvSpPr>
+        <p:spPr>
+          <a:xfrm>
+            <a:off x="1042416" y="4571528"/>
+            <a:ext cx="6254496" cy="230045"/>
+          </a:xfrm>
+          <a:prstGeom prst="rect">
+            <a:avLst/>
+          </a:prstGeom>
+          <a:noFill/>
+        </p:spPr>
+        <p:txBody>
+          <a:bodyPr wrap="square" anchor="t" lIns="0" rIns="0" tIns="0" bIns="0">
+            <a:spAutoFit/>
+          </a:bodyPr>
+          <a:lstStyle/>
+          <a:p>
+            <a:pPr algn="l">
+              <a:lnSpc>
+                <a:spcPct val="106000"/>
+              </a:lnSpc>
+            </a:pPr>
+            <a:r>
+              <a:rPr sz="1300" b="0" i="0">
+                <a:solidFill>
+                  <a:srgbClr val="1A2733"/>
+                </a:solidFill>
+                <a:latin typeface="Calibri"/>
+              </a:rPr>
+              <a:t>Invented credentials or client facts.</a:t>
+            </a:r>
+          </a:p>
+        </p:txBody>
+      </p:sp>
+      <p:sp>
+        <p:nvSpPr>
+          <p:cNvPr id="27" name="TextBox 26"/>
+          <p:cNvSpPr txBox="1"/>
+          <p:nvPr/>
+        </p:nvSpPr>
+        <p:spPr>
+          <a:xfrm>
+            <a:off x="1042416" y="4865582"/>
+            <a:ext cx="6254496" cy="230045"/>
+          </a:xfrm>
+          <a:prstGeom prst="rect">
+            <a:avLst/>
+          </a:prstGeom>
+          <a:noFill/>
+        </p:spPr>
+        <p:txBody>
+          <a:bodyPr wrap="square" anchor="t" lIns="0" rIns="0" tIns="0" bIns="0">
+            <a:spAutoFit/>
+          </a:bodyPr>
+          <a:lstStyle/>
+          <a:p>
+            <a:pPr algn="l">
+              <a:lnSpc>
+                <a:spcPct val="106000"/>
+              </a:lnSpc>
+            </a:pPr>
+            <a:r>
+              <a:rPr sz="1300" b="0" i="0">
+                <a:solidFill>
+                  <a:srgbClr val="1A2733"/>
+                </a:solidFill>
+                <a:latin typeface="Calibri"/>
+              </a:rPr>
+              <a:t>One uniform voice across every pursuit.</a:t>
+            </a:r>
+          </a:p>
+        </p:txBody>
+      </p:sp>
+      <p:sp>
+        <p:nvSpPr>
+          <p:cNvPr id="28" name="TextBox 27"/>
+          <p:cNvSpPr txBox="1"/>
+          <p:nvPr/>
+        </p:nvSpPr>
+        <p:spPr>
+          <a:xfrm>
+            <a:off x="1042416" y="5159635"/>
+            <a:ext cx="6254496" cy="230045"/>
+          </a:xfrm>
+          <a:prstGeom prst="rect">
+            <a:avLst/>
+          </a:prstGeom>
+          <a:noFill/>
+        </p:spPr>
+        <p:txBody>
+          <a:bodyPr wrap="square" anchor="t" lIns="0" rIns="0" tIns="0" bIns="0">
+            <a:spAutoFit/>
+          </a:bodyPr>
+          <a:lstStyle/>
+          <a:p>
+            <a:pPr algn="l">
+              <a:lnSpc>
+                <a:spcPct val="106000"/>
+              </a:lnSpc>
+            </a:pPr>
+            <a:r>
+              <a:rPr sz="1300" b="0" i="0">
+                <a:solidFill>
+                  <a:srgbClr val="1A2733"/>
+                </a:solidFill>
+                <a:latin typeface="Calibri"/>
+              </a:rPr>
+              <a:t>Confidentiality of client RFP material.</a:t>
+            </a:r>
+          </a:p>
+        </p:txBody>
+      </p:sp>
+      <p:sp>
+        <p:nvSpPr>
+          <p:cNvPr id="29" name="TextBox 28"/>
+          <p:cNvSpPr txBox="1"/>
+          <p:nvPr/>
+        </p:nvSpPr>
+        <p:spPr>
+          <a:xfrm>
+            <a:off x="1042416" y="5453688"/>
+            <a:ext cx="6254496" cy="230045"/>
+          </a:xfrm>
+          <a:prstGeom prst="rect">
+            <a:avLst/>
+          </a:prstGeom>
+          <a:noFill/>
+        </p:spPr>
+        <p:txBody>
+          <a:bodyPr wrap="square" anchor="t" lIns="0" rIns="0" tIns="0" bIns="0">
+            <a:spAutoFit/>
+          </a:bodyPr>
+          <a:lstStyle/>
+          <a:p>
+            <a:pPr algn="l">
+              <a:lnSpc>
+                <a:spcPct val="106000"/>
+              </a:lnSpc>
+            </a:pPr>
+            <a:r>
+              <a:rPr sz="1300" b="1" i="0">
+                <a:solidFill>
+                  <a:srgbClr val="1A2733"/>
+                </a:solidFill>
+                <a:latin typeface="Calibri"/>
+              </a:rPr>
+              <a:t>Mitigation:</a:t>
+            </a:r>
+            <a:r>
+              <a:rPr sz="1300" b="0" i="0">
+                <a:solidFill>
+                  <a:srgbClr val="1A2733"/>
+                </a:solidFill>
+                <a:latin typeface="Calibri"/>
+              </a:rPr>
+              <a:t> partner sign-off on anything sent, and a cited source behind every claim.</a:t>
+            </a:r>
+          </a:p>
+        </p:txBody>
+      </p:sp>
+      <p:sp>
+        <p:nvSpPr>
+          <p:cNvPr id="30" name="Rectangle 29"/>
           <p:cNvSpPr/>
           <p:nvPr/>
         </p:nvSpPr>
         <p:spPr>
           <a:xfrm>
-            <a:off x="566928" y="5340096"/>
-            <a:ext cx="64008" cy="1060704"/>
+            <a:off x="816559" y="4525808"/>
+            <a:ext cx="12801" cy="1033758"/>
+          </a:xfrm>
+          <a:prstGeom prst="rect">
+            <a:avLst/>
+          </a:prstGeom>
+          <a:solidFill>
+            <a:srgbClr val="D3DAE2"/>
+          </a:solidFill>
+          <a:ln>
+            <a:noFill/>
+          </a:ln>
+          <a:effectLst/>
+        </p:spPr>
+        <p:style>
+          <a:lnRef idx="1">
+            <a:schemeClr val="accent1"/>
+          </a:lnRef>
+          <a:fillRef idx="3">
+            <a:schemeClr val="accent1"/>
+          </a:fillRef>
+          <a:effectRef idx="2">
+            <a:schemeClr val="accent1"/>
+          </a:effectRef>
+          <a:fontRef idx="minor">
+            <a:schemeClr val="lt1"/>
+          </a:fontRef>
+        </p:style>
+        <p:txBody>
+          <a:bodyPr rtlCol="0" anchor="ctr" wrap="square"/>
+          <a:lstStyle/>
+          <a:p>
+            <a:pPr algn="ctr"/>
+          </a:p>
+        </p:txBody>
+      </p:sp>
+      <p:sp>
+        <p:nvSpPr>
+          <p:cNvPr id="31" name="Oval 30"/>
+          <p:cNvSpPr/>
+          <p:nvPr/>
+        </p:nvSpPr>
+        <p:spPr>
+          <a:xfrm>
+            <a:off x="761238" y="4615685"/>
+            <a:ext cx="123444" cy="123444"/>
+          </a:xfrm>
+          <a:prstGeom prst="ellipse">
+            <a:avLst/>
+          </a:prstGeom>
+          <a:solidFill>
+            <a:srgbClr val="FFFFFF"/>
+          </a:solidFill>
+          <a:ln w="19050">
+            <a:solidFill>
+              <a:srgbClr val="C0642A"/>
+            </a:solidFill>
+          </a:ln>
+          <a:effectLst/>
+        </p:spPr>
+        <p:style>
+          <a:lnRef idx="1">
+            <a:schemeClr val="accent1"/>
+          </a:lnRef>
+          <a:fillRef idx="3">
+            <a:schemeClr val="accent1"/>
+          </a:fillRef>
+          <a:effectRef idx="2">
+            <a:schemeClr val="accent1"/>
+          </a:effectRef>
+          <a:fontRef idx="minor">
+            <a:schemeClr val="lt1"/>
+          </a:fontRef>
+        </p:style>
+        <p:txBody>
+          <a:bodyPr rtlCol="0" anchor="ctr" wrap="square"/>
+          <a:lstStyle/>
+          <a:p>
+            <a:pPr algn="ctr"/>
+          </a:p>
+        </p:txBody>
+      </p:sp>
+      <p:sp>
+        <p:nvSpPr>
+          <p:cNvPr id="32" name="Oval 31"/>
+          <p:cNvSpPr/>
+          <p:nvPr/>
+        </p:nvSpPr>
+        <p:spPr>
+          <a:xfrm>
+            <a:off x="761238" y="4909738"/>
+            <a:ext cx="123444" cy="123444"/>
+          </a:xfrm>
+          <a:prstGeom prst="ellipse">
+            <a:avLst/>
+          </a:prstGeom>
+          <a:solidFill>
+            <a:srgbClr val="FFFFFF"/>
+          </a:solidFill>
+          <a:ln w="19050">
+            <a:solidFill>
+              <a:srgbClr val="C0642A"/>
+            </a:solidFill>
+          </a:ln>
+          <a:effectLst/>
+        </p:spPr>
+        <p:style>
+          <a:lnRef idx="1">
+            <a:schemeClr val="accent1"/>
+          </a:lnRef>
+          <a:fillRef idx="3">
+            <a:schemeClr val="accent1"/>
+          </a:fillRef>
+          <a:effectRef idx="2">
+            <a:schemeClr val="accent1"/>
+          </a:effectRef>
+          <a:fontRef idx="minor">
+            <a:schemeClr val="lt1"/>
+          </a:fontRef>
+        </p:style>
+        <p:txBody>
+          <a:bodyPr rtlCol="0" anchor="ctr" wrap="square"/>
+          <a:lstStyle/>
+          <a:p>
+            <a:pPr algn="ctr"/>
+          </a:p>
+        </p:txBody>
+      </p:sp>
+      <p:sp>
+        <p:nvSpPr>
+          <p:cNvPr id="33" name="Oval 32"/>
+          <p:cNvSpPr/>
+          <p:nvPr/>
+        </p:nvSpPr>
+        <p:spPr>
+          <a:xfrm>
+            <a:off x="761238" y="5203791"/>
+            <a:ext cx="123444" cy="123444"/>
+          </a:xfrm>
+          <a:prstGeom prst="ellipse">
+            <a:avLst/>
+          </a:prstGeom>
+          <a:solidFill>
+            <a:srgbClr val="FFFFFF"/>
+          </a:solidFill>
+          <a:ln w="19050">
+            <a:solidFill>
+              <a:srgbClr val="C0642A"/>
+            </a:solidFill>
+          </a:ln>
+          <a:effectLst/>
+        </p:spPr>
+        <p:style>
+          <a:lnRef idx="1">
+            <a:schemeClr val="accent1"/>
+          </a:lnRef>
+          <a:fillRef idx="3">
+            <a:schemeClr val="accent1"/>
+          </a:fillRef>
+          <a:effectRef idx="2">
+            <a:schemeClr val="accent1"/>
+          </a:effectRef>
+          <a:fontRef idx="minor">
+            <a:schemeClr val="lt1"/>
+          </a:fontRef>
+        </p:style>
+        <p:txBody>
+          <a:bodyPr rtlCol="0" anchor="ctr" wrap="square"/>
+          <a:lstStyle/>
+          <a:p>
+            <a:pPr algn="ctr"/>
+          </a:p>
+        </p:txBody>
+      </p:sp>
+      <p:sp>
+        <p:nvSpPr>
+          <p:cNvPr id="34" name="Oval 33"/>
+          <p:cNvSpPr/>
+          <p:nvPr/>
+        </p:nvSpPr>
+        <p:spPr>
+          <a:xfrm>
+            <a:off x="761238" y="5497845"/>
+            <a:ext cx="123444" cy="123444"/>
+          </a:xfrm>
+          <a:prstGeom prst="ellipse">
+            <a:avLst/>
+          </a:prstGeom>
+          <a:solidFill>
+            <a:srgbClr val="FFFFFF"/>
+          </a:solidFill>
+          <a:ln w="19050">
+            <a:solidFill>
+              <a:srgbClr val="C0642A"/>
+            </a:solidFill>
+          </a:ln>
+          <a:effectLst/>
+        </p:spPr>
+        <p:style>
+          <a:lnRef idx="1">
+            <a:schemeClr val="accent1"/>
+          </a:lnRef>
+          <a:fillRef idx="3">
+            <a:schemeClr val="accent1"/>
+          </a:fillRef>
+          <a:effectRef idx="2">
+            <a:schemeClr val="accent1"/>
+          </a:effectRef>
+          <a:fontRef idx="minor">
+            <a:schemeClr val="lt1"/>
+          </a:fontRef>
+        </p:style>
+        <p:txBody>
+          <a:bodyPr rtlCol="0" anchor="ctr" wrap="square"/>
+          <a:lstStyle/>
+          <a:p>
+            <a:pPr algn="ctr"/>
+          </a:p>
+        </p:txBody>
+      </p:sp>
+      <p:sp>
+        <p:nvSpPr>
+          <p:cNvPr id="35" name="Rounded Rectangle 34"/>
+          <p:cNvSpPr/>
+          <p:nvPr/>
+        </p:nvSpPr>
+        <p:spPr>
+          <a:xfrm>
+            <a:off x="7699248" y="1282288"/>
+            <a:ext cx="3922775" cy="274320"/>
+          </a:xfrm>
+          <a:prstGeom prst="roundRect">
+            <a:avLst>
+              <a:gd name="adj" fmla="val 20000"/>
+            </a:avLst>
+          </a:prstGeom>
+          <a:solidFill>
+            <a:srgbClr val="0F2540"/>
+          </a:solidFill>
+          <a:ln>
+            <a:noFill/>
+          </a:ln>
+          <a:effectLst/>
+        </p:spPr>
+        <p:style>
+          <a:lnRef idx="1">
+            <a:schemeClr val="accent1"/>
+          </a:lnRef>
+          <a:fillRef idx="3">
+            <a:schemeClr val="accent1"/>
+          </a:fillRef>
+          <a:effectRef idx="2">
+            <a:schemeClr val="accent1"/>
+          </a:effectRef>
+          <a:fontRef idx="minor">
+            <a:schemeClr val="lt1"/>
+          </a:fontRef>
+        </p:style>
+        <p:txBody>
+          <a:bodyPr rtlCol="0" anchor="ctr" wrap="square"/>
+          <a:lstStyle/>
+          <a:p>
+            <a:pPr algn="ctr"/>
+          </a:p>
+        </p:txBody>
+      </p:sp>
+      <p:sp>
+        <p:nvSpPr>
+          <p:cNvPr id="36" name="TextBox 35"/>
+          <p:cNvSpPr txBox="1"/>
+          <p:nvPr/>
+        </p:nvSpPr>
+        <p:spPr>
+          <a:xfrm>
+            <a:off x="7936992" y="1323404"/>
+            <a:ext cx="3502151" cy="210375"/>
+          </a:xfrm>
+          <a:prstGeom prst="rect">
+            <a:avLst/>
+          </a:prstGeom>
+          <a:noFill/>
+        </p:spPr>
+        <p:txBody>
+          <a:bodyPr wrap="square" anchor="t" lIns="0" rIns="0" tIns="0" bIns="0">
+            <a:spAutoFit/>
+          </a:bodyPr>
+          <a:lstStyle/>
+          <a:p>
+            <a:pPr algn="l">
+              <a:lnSpc>
+                <a:spcPct val="100000"/>
+              </a:lnSpc>
+            </a:pPr>
+            <a:r>
+              <a:rPr sz="1250" b="1" i="0" spc="60">
+                <a:solidFill>
+                  <a:srgbClr val="FFFFFF"/>
+                </a:solidFill>
+                <a:latin typeface="Calibri"/>
+              </a:rPr>
+              <a:t>What We'll Measure</a:t>
+            </a:r>
+          </a:p>
+        </p:txBody>
+      </p:sp>
+      <p:sp>
+        <p:nvSpPr>
+          <p:cNvPr id="37" name="TextBox 36"/>
+          <p:cNvSpPr txBox="1"/>
+          <p:nvPr/>
+        </p:nvSpPr>
+        <p:spPr>
+          <a:xfrm>
+            <a:off x="8174736" y="1648048"/>
+            <a:ext cx="3374135" cy="230045"/>
+          </a:xfrm>
+          <a:prstGeom prst="rect">
+            <a:avLst/>
+          </a:prstGeom>
+          <a:noFill/>
+        </p:spPr>
+        <p:txBody>
+          <a:bodyPr wrap="square" anchor="t" lIns="0" rIns="0" tIns="0" bIns="0">
+            <a:spAutoFit/>
+          </a:bodyPr>
+          <a:lstStyle/>
+          <a:p>
+            <a:pPr algn="l">
+              <a:lnSpc>
+                <a:spcPct val="106000"/>
+              </a:lnSpc>
+            </a:pPr>
+            <a:r>
+              <a:rPr sz="1300" b="0" i="0">
+                <a:solidFill>
+                  <a:srgbClr val="1A2733"/>
+                </a:solidFill>
+                <a:latin typeface="Calibri"/>
+              </a:rPr>
+              <a:t>Draft-to-first-review time.</a:t>
+            </a:r>
+          </a:p>
+        </p:txBody>
+      </p:sp>
+      <p:sp>
+        <p:nvSpPr>
+          <p:cNvPr id="38" name="TextBox 37"/>
+          <p:cNvSpPr txBox="1"/>
+          <p:nvPr/>
+        </p:nvSpPr>
+        <p:spPr>
+          <a:xfrm>
+            <a:off x="8174736" y="1942101"/>
+            <a:ext cx="3374135" cy="230045"/>
+          </a:xfrm>
+          <a:prstGeom prst="rect">
+            <a:avLst/>
+          </a:prstGeom>
+          <a:noFill/>
+        </p:spPr>
+        <p:txBody>
+          <a:bodyPr wrap="square" anchor="t" lIns="0" rIns="0" tIns="0" bIns="0">
+            <a:spAutoFit/>
+          </a:bodyPr>
+          <a:lstStyle/>
+          <a:p>
+            <a:pPr algn="l">
+              <a:lnSpc>
+                <a:spcPct val="106000"/>
+              </a:lnSpc>
+            </a:pPr>
+            <a:r>
+              <a:rPr sz="1300" b="0" i="0">
+                <a:solidFill>
+                  <a:srgbClr val="1A2733"/>
+                </a:solidFill>
+                <a:latin typeface="Calibri"/>
+              </a:rPr>
+              <a:t>Rubric completeness rate.</a:t>
+            </a:r>
+          </a:p>
+        </p:txBody>
+      </p:sp>
+      <p:sp>
+        <p:nvSpPr>
+          <p:cNvPr id="39" name="TextBox 38"/>
+          <p:cNvSpPr txBox="1"/>
+          <p:nvPr/>
+        </p:nvSpPr>
+        <p:spPr>
+          <a:xfrm>
+            <a:off x="8174736" y="2236155"/>
+            <a:ext cx="3374135" cy="230045"/>
+          </a:xfrm>
+          <a:prstGeom prst="rect">
+            <a:avLst/>
+          </a:prstGeom>
+          <a:noFill/>
+        </p:spPr>
+        <p:txBody>
+          <a:bodyPr wrap="square" anchor="t" lIns="0" rIns="0" tIns="0" bIns="0">
+            <a:spAutoFit/>
+          </a:bodyPr>
+          <a:lstStyle/>
+          <a:p>
+            <a:pPr algn="l">
+              <a:lnSpc>
+                <a:spcPct val="106000"/>
+              </a:lnSpc>
+            </a:pPr>
+            <a:r>
+              <a:rPr sz="1300" b="0" i="0">
+                <a:solidFill>
+                  <a:srgbClr val="1A2733"/>
+                </a:solidFill>
+                <a:latin typeface="Calibri"/>
+              </a:rPr>
+              <a:t>Predicted versus actual evaluator score.</a:t>
+            </a:r>
+          </a:p>
+        </p:txBody>
+      </p:sp>
+      <p:sp>
+        <p:nvSpPr>
+          <p:cNvPr id="40" name="TextBox 39"/>
+          <p:cNvSpPr txBox="1"/>
+          <p:nvPr/>
+        </p:nvSpPr>
+        <p:spPr>
+          <a:xfrm>
+            <a:off x="8174736" y="2530208"/>
+            <a:ext cx="3374135" cy="230045"/>
+          </a:xfrm>
+          <a:prstGeom prst="rect">
+            <a:avLst/>
+          </a:prstGeom>
+          <a:noFill/>
+        </p:spPr>
+        <p:txBody>
+          <a:bodyPr wrap="square" anchor="t" lIns="0" rIns="0" tIns="0" bIns="0">
+            <a:spAutoFit/>
+          </a:bodyPr>
+          <a:lstStyle/>
+          <a:p>
+            <a:pPr algn="l">
+              <a:lnSpc>
+                <a:spcPct val="106000"/>
+              </a:lnSpc>
+            </a:pPr>
+            <a:r>
+              <a:rPr sz="1300" b="0" i="0">
+                <a:solidFill>
+                  <a:srgbClr val="1A2733"/>
+                </a:solidFill>
+                <a:latin typeface="Calibri"/>
+              </a:rPr>
+              <a:t>Win rate where it was used.</a:t>
+            </a:r>
+          </a:p>
+        </p:txBody>
+      </p:sp>
+      <p:sp>
+        <p:nvSpPr>
+          <p:cNvPr id="41" name="TextBox 40"/>
+          <p:cNvSpPr txBox="1"/>
+          <p:nvPr/>
+        </p:nvSpPr>
+        <p:spPr>
+          <a:xfrm>
+            <a:off x="8595360" y="2824261"/>
+            <a:ext cx="2953511" cy="425513"/>
+          </a:xfrm>
+          <a:prstGeom prst="rect">
+            <a:avLst/>
+          </a:prstGeom>
+          <a:noFill/>
+        </p:spPr>
+        <p:txBody>
+          <a:bodyPr wrap="square" anchor="t" lIns="0" rIns="0" tIns="0" bIns="0">
+            <a:spAutoFit/>
+          </a:bodyPr>
+          <a:lstStyle/>
+          <a:p>
+            <a:pPr algn="l">
+              <a:lnSpc>
+                <a:spcPct val="106000"/>
+              </a:lnSpc>
+            </a:pPr>
+            <a:r>
+              <a:rPr sz="1250" b="0" i="0">
+                <a:solidFill>
+                  <a:srgbClr val="33414F"/>
+                </a:solidFill>
+                <a:latin typeface="Calibri"/>
+              </a:rPr>
+              <a:t>Baselines set in the pilot. Nothing claimed yet.</a:t>
+            </a:r>
+          </a:p>
+        </p:txBody>
+      </p:sp>
+      <p:sp>
+        <p:nvSpPr>
+          <p:cNvPr id="42" name="Rectangle 41"/>
+          <p:cNvSpPr/>
+          <p:nvPr/>
+        </p:nvSpPr>
+        <p:spPr>
+          <a:xfrm>
+            <a:off x="8412480" y="2891777"/>
+            <a:ext cx="68580" cy="68580"/>
           </a:xfrm>
           <a:prstGeom prst="rect">
             <a:avLst/>
@@ -7042,14 +9255,288 @@
       </p:sp>
       <p:sp>
         <p:nvSpPr>
-          <p:cNvPr id="17" name="TextBox 16"/>
+          <p:cNvPr id="43" name="Rectangle 42"/>
+          <p:cNvSpPr/>
+          <p:nvPr/>
+        </p:nvSpPr>
+        <p:spPr>
+          <a:xfrm>
+            <a:off x="7948879" y="1602328"/>
+            <a:ext cx="12801" cy="1033758"/>
+          </a:xfrm>
+          <a:prstGeom prst="rect">
+            <a:avLst/>
+          </a:prstGeom>
+          <a:solidFill>
+            <a:srgbClr val="D3DAE2"/>
+          </a:solidFill>
+          <a:ln>
+            <a:noFill/>
+          </a:ln>
+          <a:effectLst/>
+        </p:spPr>
+        <p:style>
+          <a:lnRef idx="1">
+            <a:schemeClr val="accent1"/>
+          </a:lnRef>
+          <a:fillRef idx="3">
+            <a:schemeClr val="accent1"/>
+          </a:fillRef>
+          <a:effectRef idx="2">
+            <a:schemeClr val="accent1"/>
+          </a:effectRef>
+          <a:fontRef idx="minor">
+            <a:schemeClr val="lt1"/>
+          </a:fontRef>
+        </p:style>
+        <p:txBody>
+          <a:bodyPr rtlCol="0" anchor="ctr" wrap="square"/>
+          <a:lstStyle/>
+          <a:p>
+            <a:pPr algn="ctr"/>
+          </a:p>
+        </p:txBody>
+      </p:sp>
+      <p:sp>
+        <p:nvSpPr>
+          <p:cNvPr id="44" name="Oval 43"/>
+          <p:cNvSpPr/>
+          <p:nvPr/>
+        </p:nvSpPr>
+        <p:spPr>
+          <a:xfrm>
+            <a:off x="7893557" y="1692205"/>
+            <a:ext cx="123444" cy="123444"/>
+          </a:xfrm>
+          <a:prstGeom prst="ellipse">
+            <a:avLst/>
+          </a:prstGeom>
+          <a:solidFill>
+            <a:srgbClr val="FFFFFF"/>
+          </a:solidFill>
+          <a:ln w="19050">
+            <a:solidFill>
+              <a:srgbClr val="C0642A"/>
+            </a:solidFill>
+          </a:ln>
+          <a:effectLst/>
+        </p:spPr>
+        <p:style>
+          <a:lnRef idx="1">
+            <a:schemeClr val="accent1"/>
+          </a:lnRef>
+          <a:fillRef idx="3">
+            <a:schemeClr val="accent1"/>
+          </a:fillRef>
+          <a:effectRef idx="2">
+            <a:schemeClr val="accent1"/>
+          </a:effectRef>
+          <a:fontRef idx="minor">
+            <a:schemeClr val="lt1"/>
+          </a:fontRef>
+        </p:style>
+        <p:txBody>
+          <a:bodyPr rtlCol="0" anchor="ctr" wrap="square"/>
+          <a:lstStyle/>
+          <a:p>
+            <a:pPr algn="ctr"/>
+          </a:p>
+        </p:txBody>
+      </p:sp>
+      <p:sp>
+        <p:nvSpPr>
+          <p:cNvPr id="45" name="Oval 44"/>
+          <p:cNvSpPr/>
+          <p:nvPr/>
+        </p:nvSpPr>
+        <p:spPr>
+          <a:xfrm>
+            <a:off x="7893557" y="1986258"/>
+            <a:ext cx="123444" cy="123444"/>
+          </a:xfrm>
+          <a:prstGeom prst="ellipse">
+            <a:avLst/>
+          </a:prstGeom>
+          <a:solidFill>
+            <a:srgbClr val="FFFFFF"/>
+          </a:solidFill>
+          <a:ln w="19050">
+            <a:solidFill>
+              <a:srgbClr val="C0642A"/>
+            </a:solidFill>
+          </a:ln>
+          <a:effectLst/>
+        </p:spPr>
+        <p:style>
+          <a:lnRef idx="1">
+            <a:schemeClr val="accent1"/>
+          </a:lnRef>
+          <a:fillRef idx="3">
+            <a:schemeClr val="accent1"/>
+          </a:fillRef>
+          <a:effectRef idx="2">
+            <a:schemeClr val="accent1"/>
+          </a:effectRef>
+          <a:fontRef idx="minor">
+            <a:schemeClr val="lt1"/>
+          </a:fontRef>
+        </p:style>
+        <p:txBody>
+          <a:bodyPr rtlCol="0" anchor="ctr" wrap="square"/>
+          <a:lstStyle/>
+          <a:p>
+            <a:pPr algn="ctr"/>
+          </a:p>
+        </p:txBody>
+      </p:sp>
+      <p:sp>
+        <p:nvSpPr>
+          <p:cNvPr id="46" name="Oval 45"/>
+          <p:cNvSpPr/>
+          <p:nvPr/>
+        </p:nvSpPr>
+        <p:spPr>
+          <a:xfrm>
+            <a:off x="7893557" y="2280311"/>
+            <a:ext cx="123444" cy="123444"/>
+          </a:xfrm>
+          <a:prstGeom prst="ellipse">
+            <a:avLst/>
+          </a:prstGeom>
+          <a:solidFill>
+            <a:srgbClr val="FFFFFF"/>
+          </a:solidFill>
+          <a:ln w="19050">
+            <a:solidFill>
+              <a:srgbClr val="C0642A"/>
+            </a:solidFill>
+          </a:ln>
+          <a:effectLst/>
+        </p:spPr>
+        <p:style>
+          <a:lnRef idx="1">
+            <a:schemeClr val="accent1"/>
+          </a:lnRef>
+          <a:fillRef idx="3">
+            <a:schemeClr val="accent1"/>
+          </a:fillRef>
+          <a:effectRef idx="2">
+            <a:schemeClr val="accent1"/>
+          </a:effectRef>
+          <a:fontRef idx="minor">
+            <a:schemeClr val="lt1"/>
+          </a:fontRef>
+        </p:style>
+        <p:txBody>
+          <a:bodyPr rtlCol="0" anchor="ctr" wrap="square"/>
+          <a:lstStyle/>
+          <a:p>
+            <a:pPr algn="ctr"/>
+          </a:p>
+        </p:txBody>
+      </p:sp>
+      <p:sp>
+        <p:nvSpPr>
+          <p:cNvPr id="47" name="Oval 46"/>
+          <p:cNvSpPr/>
+          <p:nvPr/>
+        </p:nvSpPr>
+        <p:spPr>
+          <a:xfrm>
+            <a:off x="7893557" y="2574364"/>
+            <a:ext cx="123444" cy="123444"/>
+          </a:xfrm>
+          <a:prstGeom prst="ellipse">
+            <a:avLst/>
+          </a:prstGeom>
+          <a:solidFill>
+            <a:srgbClr val="FFFFFF"/>
+          </a:solidFill>
+          <a:ln w="19050">
+            <a:solidFill>
+              <a:srgbClr val="C0642A"/>
+            </a:solidFill>
+          </a:ln>
+          <a:effectLst/>
+        </p:spPr>
+        <p:style>
+          <a:lnRef idx="1">
+            <a:schemeClr val="accent1"/>
+          </a:lnRef>
+          <a:fillRef idx="3">
+            <a:schemeClr val="accent1"/>
+          </a:fillRef>
+          <a:effectRef idx="2">
+            <a:schemeClr val="accent1"/>
+          </a:effectRef>
+          <a:fontRef idx="minor">
+            <a:schemeClr val="lt1"/>
+          </a:fontRef>
+        </p:style>
+        <p:txBody>
+          <a:bodyPr rtlCol="0" anchor="ctr" wrap="square"/>
+          <a:lstStyle/>
+          <a:p>
+            <a:pPr algn="ctr"/>
+          </a:p>
+        </p:txBody>
+      </p:sp>
+      <p:sp>
+        <p:nvSpPr>
+          <p:cNvPr id="48" name="Rounded Rectangle 47"/>
+          <p:cNvSpPr/>
+          <p:nvPr/>
+        </p:nvSpPr>
+        <p:spPr>
+          <a:xfrm>
+            <a:off x="7699248" y="3432655"/>
+            <a:ext cx="3922775" cy="274320"/>
+          </a:xfrm>
+          <a:prstGeom prst="roundRect">
+            <a:avLst>
+              <a:gd name="adj" fmla="val 20000"/>
+            </a:avLst>
+          </a:prstGeom>
+          <a:solidFill>
+            <a:srgbClr val="0F2540"/>
+          </a:solidFill>
+          <a:ln>
+            <a:noFill/>
+          </a:ln>
+          <a:effectLst/>
+        </p:spPr>
+        <p:style>
+          <a:lnRef idx="1">
+            <a:schemeClr val="accent1"/>
+          </a:lnRef>
+          <a:fillRef idx="3">
+            <a:schemeClr val="accent1"/>
+          </a:fillRef>
+          <a:effectRef idx="2">
+            <a:schemeClr val="accent1"/>
+          </a:effectRef>
+          <a:fontRef idx="minor">
+            <a:schemeClr val="lt1"/>
+          </a:fontRef>
+        </p:style>
+        <p:txBody>
+          <a:bodyPr rtlCol="0" anchor="ctr" wrap="square"/>
+          <a:lstStyle/>
+          <a:p>
+            <a:pPr algn="ctr"/>
+          </a:p>
+        </p:txBody>
+      </p:sp>
+      <p:sp>
+        <p:nvSpPr>
+          <p:cNvPr id="49" name="TextBox 48"/>
           <p:cNvSpPr txBox="1"/>
           <p:nvPr/>
         </p:nvSpPr>
         <p:spPr>
           <a:xfrm>
-            <a:off x="859536" y="5522976"/>
-            <a:ext cx="10469880" cy="731520"/>
+            <a:off x="7936992" y="3473771"/>
+            <a:ext cx="3502151" cy="210375"/>
           </a:xfrm>
           <a:prstGeom prst="rect">
             <a:avLst/>
@@ -7063,35 +9550,233 @@
           <a:lstStyle/>
           <a:p>
             <a:pPr algn="l">
-              <a:spcAft>
-                <a:spcPts val="600"/>
-              </a:spcAft>
+              <a:lnSpc>
+                <a:spcPct val="100000"/>
+              </a:lnSpc>
             </a:pPr>
             <a:r>
-              <a:rPr sz="1200" b="1" i="0" spc="100">
-                <a:solidFill>
-                  <a:srgbClr val="C0642A"/>
-                </a:solidFill>
-                <a:latin typeface="Calibri"/>
-              </a:rPr>
-              <a:t>ABERDEEN LABS FIT  ·  REUSABILITY</a:t>
-            </a:r>
-          </a:p>
+              <a:rPr sz="1250" b="1" i="0" spc="60">
+                <a:solidFill>
+                  <a:srgbClr val="FFFFFF"/>
+                </a:solidFill>
+                <a:latin typeface="Calibri"/>
+              </a:rPr>
+              <a:t>Aberdeen Labs Fit</a:t>
+            </a:r>
+          </a:p>
+        </p:txBody>
+      </p:sp>
+      <p:sp>
+        <p:nvSpPr>
+          <p:cNvPr id="50" name="TextBox 49"/>
+          <p:cNvSpPr txBox="1"/>
+          <p:nvPr/>
+        </p:nvSpPr>
+        <p:spPr>
+          <a:xfrm>
+            <a:off x="8174736" y="3798415"/>
+            <a:ext cx="3374135" cy="653559"/>
+          </a:xfrm>
+          <a:prstGeom prst="rect">
+            <a:avLst/>
+          </a:prstGeom>
+          <a:noFill/>
+        </p:spPr>
+        <p:txBody>
+          <a:bodyPr wrap="square" anchor="t" lIns="0" rIns="0" tIns="0" bIns="0">
+            <a:spAutoFit/>
+          </a:bodyPr>
+          <a:lstStyle/>
           <a:p>
             <a:pPr algn="l">
               <a:lnSpc>
-                <a:spcPct val="108000"/>
+                <a:spcPct val="106000"/>
               </a:lnSpc>
             </a:pPr>
             <a:r>
               <a:rPr sz="1300" b="0" i="0">
                 <a:solidFill>
-                  <a:srgbClr val="D9E1EA"/>
-                </a:solidFill>
-                <a:latin typeface="Calibri"/>
-              </a:rPr>
-              <a:t>Ingest-and-structure, score-against-a-rubric and write-from-our-real-values lift straight into pitch decks, QBRs and any pursuit artifact. The buy-side rubric library behind the scoring is an Aberdeen asset no competitor can copy.</a:t>
-            </a:r>
+                  <a:srgbClr val="1A2733"/>
+                </a:solidFill>
+                <a:latin typeface="Calibri"/>
+              </a:rPr>
+              <a:t>Ingest-and-structure, score-against-a-rubric and write-from-our-real-values lift straight into pitch decks, QBRs and any pursuit artifact.</a:t>
+            </a:r>
+          </a:p>
+        </p:txBody>
+      </p:sp>
+      <p:sp>
+        <p:nvSpPr>
+          <p:cNvPr id="51" name="TextBox 50"/>
+          <p:cNvSpPr txBox="1"/>
+          <p:nvPr/>
+        </p:nvSpPr>
+        <p:spPr>
+          <a:xfrm>
+            <a:off x="8174736" y="4515982"/>
+            <a:ext cx="3374135" cy="441802"/>
+          </a:xfrm>
+          <a:prstGeom prst="rect">
+            <a:avLst/>
+          </a:prstGeom>
+          <a:noFill/>
+        </p:spPr>
+        <p:txBody>
+          <a:bodyPr wrap="square" anchor="t" lIns="0" rIns="0" tIns="0" bIns="0">
+            <a:spAutoFit/>
+          </a:bodyPr>
+          <a:lstStyle/>
+          <a:p>
+            <a:pPr algn="l">
+              <a:lnSpc>
+                <a:spcPct val="106000"/>
+              </a:lnSpc>
+            </a:pPr>
+            <a:r>
+              <a:rPr sz="1300" b="0" i="0">
+                <a:solidFill>
+                  <a:srgbClr val="1A2733"/>
+                </a:solidFill>
+                <a:latin typeface="Calibri"/>
+              </a:rPr>
+              <a:t>The buy-side rubric library behind the scoring is an Aberdeen asset no competitor can copy.</a:t>
+            </a:r>
+          </a:p>
+        </p:txBody>
+      </p:sp>
+      <p:sp>
+        <p:nvSpPr>
+          <p:cNvPr id="52" name="Rectangle 51"/>
+          <p:cNvSpPr/>
+          <p:nvPr/>
+        </p:nvSpPr>
+        <p:spPr>
+          <a:xfrm>
+            <a:off x="7948879" y="3752695"/>
+            <a:ext cx="12801" cy="869166"/>
+          </a:xfrm>
+          <a:prstGeom prst="rect">
+            <a:avLst/>
+          </a:prstGeom>
+          <a:solidFill>
+            <a:srgbClr val="D3DAE2"/>
+          </a:solidFill>
+          <a:ln>
+            <a:noFill/>
+          </a:ln>
+          <a:effectLst/>
+        </p:spPr>
+        <p:style>
+          <a:lnRef idx="1">
+            <a:schemeClr val="accent1"/>
+          </a:lnRef>
+          <a:fillRef idx="3">
+            <a:schemeClr val="accent1"/>
+          </a:fillRef>
+          <a:effectRef idx="2">
+            <a:schemeClr val="accent1"/>
+          </a:effectRef>
+          <a:fontRef idx="minor">
+            <a:schemeClr val="lt1"/>
+          </a:fontRef>
+        </p:style>
+        <p:txBody>
+          <a:bodyPr rtlCol="0" anchor="ctr" wrap="square"/>
+          <a:lstStyle/>
+          <a:p>
+            <a:pPr algn="ctr"/>
+          </a:p>
+        </p:txBody>
+      </p:sp>
+      <p:sp>
+        <p:nvSpPr>
+          <p:cNvPr id="53" name="Oval 52"/>
+          <p:cNvSpPr/>
+          <p:nvPr/>
+        </p:nvSpPr>
+        <p:spPr>
+          <a:xfrm>
+            <a:off x="7893557" y="3842571"/>
+            <a:ext cx="123444" cy="123444"/>
+          </a:xfrm>
+          <a:prstGeom prst="ellipse">
+            <a:avLst/>
+          </a:prstGeom>
+          <a:solidFill>
+            <a:srgbClr val="FFFFFF"/>
+          </a:solidFill>
+          <a:ln w="19050">
+            <a:solidFill>
+              <a:srgbClr val="C0642A"/>
+            </a:solidFill>
+          </a:ln>
+          <a:effectLst/>
+        </p:spPr>
+        <p:style>
+          <a:lnRef idx="1">
+            <a:schemeClr val="accent1"/>
+          </a:lnRef>
+          <a:fillRef idx="3">
+            <a:schemeClr val="accent1"/>
+          </a:fillRef>
+          <a:effectRef idx="2">
+            <a:schemeClr val="accent1"/>
+          </a:effectRef>
+          <a:fontRef idx="minor">
+            <a:schemeClr val="lt1"/>
+          </a:fontRef>
+        </p:style>
+        <p:txBody>
+          <a:bodyPr rtlCol="0" anchor="ctr" wrap="square"/>
+          <a:lstStyle/>
+          <a:p>
+            <a:pPr algn="ctr"/>
+          </a:p>
+        </p:txBody>
+      </p:sp>
+      <p:sp>
+        <p:nvSpPr>
+          <p:cNvPr id="54" name="Oval 53"/>
+          <p:cNvSpPr/>
+          <p:nvPr/>
+        </p:nvSpPr>
+        <p:spPr>
+          <a:xfrm>
+            <a:off x="7893557" y="4560139"/>
+            <a:ext cx="123444" cy="123444"/>
+          </a:xfrm>
+          <a:prstGeom prst="ellipse">
+            <a:avLst/>
+          </a:prstGeom>
+          <a:solidFill>
+            <a:srgbClr val="FFFFFF"/>
+          </a:solidFill>
+          <a:ln w="19050">
+            <a:solidFill>
+              <a:srgbClr val="C0642A"/>
+            </a:solidFill>
+          </a:ln>
+          <a:effectLst/>
+        </p:spPr>
+        <p:style>
+          <a:lnRef idx="1">
+            <a:schemeClr val="accent1"/>
+          </a:lnRef>
+          <a:fillRef idx="3">
+            <a:schemeClr val="accent1"/>
+          </a:fillRef>
+          <a:effectRef idx="2">
+            <a:schemeClr val="accent1"/>
+          </a:effectRef>
+          <a:fontRef idx="minor">
+            <a:schemeClr val="lt1"/>
+          </a:fontRef>
+        </p:style>
+        <p:txBody>
+          <a:bodyPr rtlCol="0" anchor="ctr" wrap="square"/>
+          <a:lstStyle/>
+          <a:p>
+            <a:pPr algn="ctr"/>
           </a:p>
         </p:txBody>
       </p:sp>

--- a/deliverables/hack-team-05-pursuit-copilot-deck.pptx
+++ b/deliverables/hack-team-05-pursuit-copilot-deck.pptx
@@ -745,7 +745,7 @@
           <a:lstStyle/>
           <a:p>
             <a:r>
-              <a:t>The 80% is CJ's target for the pilot to test, not an achieved result. Same for the 5-10 people / 1-2 weeks / 40+ hours figures on slide 1 — they are his illustration of a typical pursuit. Do not present either as measured.</a:t>
+              <a:t>The 80% is CJ's target for the pilot to test, not an achieved result. Same for the 5-10 people / 1-2 weeks / 40+ hours figures on slide 1 — they are CJ's illustration of a typical pursuit. Do not present either as measured.</a:t>
             </a:r>
           </a:p>
           <a:p/>

--- a/deliverables/hack-team-05-pursuit-copilot-deck.pptx
+++ b/deliverables/hack-team-05-pursuit-copilot-deck.pptx
@@ -3850,8 +3850,8 @@
         </p:nvSpPr>
         <p:spPr>
           <a:xfrm>
-            <a:off x="566928" y="786384"/>
-            <a:ext cx="7863840" cy="640080"/>
+            <a:off x="566928" y="768096"/>
+            <a:ext cx="7863840" cy="603504"/>
           </a:xfrm>
           <a:prstGeom prst="rect">
             <a:avLst/>
@@ -3876,7 +3876,7 @@
                 </a:solidFill>
                 <a:latin typeface="Calibri"/>
               </a:rPr>
-              <a:t>RFP Pursuit Copilot</a:t>
+              <a:t>Pursuit Copilot</a:t>
             </a:r>
           </a:p>
         </p:txBody>
@@ -3889,8 +3889,47 @@
         </p:nvSpPr>
         <p:spPr>
           <a:xfrm>
-            <a:off x="566928" y="1481328"/>
-            <a:ext cx="8503920" cy="585216"/>
+            <a:off x="566928" y="1371600"/>
+            <a:ext cx="8503920" cy="274320"/>
+          </a:xfrm>
+          <a:prstGeom prst="rect">
+            <a:avLst/>
+          </a:prstGeom>
+          <a:noFill/>
+        </p:spPr>
+        <p:txBody>
+          <a:bodyPr wrap="square" anchor="t" lIns="0" rIns="0" tIns="0" bIns="0">
+            <a:spAutoFit/>
+          </a:bodyPr>
+          <a:lstStyle/>
+          <a:p>
+            <a:pPr algn="l">
+              <a:lnSpc>
+                <a:spcPct val="100000"/>
+              </a:lnSpc>
+            </a:pPr>
+            <a:r>
+              <a:rPr sz="1700" b="1" i="0">
+                <a:solidFill>
+                  <a:srgbClr val="C0642A"/>
+                </a:solidFill>
+                <a:latin typeface="Calibri"/>
+              </a:rPr>
+              <a:t>Do the thinking that matters. Let AI handle the grind.</a:t>
+            </a:r>
+          </a:p>
+        </p:txBody>
+      </p:sp>
+      <p:sp>
+        <p:nvSpPr>
+          <p:cNvPr id="6" name="TextBox 5"/>
+          <p:cNvSpPr txBox="1"/>
+          <p:nvPr/>
+        </p:nvSpPr>
+        <p:spPr>
+          <a:xfrm>
+            <a:off x="566928" y="1700784"/>
+            <a:ext cx="8503920" cy="530352"/>
           </a:xfrm>
           <a:prstGeom prst="rect">
             <a:avLst/>
@@ -3922,13 +3961,13 @@
       </p:sp>
       <p:sp>
         <p:nvSpPr>
-          <p:cNvPr id="6" name="Rectangle 5"/>
+          <p:cNvPr id="7" name="Rectangle 6"/>
           <p:cNvSpPr/>
           <p:nvPr/>
         </p:nvSpPr>
         <p:spPr>
           <a:xfrm>
-            <a:off x="566928" y="2139696"/>
+            <a:off x="566928" y="2267712"/>
             <a:ext cx="1371600" cy="41148"/>
           </a:xfrm>
           <a:prstGeom prst="rect">
@@ -3966,13 +4005,13 @@
       </p:sp>
       <p:sp>
         <p:nvSpPr>
-          <p:cNvPr id="7" name="TextBox 6"/>
+          <p:cNvPr id="8" name="TextBox 7"/>
           <p:cNvSpPr txBox="1"/>
           <p:nvPr/>
         </p:nvSpPr>
         <p:spPr>
           <a:xfrm>
-            <a:off x="566928" y="2395728"/>
+            <a:off x="566928" y="2468880"/>
             <a:ext cx="10424160" cy="457200"/>
           </a:xfrm>
           <a:prstGeom prst="rect">
@@ -4005,13 +4044,13 @@
       </p:sp>
       <p:sp>
         <p:nvSpPr>
-          <p:cNvPr id="8" name="TextBox 7"/>
+          <p:cNvPr id="9" name="TextBox 8"/>
           <p:cNvSpPr txBox="1"/>
           <p:nvPr/>
         </p:nvSpPr>
         <p:spPr>
           <a:xfrm>
-            <a:off x="566928" y="2889504"/>
+            <a:off x="566928" y="2944368"/>
             <a:ext cx="10424160" cy="530352"/>
           </a:xfrm>
           <a:prstGeom prst="rect">
@@ -4044,7 +4083,7 @@
       </p:sp>
       <p:sp>
         <p:nvSpPr>
-          <p:cNvPr id="9" name="Rectangle 8"/>
+          <p:cNvPr id="10" name="Rectangle 9"/>
           <p:cNvSpPr/>
           <p:nvPr/>
         </p:nvSpPr>
@@ -4090,7 +4129,7 @@
       </p:sp>
       <p:sp>
         <p:nvSpPr>
-          <p:cNvPr id="10" name="TextBox 9"/>
+          <p:cNvPr id="11" name="TextBox 10"/>
           <p:cNvSpPr txBox="1"/>
           <p:nvPr/>
         </p:nvSpPr>
@@ -4148,7 +4187,7 @@
       </p:sp>
       <p:sp>
         <p:nvSpPr>
-          <p:cNvPr id="11" name="Rectangle 10"/>
+          <p:cNvPr id="12" name="Rectangle 11"/>
           <p:cNvSpPr/>
           <p:nvPr/>
         </p:nvSpPr>
@@ -4194,7 +4233,7 @@
       </p:sp>
       <p:sp>
         <p:nvSpPr>
-          <p:cNvPr id="12" name="TextBox 11"/>
+          <p:cNvPr id="13" name="TextBox 12"/>
           <p:cNvSpPr txBox="1"/>
           <p:nvPr/>
         </p:nvSpPr>
@@ -4252,7 +4291,7 @@
       </p:sp>
       <p:sp>
         <p:nvSpPr>
-          <p:cNvPr id="13" name="Rectangle 12"/>
+          <p:cNvPr id="14" name="Rectangle 13"/>
           <p:cNvSpPr/>
           <p:nvPr/>
         </p:nvSpPr>
@@ -4298,7 +4337,7 @@
       </p:sp>
       <p:sp>
         <p:nvSpPr>
-          <p:cNvPr id="14" name="TextBox 13"/>
+          <p:cNvPr id="15" name="TextBox 14"/>
           <p:cNvSpPr txBox="1"/>
           <p:nvPr/>
         </p:nvSpPr>
@@ -4356,7 +4395,7 @@
       </p:sp>
       <p:sp>
         <p:nvSpPr>
-          <p:cNvPr id="15" name="Rectangle 14"/>
+          <p:cNvPr id="16" name="Rectangle 15"/>
           <p:cNvSpPr/>
           <p:nvPr/>
         </p:nvSpPr>
@@ -4400,7 +4439,7 @@
       </p:sp>
       <p:sp>
         <p:nvSpPr>
-          <p:cNvPr id="16" name="Rectangle 15"/>
+          <p:cNvPr id="17" name="Rectangle 16"/>
           <p:cNvSpPr/>
           <p:nvPr/>
         </p:nvSpPr>
@@ -4444,7 +4483,7 @@
       </p:sp>
       <p:sp>
         <p:nvSpPr>
-          <p:cNvPr id="17" name="TextBox 16"/>
+          <p:cNvPr id="18" name="TextBox 17"/>
           <p:cNvSpPr txBox="1"/>
           <p:nvPr/>
         </p:nvSpPr>
@@ -4502,7 +4541,7 @@
       </p:sp>
       <p:sp>
         <p:nvSpPr>
-          <p:cNvPr id="18" name="TextBox 17"/>
+          <p:cNvPr id="19" name="TextBox 18"/>
           <p:cNvSpPr txBox="1"/>
           <p:nvPr/>
         </p:nvSpPr>
@@ -4627,7 +4666,7 @@
                 </a:solidFill>
                 <a:latin typeface="Calibri"/>
               </a:rPr>
-              <a:t>THE SOLUTION  ·  RFP PURSUIT COPILOT</a:t>
+              <a:t>THE SOLUTION  ·  PURSUIT COPILOT</a:t>
             </a:r>
           </a:p>
         </p:txBody>
@@ -6529,28 +6568,49 @@
           </a:p>
         </p:txBody>
       </p:sp>
-      <p:sp>
-        <p:nvSpPr>
-          <p:cNvPr id="25" name="Rectangle 24"/>
+      <p:pic>
+        <p:nvPicPr>
+          <p:cNvPr id="25" name="Picture 24" descr="ui-workspace.png"/>
+          <p:cNvPicPr>
+            <a:picLocks noChangeAspect="1"/>
+          </p:cNvPicPr>
+          <p:nvPr/>
+        </p:nvPicPr>
+        <p:blipFill>
+          <a:blip r:embed="rId2"/>
+          <a:stretch>
+            <a:fillRect/>
+          </a:stretch>
+        </p:blipFill>
+        <p:spPr>
+          <a:xfrm>
+            <a:off x="7443216" y="1773936"/>
+            <a:ext cx="4178808" cy="3365840"/>
+          </a:xfrm>
+          <a:prstGeom prst="rect">
+            <a:avLst/>
+          </a:prstGeom>
+        </p:spPr>
+      </p:pic>
+      <p:sp>
+        <p:nvSpPr>
+          <p:cNvPr id="26" name="Rectangle 25"/>
           <p:cNvSpPr/>
           <p:nvPr/>
         </p:nvSpPr>
         <p:spPr>
           <a:xfrm>
             <a:off x="7443216" y="1773936"/>
-            <a:ext cx="4178808" cy="4059936"/>
-          </a:xfrm>
-          <a:prstGeom prst="rect">
-            <a:avLst/>
-          </a:prstGeom>
-          <a:solidFill>
-            <a:srgbClr val="F1F4F7"/>
-          </a:solidFill>
-          <a:ln w="15875">
+            <a:ext cx="4178808" cy="3365840"/>
+          </a:xfrm>
+          <a:prstGeom prst="rect">
+            <a:avLst/>
+          </a:prstGeom>
+          <a:noFill/>
+          <a:ln w="12700">
             <a:solidFill>
-              <a:srgbClr val="4A5A6E"/>
+              <a:srgbClr val="0F2540"/>
             </a:solidFill>
-            <a:prstDash val="dash"/>
           </a:ln>
           <a:effectLst/>
         </p:spPr>
@@ -6578,14 +6638,14 @@
       </p:sp>
       <p:sp>
         <p:nvSpPr>
-          <p:cNvPr id="26" name="TextBox 25"/>
+          <p:cNvPr id="27" name="TextBox 26"/>
           <p:cNvSpPr txBox="1"/>
           <p:nvPr/>
         </p:nvSpPr>
         <p:spPr>
           <a:xfrm>
-            <a:off x="7717536" y="3474720"/>
-            <a:ext cx="3630168" cy="914400"/>
+            <a:off x="7443216" y="5286080"/>
+            <a:ext cx="4178808" cy="640080"/>
           </a:xfrm>
           <a:prstGeom prst="rect">
             <a:avLst/>
@@ -6599,65 +6659,18 @@
           <a:lstStyle/>
           <a:p>
             <a:pPr algn="ctr">
-              <a:spcAft>
-                <a:spcPts val="700"/>
-              </a:spcAft>
+              <a:lnSpc>
+                <a:spcPct val="110000"/>
+              </a:lnSpc>
             </a:pPr>
             <a:r>
-              <a:rPr sz="1400" b="1" i="0">
+              <a:rPr sz="1200" b="0" i="0">
                 <a:solidFill>
                   <a:srgbClr val="4A5A6E"/>
                 </a:solidFill>
                 <a:latin typeface="Calibri"/>
               </a:rPr>
-              <a:t>[ Screenshot: paste UI capture here ]</a:t>
-            </a:r>
-          </a:p>
-          <a:p>
-            <a:pPr algn="ctr"/>
-            <a:r>
-              <a:rPr sz="1200" b="0" i="1">
-                <a:solidFill>
-                  <a:srgbClr val="4A5A6E"/>
-                </a:solidFill>
-                <a:latin typeface="Calibri"/>
-              </a:rPr>
-              <a:t>Front end built; backend in progress at time of writing.</a:t>
-            </a:r>
-          </a:p>
-        </p:txBody>
-      </p:sp>
-      <p:sp>
-        <p:nvSpPr>
-          <p:cNvPr id="27" name="TextBox 26"/>
-          <p:cNvSpPr txBox="1"/>
-          <p:nvPr/>
-        </p:nvSpPr>
-        <p:spPr>
-          <a:xfrm>
-            <a:off x="7443216" y="5980176"/>
-            <a:ext cx="4178808" cy="274320"/>
-          </a:xfrm>
-          <a:prstGeom prst="rect">
-            <a:avLst/>
-          </a:prstGeom>
-          <a:noFill/>
-        </p:spPr>
-        <p:txBody>
-          <a:bodyPr wrap="square" anchor="t" lIns="0" rIns="0" tIns="0" bIns="0">
-            <a:spAutoFit/>
-          </a:bodyPr>
-          <a:lstStyle/>
-          <a:p>
-            <a:pPr algn="ctr"/>
-            <a:r>
-              <a:rPr sz="1200" b="0" i="0">
-                <a:solidFill>
-                  <a:srgbClr val="4A5A6E"/>
-                </a:solidFill>
-                <a:latin typeface="Calibri"/>
-              </a:rPr>
-              <a:t>Live walkthrough delivered in the demo slot.</a:t>
+              <a:t>The pursuit workspace: the five engines — Understand, Strategize, Match, Design, Create — and the requirements bucket they produce.</a:t>
             </a:r>
           </a:p>
         </p:txBody>
